--- a/Fase 1/Evidencias Grupales/Presentación Proyecto.pptx
+++ b/Fase 1/Evidencias Grupales/Presentación Proyecto.pptx
@@ -1,24 +1,33 @@
 
 <file path=ppt/presentation.xml><?xml version="1.0" encoding="utf-8"?>
-<p:presentation xmlns:a="http://schemas.openxmlformats.org/drawingml/2006/main" xmlns:r="http://schemas.openxmlformats.org/officeDocument/2006/relationships" xmlns:mc="http://schemas.openxmlformats.org/markup-compatibility/2006" xmlns:mv="urn:schemas-microsoft-com:mac:vml" xmlns:p="http://schemas.openxmlformats.org/presentationml/2006/main" xmlns:c="http://schemas.openxmlformats.org/drawingml/2006/chart" xmlns:dgm="http://schemas.openxmlformats.org/drawingml/2006/diagram" xmlns:o="urn:schemas-microsoft-com:office:office" xmlns:v="urn:schemas-microsoft-com:vml" xmlns:pvml="urn:schemas-microsoft-com:office:powerpoint" xmlns:com="http://schemas.openxmlformats.org/drawingml/2006/compatibility" xmlns:p14="http://schemas.microsoft.com/office/powerpoint/2010/main" xmlns:p15="http://schemas.microsoft.com/office/powerpoint/2012/main" xmlns:ahyp="http://schemas.microsoft.com/office/drawing/2018/hyperlinkcolor" autoCompressPictures="0" strictFirstAndLastChars="0" saveSubsetFonts="1">
+<p:presentation xmlns:a="http://schemas.openxmlformats.org/drawingml/2006/main" xmlns:r="http://schemas.openxmlformats.org/officeDocument/2006/relationships" xmlns:mc="http://schemas.openxmlformats.org/markup-compatibility/2006" xmlns:mv="urn:schemas-microsoft-com:mac:vml" xmlns:p="http://schemas.openxmlformats.org/presentationml/2006/main" xmlns:c="http://schemas.openxmlformats.org/drawingml/2006/chart" xmlns:dgm="http://schemas.openxmlformats.org/drawingml/2006/diagram" xmlns:o="urn:schemas-microsoft-com:office:office" xmlns:v="urn:schemas-microsoft-com:vml" xmlns:pvml="urn:schemas-microsoft-com:office:powerpoint" xmlns:com="http://schemas.openxmlformats.org/drawingml/2006/compatibility" xmlns:p14="http://schemas.microsoft.com/office/powerpoint/2010/main" xmlns:p15="http://schemas.microsoft.com/office/powerpoint/2012/main" xmlns:ahyp="http://schemas.microsoft.com/office/drawing/2018/hyperlinkcolor" autoCompressPictures="0" embedTrueTypeFonts="1" strictFirstAndLastChars="0" saveSubsetFonts="1">
   <p:sldMasterIdLst>
-    <p:sldMasterId id="2147483648" r:id="rId3"/>
+    <p:sldMasterId id="2147483648" r:id="rId4"/>
   </p:sldMasterIdLst>
   <p:notesMasterIdLst>
-    <p:notesMasterId r:id="rId4"/>
+    <p:notesMasterId r:id="rId5"/>
   </p:notesMasterIdLst>
   <p:sldIdLst>
-    <p:sldId id="256" r:id="rId5"/>
-    <p:sldId id="257" r:id="rId6"/>
-    <p:sldId id="258" r:id="rId7"/>
-    <p:sldId id="259" r:id="rId8"/>
-    <p:sldId id="260" r:id="rId9"/>
-    <p:sldId id="261" r:id="rId10"/>
-    <p:sldId id="262" r:id="rId11"/>
-    <p:sldId id="263" r:id="rId12"/>
+    <p:sldId id="256" r:id="rId6"/>
+    <p:sldId id="257" r:id="rId7"/>
+    <p:sldId id="258" r:id="rId8"/>
+    <p:sldId id="259" r:id="rId9"/>
+    <p:sldId id="260" r:id="rId10"/>
+    <p:sldId id="261" r:id="rId11"/>
+    <p:sldId id="262" r:id="rId12"/>
+    <p:sldId id="263" r:id="rId13"/>
   </p:sldIdLst>
   <p:sldSz cy="6858000" cx="12192000"/>
   <p:notesSz cx="6858000" cy="9144000"/>
+  <p:embeddedFontLst>
+    <p:embeddedFont>
+      <p:font typeface="Carlito"/>
+      <p:regular r:id="rId14"/>
+      <p:bold r:id="rId15"/>
+      <p:italic r:id="rId16"/>
+      <p:boldItalic r:id="rId17"/>
+    </p:embeddedFont>
+  </p:embeddedFontLst>
   <p:defaultTextStyle>
     <a:defPPr lvl="0" marR="0" rtl="0" algn="l">
       <a:lnSpc>
@@ -250,7 +259,7 @@
   </p:defaultTextStyle>
   <p:extLst>
     <p:ext uri="GoogleSlidesCustomDataVersion2">
-      <go:slidesCustomData xmlns:go="http://customooxmlschemas.google.com/" r:id="rId13" roundtripDataSignature="AMtx7mhgl/eH5EcV/ziiIrYZN4kRzvCoiQ=="/>
+      <go:slidesCustomData xmlns:go="http://customooxmlschemas.google.com/" r:id="rId18" roundtripDataSignature="AMtx7mjhhgY/hWnzag9qVraazriqW2A/dg=="/>
     </p:ext>
   </p:extLst>
 </p:presentation>
@@ -1545,7 +1554,7 @@
       </p:grpSpPr>
       <p:sp>
         <p:nvSpPr>
-          <p:cNvPr id="146" name="Google Shape;146;p7:notes"/>
+          <p:cNvPr id="146" name="Google Shape;146;g3f8ca8b3f54_1_12:notes"/>
           <p:cNvSpPr txBox="1"/>
           <p:nvPr>
             <p:ph idx="1" type="body"/>
@@ -1592,7 +1601,7 @@
       </p:sp>
       <p:sp>
         <p:nvSpPr>
-          <p:cNvPr id="147" name="Google Shape;147;p7:notes"/>
+          <p:cNvPr id="147" name="Google Shape;147;g3f8ca8b3f54_1_12:notes"/>
           <p:cNvSpPr/>
           <p:nvPr>
             <p:ph idx="2" type="sldImg"/>
@@ -1601,7 +1610,7 @@
         <p:spPr>
           <a:xfrm>
             <a:off x="1143225" y="685800"/>
-            <a:ext cx="4572225" cy="3429000"/>
+            <a:ext cx="4572300" cy="3429000"/>
           </a:xfrm>
           <a:custGeom>
             <a:rect b="b" l="l" r="r" t="t"/>
@@ -14919,7 +14928,7 @@
         <p:spPr>
           <a:xfrm>
             <a:off x="1" y="2674792"/>
-            <a:ext cx="12192000" cy="1508400"/>
+            <a:ext cx="12192000" cy="2185800"/>
           </a:xfrm>
           <a:prstGeom prst="rect">
             <a:avLst/>
@@ -14965,7 +14974,7 @@
               <a:t>PROYECTO “</a:t>
             </a:r>
             <a:r>
-              <a:rPr b="1" i="1" lang="es-CL" sz="4400">
+              <a:rPr b="1" i="1" lang="es-CL" sz="4400" u="none" cap="none" strike="noStrike">
                 <a:solidFill>
                   <a:schemeClr val="dk1"/>
                 </a:solidFill>
@@ -14974,7 +14983,7 @@
                 <a:cs typeface="Calibri"/>
                 <a:sym typeface="Calibri"/>
               </a:rPr>
-              <a:t>Sistema de Gestión para Banquetería</a:t>
+              <a:t>Sistema de Integral Gestión para Banquetería</a:t>
             </a:r>
             <a:r>
               <a:rPr b="0" i="0" lang="es-CL" sz="4400" u="none" cap="none" strike="noStrike">
@@ -15274,7 +15283,7 @@
                 <a:buNone/>
               </a:pPr>
               <a:r>
-                <a:rPr lang="es-CL" sz="2600">
+                <a:rPr b="0" i="0" lang="es-CL" sz="2600" u="none" cap="none" strike="noStrike">
                   <a:solidFill>
                     <a:schemeClr val="lt1"/>
                   </a:solidFill>
@@ -15283,19 +15292,7 @@
                   <a:cs typeface="Calibri"/>
                   <a:sym typeface="Calibri"/>
                 </a:rPr>
-                <a:t>Madelaine</a:t>
-              </a:r>
-              <a:r>
-                <a:rPr lang="es-CL" sz="2600">
-                  <a:solidFill>
-                    <a:schemeClr val="lt1"/>
-                  </a:solidFill>
-                  <a:latin typeface="Calibri"/>
-                  <a:ea typeface="Calibri"/>
-                  <a:cs typeface="Calibri"/>
-                  <a:sym typeface="Calibri"/>
-                </a:rPr>
-                <a:t> Escobar</a:t>
+                <a:t>Madelaine Escobar</a:t>
               </a:r>
               <a:endParaRPr b="0" i="0" sz="2600" u="none" cap="none" strike="noStrike">
                 <a:solidFill>
@@ -15579,30 +15576,6 @@
                 <a:buNone/>
               </a:pPr>
               <a:r>
-                <a:rPr lang="es-CL" sz="2600">
-                  <a:solidFill>
-                    <a:schemeClr val="lt1"/>
-                  </a:solidFill>
-                  <a:latin typeface="Calibri"/>
-                  <a:ea typeface="Calibri"/>
-                  <a:cs typeface="Calibri"/>
-                  <a:sym typeface="Calibri"/>
-                </a:rPr>
-                <a:t>Sebastián</a:t>
-              </a:r>
-              <a:r>
-                <a:rPr lang="es-CL" sz="2600">
-                  <a:solidFill>
-                    <a:schemeClr val="lt1"/>
-                  </a:solidFill>
-                  <a:latin typeface="Calibri"/>
-                  <a:ea typeface="Calibri"/>
-                  <a:cs typeface="Calibri"/>
-                  <a:sym typeface="Calibri"/>
-                </a:rPr>
-                <a:t> Zú</a:t>
-              </a:r>
-              <a:r>
                 <a:rPr b="0" i="0" lang="es-CL" sz="2600" u="none" cap="none" strike="noStrike">
                   <a:solidFill>
                     <a:schemeClr val="lt1"/>
@@ -15612,19 +15585,7 @@
                   <a:cs typeface="Calibri"/>
                   <a:sym typeface="Calibri"/>
                 </a:rPr>
-                <a:t>ñiga </a:t>
-              </a:r>
-              <a:r>
-                <a:rPr lang="es-CL" sz="2600">
-                  <a:solidFill>
-                    <a:schemeClr val="lt1"/>
-                  </a:solidFill>
-                  <a:latin typeface="Calibri"/>
-                  <a:ea typeface="Calibri"/>
-                  <a:cs typeface="Calibri"/>
-                  <a:sym typeface="Calibri"/>
-                </a:rPr>
-                <a:t>Sepúlveda</a:t>
+                <a:t>Sebastián Zúñiga Sepúlveda</a:t>
               </a:r>
               <a:endParaRPr b="0" i="0" sz="2600" u="none" cap="none" strike="noStrike">
                 <a:solidFill>
@@ -15839,43 +15800,7 @@
                 <a:cs typeface="Calibri"/>
                 <a:sym typeface="Calibri"/>
               </a:rPr>
-              <a:t>PROYECTO “SI</a:t>
-            </a:r>
-            <a:r>
-              <a:rPr lang="es-CL" sz="1800">
-                <a:solidFill>
-                  <a:srgbClr val="757070"/>
-                </a:solidFill>
-                <a:latin typeface="Calibri"/>
-                <a:ea typeface="Calibri"/>
-                <a:cs typeface="Calibri"/>
-                <a:sym typeface="Calibri"/>
-              </a:rPr>
-              <a:t>STEMA DE </a:t>
-            </a:r>
-            <a:r>
-              <a:rPr lang="es-CL" sz="1800">
-                <a:solidFill>
-                  <a:srgbClr val="757070"/>
-                </a:solidFill>
-                <a:latin typeface="Calibri"/>
-                <a:ea typeface="Calibri"/>
-                <a:cs typeface="Calibri"/>
-                <a:sym typeface="Calibri"/>
-              </a:rPr>
-              <a:t>GESTIÓN PARA BANQUETERÍA</a:t>
-            </a:r>
-            <a:r>
-              <a:rPr b="0" i="0" lang="es-CL" sz="1800" u="none" cap="none" strike="noStrike">
-                <a:solidFill>
-                  <a:srgbClr val="757070"/>
-                </a:solidFill>
-                <a:latin typeface="Calibri"/>
-                <a:ea typeface="Calibri"/>
-                <a:cs typeface="Calibri"/>
-                <a:sym typeface="Calibri"/>
-              </a:rPr>
-              <a:t>”</a:t>
+              <a:t>PROYECTO “SISTEMA DE GESTIÓN PARA BANQUETERÍA”</a:t>
             </a:r>
             <a:endParaRPr b="0" i="0" sz="1400" u="none" cap="none" strike="noStrike">
               <a:solidFill>
@@ -15909,7 +15834,7 @@
               <a:srgbClr val="F5F7FC"/>
             </a:solidFill>
             <a:prstDash val="solid"/>
-            <a:miter lim="80"/>
+            <a:miter lim="0"/>
             <a:headEnd len="sm" w="sm" type="none"/>
             <a:tailEnd len="sm" w="sm" type="none"/>
           </a:ln>
@@ -15939,7 +15864,7 @@
               <a:schemeClr val="accent1"/>
             </a:solidFill>
             <a:prstDash val="solid"/>
-            <a:miter lim="80"/>
+            <a:miter lim="0"/>
             <a:headEnd len="sm" w="sm" type="none"/>
             <a:tailEnd len="sm" w="sm" type="none"/>
           </a:ln>
@@ -15981,7 +15906,10 @@
             </a:endParaRPr>
           </a:p>
           <a:p>
-            <a:pPr indent="0" lvl="0" marL="0" rtl="0" algn="ctr">
+            <a:pPr indent="0" lvl="0" marL="0" marR="0" rtl="0" algn="ctr">
+              <a:lnSpc>
+                <a:spcPct val="100000"/>
+              </a:lnSpc>
               <a:spcBef>
                 <a:spcPts val="0"/>
               </a:spcBef>
@@ -15996,7 +15924,7 @@
               <a:buNone/>
             </a:pPr>
             <a:r>
-              <a:rPr b="1" lang="es-CL" sz="3600">
+              <a:rPr b="1" i="0" lang="es-CL" sz="3600" u="none" cap="none" strike="noStrike">
                 <a:solidFill>
                   <a:schemeClr val="dk1"/>
                 </a:solidFill>
@@ -16007,7 +15935,7 @@
               </a:rPr>
               <a:t>INTEGRANTES DEL PROYECTO</a:t>
             </a:r>
-            <a:endParaRPr b="1" sz="1800">
+            <a:endParaRPr b="1" i="0" sz="1800" u="none" cap="none" strike="noStrike">
               <a:solidFill>
                 <a:schemeClr val="dk1"/>
               </a:solidFill>
@@ -16038,7 +15966,7 @@
             <a:r>
               <a:t/>
             </a:r>
-            <a:endParaRPr sz="1800" u="sng">
+            <a:endParaRPr b="0" i="0" sz="1800" u="sng" cap="none" strike="noStrike">
               <a:solidFill>
                 <a:schemeClr val="dk1"/>
               </a:solidFill>
@@ -16084,13 +16012,12 @@
           <p:cNvPicPr preferRelativeResize="0"/>
           <p:nvPr/>
         </p:nvPicPr>
-        <p:blipFill>
+        <p:blipFill rotWithShape="1">
           <a:blip r:embed="rId3">
             <a:alphaModFix/>
           </a:blip>
-          <a:stretch>
-            <a:fillRect/>
-          </a:stretch>
+          <a:srcRect b="0" l="0" r="0" t="0"/>
+          <a:stretch/>
         </p:blipFill>
         <p:spPr>
           <a:xfrm>
@@ -16158,7 +16085,10 @@
           </a:bodyPr>
           <a:lstStyle/>
           <a:p>
-            <a:pPr indent="0" lvl="0" marL="0" rtl="0" algn="l">
+            <a:pPr indent="0" lvl="0" marL="0" marR="0" rtl="0" algn="l">
+              <a:lnSpc>
+                <a:spcPct val="100000"/>
+              </a:lnSpc>
               <a:spcBef>
                 <a:spcPts val="0"/>
               </a:spcBef>
@@ -16173,7 +16103,7 @@
               <a:buNone/>
             </a:pPr>
             <a:r>
-              <a:rPr lang="es-CL" sz="1800">
+              <a:rPr b="0" i="0" lang="es-CL" sz="1800" u="none" cap="none" strike="noStrike">
                 <a:solidFill>
                   <a:srgbClr val="757070"/>
                 </a:solidFill>
@@ -16282,7 +16212,7 @@
               <a:srgbClr val="F5F7FC"/>
             </a:solidFill>
             <a:prstDash val="solid"/>
-            <a:miter lim="80"/>
+            <a:miter lim="0"/>
             <a:headEnd len="sm" w="sm" type="none"/>
             <a:tailEnd len="sm" w="sm" type="none"/>
           </a:ln>
@@ -16312,7 +16242,7 @@
               <a:schemeClr val="accent1"/>
             </a:solidFill>
             <a:prstDash val="solid"/>
-            <a:miter lim="80"/>
+            <a:miter lim="0"/>
             <a:headEnd len="sm" w="sm" type="none"/>
             <a:tailEnd len="sm" w="sm" type="none"/>
           </a:ln>
@@ -16412,42 +16342,62 @@
               <a:buNone/>
             </a:pPr>
             <a:r>
-              <a:rPr lang="es-CL" sz="1800">
+              <a:rPr b="0" i="0" lang="es-CL" sz="1800" u="none" cap="none" strike="noStrike">
                 <a:solidFill>
                   <a:schemeClr val="dk1"/>
                 </a:solidFill>
+                <a:latin typeface="Arial"/>
+                <a:ea typeface="Arial"/>
+                <a:cs typeface="Arial"/>
+                <a:sym typeface="Arial"/>
               </a:rPr>
               <a:t>La empresa de banquetería actualmente gestiona sus operaciones de forma </a:t>
             </a:r>
             <a:r>
-              <a:rPr b="1" lang="es-CL" sz="1800">
+              <a:rPr b="1" i="0" lang="es-CL" sz="1800" u="none" cap="none" strike="noStrike">
                 <a:solidFill>
                   <a:schemeClr val="dk1"/>
                 </a:solidFill>
+                <a:latin typeface="Arial"/>
+                <a:ea typeface="Arial"/>
+                <a:cs typeface="Arial"/>
+                <a:sym typeface="Arial"/>
               </a:rPr>
               <a:t>manual y dispersa</a:t>
             </a:r>
             <a:r>
-              <a:rPr lang="es-CL" sz="1800">
+              <a:rPr b="0" i="0" lang="es-CL" sz="1800" u="none" cap="none" strike="noStrike">
                 <a:solidFill>
                   <a:schemeClr val="dk1"/>
                 </a:solidFill>
+                <a:latin typeface="Arial"/>
+                <a:ea typeface="Arial"/>
+                <a:cs typeface="Arial"/>
+                <a:sym typeface="Arial"/>
               </a:rPr>
               <a:t>, utilizando planillas, correos y sistemas separados. Esto provoca </a:t>
             </a:r>
             <a:r>
-              <a:rPr b="1" lang="es-CL" sz="1800">
+              <a:rPr b="1" i="0" lang="es-CL" sz="1800" u="none" cap="none" strike="noStrike">
                 <a:solidFill>
                   <a:schemeClr val="dk1"/>
                 </a:solidFill>
+                <a:latin typeface="Arial"/>
+                <a:ea typeface="Arial"/>
+                <a:cs typeface="Arial"/>
+                <a:sym typeface="Arial"/>
               </a:rPr>
               <a:t>pérdida de información, errores en los pedidos, falta de control del inventario y poca visibilidad de la rentabilidad de cada evento</a:t>
             </a:r>
             <a:r>
-              <a:rPr lang="es-CL" sz="1800">
+              <a:rPr b="0" i="0" lang="es-CL" sz="1800" u="none" cap="none" strike="noStrike">
                 <a:solidFill>
                   <a:schemeClr val="dk1"/>
                 </a:solidFill>
+                <a:latin typeface="Arial"/>
+                <a:ea typeface="Arial"/>
+                <a:cs typeface="Arial"/>
+                <a:sym typeface="Arial"/>
               </a:rPr>
               <a:t>. </a:t>
             </a:r>
@@ -16518,7 +16468,7 @@
               <a:schemeClr val="accent1"/>
             </a:solidFill>
             <a:prstDash val="solid"/>
-            <a:miter lim="80"/>
+            <a:miter lim="0"/>
             <a:headEnd len="sm" w="sm" type="none"/>
             <a:tailEnd len="sm" w="sm" type="none"/>
           </a:ln>
@@ -16569,7 +16519,10 @@
             </a:endParaRPr>
           </a:p>
           <a:p>
-            <a:pPr indent="0" lvl="0" marL="0" rtl="0" algn="just">
+            <a:pPr indent="0" lvl="0" marL="0" marR="0" rtl="0" algn="just">
+              <a:lnSpc>
+                <a:spcPct val="100000"/>
+              </a:lnSpc>
               <a:spcBef>
                 <a:spcPts val="0"/>
               </a:spcBef>
@@ -16586,7 +16539,7 @@
             <a:r>
               <a:t/>
             </a:r>
-            <a:endParaRPr sz="1800">
+            <a:endParaRPr b="0" i="0" sz="1800" u="none" cap="none" strike="noStrike">
               <a:solidFill>
                 <a:schemeClr val="dk1"/>
               </a:solidFill>
@@ -16615,14 +16568,18 @@
               <a:buNone/>
             </a:pPr>
             <a:r>
-              <a:rPr lang="es-CL" sz="1800">
+              <a:rPr b="0" i="0" lang="es-CL" sz="1800" u="none" cap="none" strike="noStrike">
                 <a:solidFill>
                   <a:schemeClr val="dk1"/>
                 </a:solidFill>
+                <a:latin typeface="Arial"/>
+                <a:ea typeface="Arial"/>
+                <a:cs typeface="Arial"/>
+                <a:sym typeface="Arial"/>
               </a:rPr>
               <a:t>Crear un sistema web y móvil que centralice y optimice la gestión de la banquetería, integrando pedidos, inventario, facturación y rentabilidad en una sola plataforma. </a:t>
             </a:r>
-            <a:endParaRPr i="0" sz="1800" u="none" cap="none" strike="noStrike">
+            <a:endParaRPr b="0" i="0" sz="1800" u="none" cap="none" strike="noStrike">
               <a:solidFill>
                 <a:schemeClr val="dk1"/>
               </a:solidFill>
@@ -16659,7 +16616,7 @@
               <a:srgbClr val="1C3052"/>
             </a:solidFill>
             <a:prstDash val="solid"/>
-            <a:miter lim="80"/>
+            <a:miter lim="0"/>
             <a:headEnd len="sm" w="sm" type="none"/>
             <a:tailEnd len="sm" w="sm" type="none"/>
           </a:ln>
@@ -16907,13 +16864,12 @@
           <p:cNvPicPr preferRelativeResize="0"/>
           <p:nvPr/>
         </p:nvPicPr>
-        <p:blipFill>
+        <p:blipFill rotWithShape="1">
           <a:blip r:embed="rId3">
             <a:alphaModFix/>
           </a:blip>
-          <a:stretch>
-            <a:fillRect/>
-          </a:stretch>
+          <a:srcRect b="0" l="0" r="0" t="0"/>
+          <a:stretch/>
         </p:blipFill>
         <p:spPr>
           <a:xfrm>
@@ -16981,7 +16937,10 @@
           </a:bodyPr>
           <a:lstStyle/>
           <a:p>
-            <a:pPr indent="0" lvl="0" marL="0" rtl="0" algn="l">
+            <a:pPr indent="0" lvl="0" marL="0" marR="0" rtl="0" algn="l">
+              <a:lnSpc>
+                <a:spcPct val="100000"/>
+              </a:lnSpc>
               <a:spcBef>
                 <a:spcPts val="0"/>
               </a:spcBef>
@@ -16996,7 +16955,7 @@
               <a:buNone/>
             </a:pPr>
             <a:r>
-              <a:rPr lang="es-CL" sz="1800">
+              <a:rPr b="0" i="0" lang="es-CL" sz="1800" u="none" cap="none" strike="noStrike">
                 <a:solidFill>
                   <a:srgbClr val="757070"/>
                 </a:solidFill>
@@ -17105,7 +17064,7 @@
               <a:srgbClr val="F5F7FC"/>
             </a:solidFill>
             <a:prstDash val="solid"/>
-            <a:miter lim="80"/>
+            <a:miter lim="0"/>
             <a:headEnd len="sm" w="sm" type="none"/>
             <a:tailEnd len="sm" w="sm" type="none"/>
           </a:ln>
@@ -17201,7 +17160,7 @@
               <a:schemeClr val="accent1"/>
             </a:solidFill>
             <a:prstDash val="solid"/>
-            <a:miter lim="80"/>
+            <a:miter lim="0"/>
             <a:headEnd len="sm" w="sm" type="none"/>
             <a:tailEnd len="sm" w="sm" type="none"/>
           </a:ln>
@@ -17230,7 +17189,7 @@
               <a:buNone/>
             </a:pPr>
             <a:r>
-              <a:rPr lang="es-CL" sz="1800">
+              <a:rPr b="0" i="0" lang="es-CL" sz="1800" u="none" cap="none" strike="noStrike">
                 <a:solidFill>
                   <a:schemeClr val="dk1"/>
                 </a:solidFill>
@@ -17239,7 +17198,19 @@
                 <a:cs typeface="Calibri"/>
                 <a:sym typeface="Calibri"/>
               </a:rPr>
-              <a:t>Desarrollar un sistema integral web y móvil para centralizar y optimizar la gestión de una empresa de banquetería, integrando clientes, pedidos, inventario, facturación y rentabilidad, con apoyo de dashboards, control por roles e inteligencia artificial. </a:t>
+              <a:t>Desarrollar un sistema integral web y móvil para centralizar y optimizar la gestión de una empresa de banquetería, integrando clientes, pedidos, inventario, facturación y rentabilidad, con apoyo de dashboards, control por roles</a:t>
+            </a:r>
+            <a:r>
+              <a:rPr lang="es-CL" sz="1800">
+                <a:solidFill>
+                  <a:schemeClr val="dk1"/>
+                </a:solidFill>
+                <a:latin typeface="Calibri"/>
+                <a:ea typeface="Calibri"/>
+                <a:cs typeface="Calibri"/>
+                <a:sym typeface="Calibri"/>
+              </a:rPr>
+              <a:t>.</a:t>
             </a:r>
             <a:endParaRPr b="0" i="0" sz="1800" u="none" cap="none" strike="noStrike">
               <a:solidFill>
@@ -17277,7 +17248,7 @@
               <a:schemeClr val="accent1"/>
             </a:solidFill>
             <a:prstDash val="solid"/>
-            <a:miter lim="80"/>
+            <a:miter lim="0"/>
             <a:headEnd len="sm" w="sm" type="none"/>
             <a:tailEnd len="sm" w="sm" type="none"/>
           </a:ln>
@@ -17288,7 +17259,10 @@
           </a:bodyPr>
           <a:lstStyle/>
           <a:p>
-            <a:pPr indent="0" lvl="0" marL="0" rtl="0" algn="ctr">
+            <a:pPr indent="0" lvl="0" marL="0" marR="0" rtl="0" algn="ctr">
+              <a:lnSpc>
+                <a:spcPct val="100000"/>
+              </a:lnSpc>
               <a:spcBef>
                 <a:spcPts val="0"/>
               </a:spcBef>
@@ -17303,29 +17277,44 @@
               <a:buNone/>
             </a:pPr>
             <a:r>
-              <a:rPr b="1" lang="es-CL" sz="1500">
+              <a:rPr b="1" i="0" lang="es-CL" sz="1500" u="none" cap="none" strike="noStrike">
                 <a:solidFill>
                   <a:schemeClr val="dk1"/>
                 </a:solidFill>
+                <a:latin typeface="Arial"/>
+                <a:ea typeface="Arial"/>
+                <a:cs typeface="Arial"/>
+                <a:sym typeface="Arial"/>
               </a:rPr>
               <a:t>Analizar y modelar</a:t>
             </a:r>
             <a:r>
-              <a:rPr lang="es-CL" sz="1500">
+              <a:rPr b="0" i="0" lang="es-CL" sz="1500" u="none" cap="none" strike="noStrike">
                 <a:solidFill>
                   <a:schemeClr val="dk1"/>
                 </a:solidFill>
+                <a:latin typeface="Arial"/>
+                <a:ea typeface="Arial"/>
+                <a:cs typeface="Arial"/>
+                <a:sym typeface="Arial"/>
               </a:rPr>
               <a:t> el proceso actual de la banquetería y diseñar la arquitectura del sistema.</a:t>
             </a:r>
-            <a:endParaRPr sz="1500">
+            <a:endParaRPr b="0" i="0" sz="1500" u="none" cap="none" strike="noStrike">
               <a:solidFill>
                 <a:schemeClr val="dk1"/>
               </a:solidFill>
+              <a:latin typeface="Arial"/>
+              <a:ea typeface="Arial"/>
+              <a:cs typeface="Arial"/>
+              <a:sym typeface="Arial"/>
             </a:endParaRPr>
           </a:p>
           <a:p>
-            <a:pPr indent="0" lvl="0" marL="0" rtl="0" algn="ctr">
+            <a:pPr indent="0" lvl="0" marL="0" marR="0" rtl="0" algn="ctr">
+              <a:lnSpc>
+                <a:spcPct val="100000"/>
+              </a:lnSpc>
               <a:spcBef>
                 <a:spcPts val="0"/>
               </a:spcBef>
@@ -17340,37 +17329,44 @@
               <a:buNone/>
             </a:pPr>
             <a:r>
-              <a:rPr b="1" lang="es-CL" sz="1500">
+              <a:rPr b="1" i="0" lang="es-CL" sz="1500" u="none" cap="none" strike="noStrike">
                 <a:solidFill>
                   <a:schemeClr val="dk1"/>
                 </a:solidFill>
+                <a:latin typeface="Arial"/>
+                <a:ea typeface="Arial"/>
+                <a:cs typeface="Arial"/>
+                <a:sym typeface="Arial"/>
               </a:rPr>
               <a:t>Desarrollar</a:t>
             </a:r>
             <a:r>
-              <a:rPr lang="es-CL" sz="1500">
+              <a:rPr b="0" i="0" lang="es-CL" sz="1500" u="none" cap="none" strike="noStrike">
                 <a:solidFill>
                   <a:schemeClr val="dk1"/>
                 </a:solidFill>
+                <a:latin typeface="Arial"/>
+                <a:ea typeface="Arial"/>
+                <a:cs typeface="Arial"/>
+                <a:sym typeface="Arial"/>
               </a:rPr>
-              <a:t> </a:t>
+              <a:t> módulos para gestionar clientes y pedidos, incorporando estados, trazabilidad y auditoría.</a:t>
             </a:r>
-            <a:r>
-              <a:rPr lang="es-CL" sz="1500">
-                <a:solidFill>
-                  <a:schemeClr val="dk1"/>
-                </a:solidFill>
-              </a:rPr>
-              <a:t>módulos para gestionar clientes y pedidos, incorporando estados, trazabilidad y auditoría.</a:t>
-            </a:r>
-            <a:endParaRPr sz="1500">
+            <a:endParaRPr b="0" i="0" sz="1500" u="none" cap="none" strike="noStrike">
               <a:solidFill>
                 <a:schemeClr val="dk1"/>
               </a:solidFill>
+              <a:latin typeface="Arial"/>
+              <a:ea typeface="Arial"/>
+              <a:cs typeface="Arial"/>
+              <a:sym typeface="Arial"/>
             </a:endParaRPr>
           </a:p>
           <a:p>
-            <a:pPr indent="0" lvl="0" marL="0" rtl="0" algn="ctr">
+            <a:pPr indent="0" lvl="0" marL="0" marR="0" rtl="0" algn="ctr">
+              <a:lnSpc>
+                <a:spcPct val="100000"/>
+              </a:lnSpc>
               <a:spcBef>
                 <a:spcPts val="0"/>
               </a:spcBef>
@@ -17385,29 +17381,44 @@
               <a:buNone/>
             </a:pPr>
             <a:r>
-              <a:rPr b="1" lang="es-CL" sz="1500">
+              <a:rPr b="1" i="0" lang="es-CL" sz="1500" u="none" cap="none" strike="noStrike">
                 <a:solidFill>
                   <a:schemeClr val="dk1"/>
                 </a:solidFill>
+                <a:latin typeface="Arial"/>
+                <a:ea typeface="Arial"/>
+                <a:cs typeface="Arial"/>
+                <a:sym typeface="Arial"/>
               </a:rPr>
               <a:t>Implementar</a:t>
             </a:r>
             <a:r>
-              <a:rPr lang="es-CL" sz="1500">
+              <a:rPr b="0" i="0" lang="es-CL" sz="1500" u="none" cap="none" strike="noStrike">
                 <a:solidFill>
                   <a:schemeClr val="dk1"/>
                 </a:solidFill>
+                <a:latin typeface="Arial"/>
+                <a:ea typeface="Arial"/>
+                <a:cs typeface="Arial"/>
+                <a:sym typeface="Arial"/>
               </a:rPr>
               <a:t> fichas técnicas y un cotizador que permita calcular costos, márgenes y precios sugeridos.</a:t>
             </a:r>
-            <a:endParaRPr sz="1500">
+            <a:endParaRPr b="0" i="0" sz="1500" u="none" cap="none" strike="noStrike">
               <a:solidFill>
                 <a:schemeClr val="dk1"/>
               </a:solidFill>
+              <a:latin typeface="Arial"/>
+              <a:ea typeface="Arial"/>
+              <a:cs typeface="Arial"/>
+              <a:sym typeface="Arial"/>
             </a:endParaRPr>
           </a:p>
           <a:p>
-            <a:pPr indent="0" lvl="0" marL="0" rtl="0" algn="ctr">
+            <a:pPr indent="0" lvl="0" marL="0" marR="0" rtl="0" algn="ctr">
+              <a:lnSpc>
+                <a:spcPct val="100000"/>
+              </a:lnSpc>
               <a:spcBef>
                 <a:spcPts val="0"/>
               </a:spcBef>
@@ -17422,29 +17433,44 @@
               <a:buNone/>
             </a:pPr>
             <a:r>
-              <a:rPr b="1" lang="es-CL" sz="1500">
+              <a:rPr b="1" i="0" lang="es-CL" sz="1500" u="none" cap="none" strike="noStrike">
                 <a:solidFill>
                   <a:schemeClr val="dk1"/>
                 </a:solidFill>
+                <a:latin typeface="Arial"/>
+                <a:ea typeface="Arial"/>
+                <a:cs typeface="Arial"/>
+                <a:sym typeface="Arial"/>
               </a:rPr>
               <a:t>Gestionar</a:t>
             </a:r>
             <a:r>
-              <a:rPr lang="es-CL" sz="1500">
+              <a:rPr b="0" i="0" lang="es-CL" sz="1500" u="none" cap="none" strike="noStrike">
                 <a:solidFill>
                   <a:schemeClr val="dk1"/>
                 </a:solidFill>
+                <a:latin typeface="Arial"/>
+                <a:ea typeface="Arial"/>
+                <a:cs typeface="Arial"/>
+                <a:sym typeface="Arial"/>
               </a:rPr>
               <a:t> el inventario mediante tecnología QR y registrar el consumo real de cada evento.</a:t>
             </a:r>
-            <a:endParaRPr sz="1500">
+            <a:endParaRPr b="0" i="0" sz="1500" u="none" cap="none" strike="noStrike">
               <a:solidFill>
                 <a:schemeClr val="dk1"/>
               </a:solidFill>
+              <a:latin typeface="Arial"/>
+              <a:ea typeface="Arial"/>
+              <a:cs typeface="Arial"/>
+              <a:sym typeface="Arial"/>
             </a:endParaRPr>
           </a:p>
           <a:p>
-            <a:pPr indent="0" lvl="0" marL="0" rtl="0" algn="ctr">
+            <a:pPr indent="0" lvl="0" marL="0" marR="0" rtl="0" algn="ctr">
+              <a:lnSpc>
+                <a:spcPct val="100000"/>
+              </a:lnSpc>
               <a:spcBef>
                 <a:spcPts val="0"/>
               </a:spcBef>
@@ -17459,29 +17485,44 @@
               <a:buNone/>
             </a:pPr>
             <a:r>
-              <a:rPr b="1" lang="es-CL" sz="1500">
+              <a:rPr b="1" i="0" lang="es-CL" sz="1500" u="none" cap="none" strike="noStrike">
                 <a:solidFill>
                   <a:schemeClr val="dk1"/>
                 </a:solidFill>
+                <a:latin typeface="Arial"/>
+                <a:ea typeface="Arial"/>
+                <a:cs typeface="Arial"/>
+                <a:sym typeface="Arial"/>
               </a:rPr>
               <a:t>Desarrollar</a:t>
             </a:r>
             <a:r>
-              <a:rPr lang="es-CL" sz="1500">
+              <a:rPr b="0" i="0" lang="es-CL" sz="1500" u="none" cap="none" strike="noStrike">
                 <a:solidFill>
                   <a:schemeClr val="dk1"/>
                 </a:solidFill>
+                <a:latin typeface="Arial"/>
+                <a:ea typeface="Arial"/>
+                <a:cs typeface="Arial"/>
+                <a:sym typeface="Arial"/>
               </a:rPr>
               <a:t> un BackOffice con dashboard de indicadores (KPIs) y un sistema de alertas de riesgo.</a:t>
             </a:r>
-            <a:endParaRPr sz="1500">
+            <a:endParaRPr b="0" i="0" sz="1500" u="none" cap="none" strike="noStrike">
               <a:solidFill>
                 <a:schemeClr val="dk1"/>
               </a:solidFill>
+              <a:latin typeface="Arial"/>
+              <a:ea typeface="Arial"/>
+              <a:cs typeface="Arial"/>
+              <a:sym typeface="Arial"/>
             </a:endParaRPr>
           </a:p>
           <a:p>
-            <a:pPr indent="0" lvl="0" marL="0" rtl="0" algn="ctr">
+            <a:pPr indent="0" lvl="0" marL="0" marR="0" rtl="0" algn="ctr">
+              <a:lnSpc>
+                <a:spcPct val="100000"/>
+              </a:lnSpc>
               <a:spcBef>
                 <a:spcPts val="0"/>
               </a:spcBef>
@@ -17496,29 +17537,44 @@
               <a:buNone/>
             </a:pPr>
             <a:r>
-              <a:rPr b="1" lang="es-CL" sz="1500">
+              <a:rPr b="1" i="0" lang="es-CL" sz="1500" u="none" cap="none" strike="noStrike">
                 <a:solidFill>
                   <a:schemeClr val="dk1"/>
                 </a:solidFill>
+                <a:latin typeface="Arial"/>
+                <a:ea typeface="Arial"/>
+                <a:cs typeface="Arial"/>
+                <a:sym typeface="Arial"/>
               </a:rPr>
               <a:t>Crear</a:t>
             </a:r>
             <a:r>
-              <a:rPr lang="es-CL" sz="1500">
+              <a:rPr b="0" i="0" lang="es-CL" sz="1500" u="none" cap="none" strike="noStrike">
                 <a:solidFill>
                   <a:schemeClr val="dk1"/>
                 </a:solidFill>
+                <a:latin typeface="Arial"/>
+                <a:ea typeface="Arial"/>
+                <a:cs typeface="Arial"/>
+                <a:sym typeface="Arial"/>
               </a:rPr>
               <a:t> una aplicación móvil para la gestión en terreno, incluyendo checklist, actualización de estados e incidencias.</a:t>
             </a:r>
-            <a:endParaRPr sz="1500">
+            <a:endParaRPr b="0" i="0" sz="1500" u="none" cap="none" strike="noStrike">
               <a:solidFill>
                 <a:schemeClr val="dk1"/>
               </a:solidFill>
+              <a:latin typeface="Arial"/>
+              <a:ea typeface="Arial"/>
+              <a:cs typeface="Arial"/>
+              <a:sym typeface="Arial"/>
             </a:endParaRPr>
           </a:p>
           <a:p>
-            <a:pPr indent="0" lvl="0" marL="0" rtl="0" algn="ctr">
+            <a:pPr indent="0" lvl="0" marL="0" marR="0" rtl="0" algn="ctr">
+              <a:lnSpc>
+                <a:spcPct val="100000"/>
+              </a:lnSpc>
               <a:spcBef>
                 <a:spcPts val="0"/>
               </a:spcBef>
@@ -17533,37 +17589,44 @@
               <a:buNone/>
             </a:pPr>
             <a:r>
-              <a:rPr b="1" lang="es-CL" sz="1500">
+              <a:rPr b="1" i="0" lang="es-CL" sz="1500" u="none" cap="none" strike="noStrike">
                 <a:solidFill>
                   <a:schemeClr val="dk1"/>
                 </a:solidFill>
+                <a:latin typeface="Arial"/>
+                <a:ea typeface="Arial"/>
+                <a:cs typeface="Arial"/>
+                <a:sym typeface="Arial"/>
               </a:rPr>
               <a:t>Incorporar</a:t>
             </a:r>
             <a:r>
-              <a:rPr lang="es-CL" sz="1500">
+              <a:rPr b="0" i="0" lang="es-CL" sz="1500" u="none" cap="none" strike="noStrike">
                 <a:solidFill>
                   <a:schemeClr val="dk1"/>
                 </a:solidFill>
+                <a:latin typeface="Arial"/>
+                <a:ea typeface="Arial"/>
+                <a:cs typeface="Arial"/>
+                <a:sym typeface="Arial"/>
               </a:rPr>
-              <a:t> </a:t>
+              <a:t> un asistente de inteligencia artificial para realizar consultas operativas sobre pedidos, stock y rentabilidad.</a:t>
             </a:r>
-            <a:r>
-              <a:rPr lang="es-CL" sz="1500">
-                <a:solidFill>
-                  <a:schemeClr val="dk1"/>
-                </a:solidFill>
-              </a:rPr>
-              <a:t>un asistente de inteligencia artificial para realizar consultas operativas sobre pedidos, stock y rentabilidad.</a:t>
-            </a:r>
-            <a:endParaRPr sz="1500">
+            <a:endParaRPr b="0" i="0" sz="1500" u="none" cap="none" strike="noStrike">
               <a:solidFill>
                 <a:schemeClr val="dk1"/>
               </a:solidFill>
+              <a:latin typeface="Arial"/>
+              <a:ea typeface="Arial"/>
+              <a:cs typeface="Arial"/>
+              <a:sym typeface="Arial"/>
             </a:endParaRPr>
           </a:p>
           <a:p>
-            <a:pPr indent="0" lvl="0" marL="0" rtl="0" algn="ctr">
+            <a:pPr indent="0" lvl="0" marL="0" marR="0" rtl="0" algn="ctr">
+              <a:lnSpc>
+                <a:spcPct val="100000"/>
+              </a:lnSpc>
               <a:spcBef>
                 <a:spcPts val="0"/>
               </a:spcBef>
@@ -17578,33 +17641,37 @@
               <a:buNone/>
             </a:pPr>
             <a:r>
-              <a:rPr b="1" lang="es-CL" sz="1500">
+              <a:rPr b="1" i="0" lang="es-CL" sz="1500" u="none" cap="none" strike="noStrike">
                 <a:solidFill>
                   <a:schemeClr val="dk1"/>
                 </a:solidFill>
+                <a:latin typeface="Arial"/>
+                <a:ea typeface="Arial"/>
+                <a:cs typeface="Arial"/>
+                <a:sym typeface="Arial"/>
               </a:rPr>
               <a:t>Validar</a:t>
             </a:r>
             <a:r>
-              <a:rPr lang="es-CL" sz="1500">
+              <a:rPr b="0" i="0" lang="es-CL" sz="1500" u="none" cap="none" strike="noStrike">
                 <a:solidFill>
                   <a:schemeClr val="dk1"/>
                 </a:solidFill>
+                <a:latin typeface="Arial"/>
+                <a:ea typeface="Arial"/>
+                <a:cs typeface="Arial"/>
+                <a:sym typeface="Arial"/>
               </a:rPr>
-              <a:t> </a:t>
+              <a:t> el sistema mediante casos de prueba basados en eventos reales y documentar sus resultados.</a:t>
             </a:r>
-            <a:r>
-              <a:rPr lang="es-CL" sz="1500">
-                <a:solidFill>
-                  <a:schemeClr val="dk1"/>
-                </a:solidFill>
-              </a:rPr>
-              <a:t>el sistema mediante casos de prueba basados en eventos reales y documentar sus resultados.</a:t>
-            </a:r>
-            <a:endParaRPr sz="1500">
+            <a:endParaRPr b="0" i="0" sz="1500" u="none" cap="none" strike="noStrike">
               <a:solidFill>
                 <a:schemeClr val="dk1"/>
               </a:solidFill>
+              <a:latin typeface="Arial"/>
+              <a:ea typeface="Arial"/>
+              <a:cs typeface="Arial"/>
+              <a:sym typeface="Arial"/>
             </a:endParaRPr>
           </a:p>
           <a:p>
@@ -17628,7 +17695,7 @@
             <a:r>
               <a:t/>
             </a:r>
-            <a:endParaRPr sz="1800">
+            <a:endParaRPr b="0" i="0" sz="1800" u="none" cap="none" strike="noStrike">
               <a:solidFill>
                 <a:schemeClr val="dk1"/>
               </a:solidFill>
@@ -17792,13 +17859,12 @@
           <p:cNvPicPr preferRelativeResize="0"/>
           <p:nvPr/>
         </p:nvPicPr>
-        <p:blipFill>
+        <p:blipFill rotWithShape="1">
           <a:blip r:embed="rId3">
             <a:alphaModFix/>
           </a:blip>
-          <a:stretch>
-            <a:fillRect/>
-          </a:stretch>
+          <a:srcRect b="0" l="0" r="0" t="0"/>
+          <a:stretch/>
         </p:blipFill>
         <p:spPr>
           <a:xfrm>
@@ -17866,7 +17932,10 @@
           </a:bodyPr>
           <a:lstStyle/>
           <a:p>
-            <a:pPr indent="0" lvl="0" marL="0" rtl="0" algn="l">
+            <a:pPr indent="0" lvl="0" marL="0" marR="0" rtl="0" algn="l">
+              <a:lnSpc>
+                <a:spcPct val="100000"/>
+              </a:lnSpc>
               <a:spcBef>
                 <a:spcPts val="0"/>
               </a:spcBef>
@@ -17881,7 +17950,7 @@
               <a:buNone/>
             </a:pPr>
             <a:r>
-              <a:rPr lang="es-CL" sz="1800">
+              <a:rPr b="0" i="0" lang="es-CL" sz="1800" u="none" cap="none" strike="noStrike">
                 <a:solidFill>
                   <a:srgbClr val="757070"/>
                 </a:solidFill>
@@ -17990,7 +18059,7 @@
               <a:srgbClr val="F5F7FC"/>
             </a:solidFill>
             <a:prstDash val="solid"/>
-            <a:miter lim="80"/>
+            <a:miter lim="0"/>
             <a:headEnd len="sm" w="sm" type="none"/>
             <a:tailEnd len="sm" w="sm" type="none"/>
           </a:ln>
@@ -18020,7 +18089,7 @@
               <a:schemeClr val="accent1"/>
             </a:solidFill>
             <a:prstDash val="solid"/>
-            <a:miter lim="80"/>
+            <a:miter lim="0"/>
             <a:headEnd len="sm" w="sm" type="none"/>
             <a:tailEnd len="sm" w="sm" type="none"/>
           </a:ln>
@@ -18031,7 +18100,10 @@
           </a:bodyPr>
           <a:lstStyle/>
           <a:p>
-            <a:pPr indent="0" lvl="0" marL="0" rtl="0" algn="ctr">
+            <a:pPr indent="0" lvl="0" marL="0" marR="0" rtl="0" algn="ctr">
+              <a:lnSpc>
+                <a:spcPct val="100000"/>
+              </a:lnSpc>
               <a:spcBef>
                 <a:spcPts val="0"/>
               </a:spcBef>
@@ -18048,14 +18120,18 @@
             <a:r>
               <a:t/>
             </a:r>
-            <a:endParaRPr sz="1500">
+            <a:endParaRPr b="0" i="0" sz="1500" u="none" cap="none" strike="noStrike">
               <a:solidFill>
                 <a:schemeClr val="dk1"/>
               </a:solidFill>
+              <a:latin typeface="Arial"/>
+              <a:ea typeface="Arial"/>
+              <a:cs typeface="Arial"/>
+              <a:sym typeface="Arial"/>
             </a:endParaRPr>
           </a:p>
           <a:p>
-            <a:pPr indent="0" lvl="0" marL="0" rtl="0" algn="l">
+            <a:pPr indent="0" lvl="0" marL="0" marR="0" rtl="0" algn="l">
               <a:lnSpc>
                 <a:spcPct val="115000"/>
               </a:lnSpc>
@@ -18073,21 +18149,29 @@
               <a:buNone/>
             </a:pPr>
             <a:r>
-              <a:rPr b="1" lang="es-CL" sz="2000">
+              <a:rPr b="1" i="0" lang="es-CL" sz="2000" u="none" cap="none" strike="noStrike">
                 <a:solidFill>
                   <a:schemeClr val="dk1"/>
                 </a:solidFill>
+                <a:latin typeface="Arial"/>
+                <a:ea typeface="Arial"/>
+                <a:cs typeface="Arial"/>
+                <a:sym typeface="Arial"/>
               </a:rPr>
               <a:t>Alcances</a:t>
             </a:r>
-            <a:endParaRPr b="1" sz="2000">
+            <a:endParaRPr b="1" i="0" sz="2000" u="none" cap="none" strike="noStrike">
               <a:solidFill>
                 <a:schemeClr val="dk1"/>
               </a:solidFill>
+              <a:latin typeface="Arial"/>
+              <a:ea typeface="Arial"/>
+              <a:cs typeface="Arial"/>
+              <a:sym typeface="Arial"/>
             </a:endParaRPr>
           </a:p>
           <a:p>
-            <a:pPr indent="-342900" lvl="0" marL="457200" rtl="0" algn="l">
+            <a:pPr indent="-342900" lvl="0" marL="457200" marR="0" rtl="0" algn="l">
               <a:lnSpc>
                 <a:spcPct val="115000"/>
               </a:lnSpc>
@@ -18101,32 +18185,45 @@
                 <a:schemeClr val="dk1"/>
               </a:buClr>
               <a:buSzPts val="1800"/>
+              <a:buFont typeface="Arial"/>
               <a:buChar char="●"/>
             </a:pPr>
             <a:r>
-              <a:rPr b="1" lang="es-CL" sz="1800">
+              <a:rPr b="1" i="0" lang="es-CL" sz="1800" u="none" cap="none" strike="noStrike">
                 <a:solidFill>
                   <a:schemeClr val="dk1"/>
                 </a:solidFill>
+                <a:latin typeface="Arial"/>
+                <a:ea typeface="Arial"/>
+                <a:cs typeface="Arial"/>
+                <a:sym typeface="Arial"/>
               </a:rPr>
               <a:t>Centralizar</a:t>
             </a:r>
             <a:r>
-              <a:rPr lang="es-CL" sz="1800">
+              <a:rPr b="0" i="0" lang="es-CL" sz="1800" u="none" cap="none" strike="noStrike">
                 <a:solidFill>
                   <a:schemeClr val="dk1"/>
                 </a:solidFill>
+                <a:latin typeface="Arial"/>
+                <a:ea typeface="Arial"/>
+                <a:cs typeface="Arial"/>
+                <a:sym typeface="Arial"/>
               </a:rPr>
               <a:t> la gestión de clientes, pedidos, inventario y facturación.</a:t>
             </a:r>
-            <a:endParaRPr sz="1800">
+            <a:endParaRPr b="0" i="0" sz="1800" u="none" cap="none" strike="noStrike">
               <a:solidFill>
                 <a:schemeClr val="dk1"/>
               </a:solidFill>
+              <a:latin typeface="Arial"/>
+              <a:ea typeface="Arial"/>
+              <a:cs typeface="Arial"/>
+              <a:sym typeface="Arial"/>
             </a:endParaRPr>
           </a:p>
           <a:p>
-            <a:pPr indent="-342900" lvl="0" marL="457200" rtl="0" algn="l">
+            <a:pPr indent="-342900" lvl="0" marL="457200" marR="0" rtl="0" algn="l">
               <a:lnSpc>
                 <a:spcPct val="115000"/>
               </a:lnSpc>
@@ -18140,32 +18237,45 @@
                 <a:schemeClr val="dk1"/>
               </a:buClr>
               <a:buSzPts val="1800"/>
+              <a:buFont typeface="Arial"/>
               <a:buChar char="●"/>
             </a:pPr>
             <a:r>
-              <a:rPr b="1" lang="es-CL" sz="1800">
+              <a:rPr b="1" i="0" lang="es-CL" sz="1800" u="none" cap="none" strike="noStrike">
                 <a:solidFill>
                   <a:schemeClr val="dk1"/>
                 </a:solidFill>
+                <a:latin typeface="Arial"/>
+                <a:ea typeface="Arial"/>
+                <a:cs typeface="Arial"/>
+                <a:sym typeface="Arial"/>
               </a:rPr>
               <a:t>Incorporar</a:t>
             </a:r>
             <a:r>
-              <a:rPr lang="es-CL" sz="1800">
+              <a:rPr b="0" i="0" lang="es-CL" sz="1800" u="none" cap="none" strike="noStrike">
                 <a:solidFill>
                   <a:schemeClr val="dk1"/>
                 </a:solidFill>
+                <a:latin typeface="Arial"/>
+                <a:ea typeface="Arial"/>
+                <a:cs typeface="Arial"/>
+                <a:sym typeface="Arial"/>
               </a:rPr>
               <a:t> control por roles, códigos QR y dashboard de KPIs.</a:t>
             </a:r>
-            <a:endParaRPr sz="1800">
+            <a:endParaRPr b="0" i="0" sz="1800" u="none" cap="none" strike="noStrike">
               <a:solidFill>
                 <a:schemeClr val="dk1"/>
               </a:solidFill>
+              <a:latin typeface="Arial"/>
+              <a:ea typeface="Arial"/>
+              <a:cs typeface="Arial"/>
+              <a:sym typeface="Arial"/>
             </a:endParaRPr>
           </a:p>
           <a:p>
-            <a:pPr indent="-342900" lvl="0" marL="457200" rtl="0" algn="l">
+            <a:pPr indent="-342900" lvl="0" marL="457200" marR="0" rtl="0" algn="l">
               <a:lnSpc>
                 <a:spcPct val="115000"/>
               </a:lnSpc>
@@ -18179,32 +18289,45 @@
                 <a:schemeClr val="dk1"/>
               </a:buClr>
               <a:buSzPts val="1800"/>
+              <a:buFont typeface="Arial"/>
               <a:buChar char="●"/>
             </a:pPr>
             <a:r>
-              <a:rPr b="1" lang="es-CL" sz="1800">
+              <a:rPr b="1" i="0" lang="es-CL" sz="1800" u="none" cap="none" strike="noStrike">
                 <a:solidFill>
                   <a:schemeClr val="dk1"/>
                 </a:solidFill>
+                <a:latin typeface="Arial"/>
+                <a:ea typeface="Arial"/>
+                <a:cs typeface="Arial"/>
+                <a:sym typeface="Arial"/>
               </a:rPr>
               <a:t>Gestionar</a:t>
             </a:r>
             <a:r>
-              <a:rPr lang="es-CL" sz="1800">
+              <a:rPr b="0" i="0" lang="es-CL" sz="1800" u="none" cap="none" strike="noStrike">
                 <a:solidFill>
                   <a:schemeClr val="dk1"/>
                 </a:solidFill>
+                <a:latin typeface="Arial"/>
+                <a:ea typeface="Arial"/>
+                <a:cs typeface="Arial"/>
+                <a:sym typeface="Arial"/>
               </a:rPr>
               <a:t> la operación en terreno mediante una aplicación móvil.</a:t>
             </a:r>
-            <a:endParaRPr sz="1800">
+            <a:endParaRPr b="0" i="0" sz="1800" u="none" cap="none" strike="noStrike">
               <a:solidFill>
                 <a:schemeClr val="dk1"/>
               </a:solidFill>
+              <a:latin typeface="Arial"/>
+              <a:ea typeface="Arial"/>
+              <a:cs typeface="Arial"/>
+              <a:sym typeface="Arial"/>
             </a:endParaRPr>
           </a:p>
           <a:p>
-            <a:pPr indent="-342900" lvl="0" marL="457200" rtl="0" algn="l">
+            <a:pPr indent="-342900" lvl="0" marL="457200" marR="0" rtl="0" algn="l">
               <a:lnSpc>
                 <a:spcPct val="115000"/>
               </a:lnSpc>
@@ -18218,32 +18341,45 @@
                 <a:schemeClr val="dk1"/>
               </a:buClr>
               <a:buSzPts val="1800"/>
+              <a:buFont typeface="Arial"/>
               <a:buChar char="●"/>
             </a:pPr>
             <a:r>
-              <a:rPr b="1" lang="es-CL" sz="1800">
+              <a:rPr b="1" i="0" lang="es-CL" sz="1800" u="none" cap="none" strike="noStrike">
                 <a:solidFill>
                   <a:schemeClr val="dk1"/>
                 </a:solidFill>
+                <a:latin typeface="Arial"/>
+                <a:ea typeface="Arial"/>
+                <a:cs typeface="Arial"/>
+                <a:sym typeface="Arial"/>
               </a:rPr>
               <a:t>Apoyar</a:t>
             </a:r>
             <a:r>
-              <a:rPr lang="es-CL" sz="1800">
+              <a:rPr b="0" i="0" lang="es-CL" sz="1800" u="none" cap="none" strike="noStrike">
                 <a:solidFill>
                   <a:schemeClr val="dk1"/>
                 </a:solidFill>
+                <a:latin typeface="Arial"/>
+                <a:ea typeface="Arial"/>
+                <a:cs typeface="Arial"/>
+                <a:sym typeface="Arial"/>
               </a:rPr>
-              <a:t> la toma de decisiones mediante alertas e inteligencia artificial.</a:t>
+              <a:t> la toma de decisiones mediante alertas e inteligencia artificial*.</a:t>
             </a:r>
-            <a:endParaRPr sz="1800">
+            <a:endParaRPr b="0" i="0" sz="1800" u="none" cap="none" strike="noStrike">
               <a:solidFill>
                 <a:schemeClr val="dk1"/>
               </a:solidFill>
+              <a:latin typeface="Arial"/>
+              <a:ea typeface="Arial"/>
+              <a:cs typeface="Arial"/>
+              <a:sym typeface="Arial"/>
             </a:endParaRPr>
           </a:p>
           <a:p>
-            <a:pPr indent="0" lvl="0" marL="0" rtl="0" algn="l">
+            <a:pPr indent="0" lvl="0" marL="0" marR="0" rtl="0" algn="l">
               <a:lnSpc>
                 <a:spcPct val="115000"/>
               </a:lnSpc>
@@ -18261,21 +18397,29 @@
               <a:buNone/>
             </a:pPr>
             <a:r>
-              <a:rPr b="1" lang="es-CL" sz="2000">
+              <a:rPr b="1" i="0" lang="es-CL" sz="2000" u="none" cap="none" strike="noStrike">
                 <a:solidFill>
                   <a:schemeClr val="dk1"/>
                 </a:solidFill>
+                <a:latin typeface="Arial"/>
+                <a:ea typeface="Arial"/>
+                <a:cs typeface="Arial"/>
+                <a:sym typeface="Arial"/>
               </a:rPr>
               <a:t>Limitaciones</a:t>
             </a:r>
-            <a:endParaRPr b="1" sz="2000">
+            <a:endParaRPr b="1" i="0" sz="2000" u="none" cap="none" strike="noStrike">
               <a:solidFill>
                 <a:schemeClr val="dk1"/>
               </a:solidFill>
+              <a:latin typeface="Arial"/>
+              <a:ea typeface="Arial"/>
+              <a:cs typeface="Arial"/>
+              <a:sym typeface="Arial"/>
             </a:endParaRPr>
           </a:p>
           <a:p>
-            <a:pPr indent="-342900" lvl="0" marL="457200" rtl="0" algn="l">
+            <a:pPr indent="-342900" lvl="0" marL="457200" marR="0" rtl="0" algn="l">
               <a:lnSpc>
                 <a:spcPct val="115000"/>
               </a:lnSpc>
@@ -18289,40 +18433,57 @@
                 <a:schemeClr val="dk1"/>
               </a:buClr>
               <a:buSzPts val="1800"/>
+              <a:buFont typeface="Arial"/>
               <a:buChar char="●"/>
             </a:pPr>
             <a:r>
-              <a:rPr lang="es-CL" sz="1800">
+              <a:rPr b="0" i="0" lang="es-CL" sz="1800" u="none" cap="none" strike="noStrike">
                 <a:solidFill>
                   <a:schemeClr val="dk1"/>
                 </a:solidFill>
+                <a:latin typeface="Arial"/>
+                <a:ea typeface="Arial"/>
+                <a:cs typeface="Arial"/>
+                <a:sym typeface="Arial"/>
               </a:rPr>
               <a:t>El proyecto se desarrollará como un </a:t>
             </a:r>
             <a:r>
-              <a:rPr b="1" lang="es-CL" sz="1800">
+              <a:rPr b="1" i="0" lang="es-CL" sz="1800" u="none" cap="none" strike="noStrike">
                 <a:solidFill>
                   <a:schemeClr val="dk1"/>
                 </a:solidFill>
+                <a:latin typeface="Arial"/>
+                <a:ea typeface="Arial"/>
+                <a:cs typeface="Arial"/>
+                <a:sym typeface="Arial"/>
               </a:rPr>
               <a:t>MVP durante el semestre APT</a:t>
             </a:r>
             <a:r>
-              <a:rPr lang="es-CL" sz="1800">
+              <a:rPr b="0" i="0" lang="es-CL" sz="1800" u="none" cap="none" strike="noStrike">
                 <a:solidFill>
                   <a:schemeClr val="dk1"/>
                 </a:solidFill>
+                <a:latin typeface="Arial"/>
+                <a:ea typeface="Arial"/>
+                <a:cs typeface="Arial"/>
+                <a:sym typeface="Arial"/>
               </a:rPr>
               <a:t>.</a:t>
             </a:r>
-            <a:endParaRPr sz="1800">
+            <a:endParaRPr b="0" i="0" sz="1800" u="none" cap="none" strike="noStrike">
               <a:solidFill>
                 <a:schemeClr val="dk1"/>
               </a:solidFill>
+              <a:latin typeface="Arial"/>
+              <a:ea typeface="Arial"/>
+              <a:cs typeface="Arial"/>
+              <a:sym typeface="Arial"/>
             </a:endParaRPr>
           </a:p>
           <a:p>
-            <a:pPr indent="-342900" lvl="0" marL="457200" rtl="0" algn="l">
+            <a:pPr indent="-342900" lvl="0" marL="457200" marR="0" rtl="0" algn="l">
               <a:lnSpc>
                 <a:spcPct val="115000"/>
               </a:lnSpc>
@@ -18336,40 +18497,57 @@
                 <a:schemeClr val="dk1"/>
               </a:buClr>
               <a:buSzPts val="1800"/>
+              <a:buFont typeface="Arial"/>
               <a:buChar char="●"/>
             </a:pPr>
             <a:r>
-              <a:rPr lang="es-CL" sz="1800">
+              <a:rPr b="0" i="0" lang="es-CL" sz="1800" u="none" cap="none" strike="noStrike">
                 <a:solidFill>
                   <a:schemeClr val="dk1"/>
                 </a:solidFill>
+                <a:latin typeface="Arial"/>
+                <a:ea typeface="Arial"/>
+                <a:cs typeface="Arial"/>
+                <a:sym typeface="Arial"/>
               </a:rPr>
               <a:t>La implementación dependerá de la </a:t>
             </a:r>
             <a:r>
-              <a:rPr b="1" lang="es-CL" sz="1800">
+              <a:rPr b="1" i="0" lang="es-CL" sz="1800" u="none" cap="none" strike="noStrike">
                 <a:solidFill>
                   <a:schemeClr val="dk1"/>
                 </a:solidFill>
+                <a:latin typeface="Arial"/>
+                <a:ea typeface="Arial"/>
+                <a:cs typeface="Arial"/>
+                <a:sym typeface="Arial"/>
               </a:rPr>
               <a:t>información y procesos reales proporcionados por la banquetería</a:t>
             </a:r>
             <a:r>
-              <a:rPr lang="es-CL" sz="1800">
+              <a:rPr b="0" i="0" lang="es-CL" sz="1800" u="none" cap="none" strike="noStrike">
                 <a:solidFill>
                   <a:schemeClr val="dk1"/>
                 </a:solidFill>
+                <a:latin typeface="Arial"/>
+                <a:ea typeface="Arial"/>
+                <a:cs typeface="Arial"/>
+                <a:sym typeface="Arial"/>
               </a:rPr>
               <a:t>.</a:t>
             </a:r>
-            <a:endParaRPr sz="1800">
+            <a:endParaRPr b="0" i="0" sz="1800" u="none" cap="none" strike="noStrike">
               <a:solidFill>
                 <a:schemeClr val="dk1"/>
               </a:solidFill>
+              <a:latin typeface="Arial"/>
+              <a:ea typeface="Arial"/>
+              <a:cs typeface="Arial"/>
+              <a:sym typeface="Arial"/>
             </a:endParaRPr>
           </a:p>
           <a:p>
-            <a:pPr indent="-342900" lvl="0" marL="457200" rtl="0" algn="l">
+            <a:pPr indent="-342900" lvl="0" marL="457200" marR="0" rtl="0" algn="l">
               <a:lnSpc>
                 <a:spcPct val="115000"/>
               </a:lnSpc>
@@ -18383,20 +18561,29 @@
                 <a:schemeClr val="dk1"/>
               </a:buClr>
               <a:buSzPts val="1800"/>
+              <a:buFont typeface="Arial"/>
               <a:buChar char="●"/>
             </a:pPr>
             <a:r>
-              <a:rPr lang="es-CL" sz="1800">
+              <a:rPr b="0" i="0" lang="es-CL" sz="1800" u="none" cap="none" strike="noStrike">
                 <a:solidFill>
                   <a:schemeClr val="dk1"/>
                 </a:solidFill>
+                <a:latin typeface="Arial"/>
+                <a:ea typeface="Arial"/>
+                <a:cs typeface="Arial"/>
+                <a:sym typeface="Arial"/>
               </a:rPr>
               <a:t>La complejidad de la máquina de estados y el cálculo de costos puede limitar el alcance inicial.</a:t>
             </a:r>
-            <a:endParaRPr sz="1800">
+            <a:endParaRPr b="0" i="0" sz="1800" u="none" cap="none" strike="noStrike">
               <a:solidFill>
                 <a:schemeClr val="dk1"/>
               </a:solidFill>
+              <a:latin typeface="Arial"/>
+              <a:ea typeface="Arial"/>
+              <a:cs typeface="Arial"/>
+              <a:sym typeface="Arial"/>
             </a:endParaRPr>
           </a:p>
           <a:p>
@@ -18420,7 +18607,7 @@
             <a:r>
               <a:t/>
             </a:r>
-            <a:endParaRPr sz="1800">
+            <a:endParaRPr b="0" i="0" sz="1800" u="none" cap="none" strike="noStrike">
               <a:solidFill>
                 <a:schemeClr val="dk1"/>
               </a:solidFill>
@@ -18466,13 +18653,12 @@
           <p:cNvPicPr preferRelativeResize="0"/>
           <p:nvPr/>
         </p:nvPicPr>
-        <p:blipFill>
+        <p:blipFill rotWithShape="1">
           <a:blip r:embed="rId3">
             <a:alphaModFix/>
           </a:blip>
-          <a:stretch>
-            <a:fillRect/>
-          </a:stretch>
+          <a:srcRect b="0" l="0" r="0" t="0"/>
+          <a:stretch/>
         </p:blipFill>
         <p:spPr>
           <a:xfrm>
@@ -18540,7 +18726,10 @@
           </a:bodyPr>
           <a:lstStyle/>
           <a:p>
-            <a:pPr indent="0" lvl="0" marL="0" rtl="0" algn="l">
+            <a:pPr indent="0" lvl="0" marL="0" marR="0" rtl="0" algn="l">
+              <a:lnSpc>
+                <a:spcPct val="100000"/>
+              </a:lnSpc>
               <a:spcBef>
                 <a:spcPts val="0"/>
               </a:spcBef>
@@ -18555,7 +18744,7 @@
               <a:buNone/>
             </a:pPr>
             <a:r>
-              <a:rPr lang="es-CL" sz="1800">
+              <a:rPr b="0" i="0" lang="es-CL" sz="1800" u="none" cap="none" strike="noStrike">
                 <a:solidFill>
                   <a:srgbClr val="757070"/>
                 </a:solidFill>
@@ -18664,7 +18853,7 @@
               <a:srgbClr val="F5F7FC"/>
             </a:solidFill>
             <a:prstDash val="solid"/>
-            <a:miter lim="80"/>
+            <a:miter lim="0"/>
             <a:headEnd len="sm" w="sm" type="none"/>
             <a:tailEnd len="sm" w="sm" type="none"/>
           </a:ln>
@@ -18694,7 +18883,7 @@
               <a:schemeClr val="accent1"/>
             </a:solidFill>
             <a:prstDash val="solid"/>
-            <a:miter lim="80"/>
+            <a:miter lim="0"/>
             <a:headEnd len="sm" w="sm" type="none"/>
             <a:tailEnd len="sm" w="sm" type="none"/>
           </a:ln>
@@ -18705,7 +18894,10 @@
           </a:bodyPr>
           <a:lstStyle/>
           <a:p>
-            <a:pPr indent="0" lvl="0" marL="0" rtl="0" algn="ctr">
+            <a:pPr indent="0" lvl="0" marL="0" marR="0" rtl="0" algn="ctr">
+              <a:lnSpc>
+                <a:spcPct val="100000"/>
+              </a:lnSpc>
               <a:spcBef>
                 <a:spcPts val="0"/>
               </a:spcBef>
@@ -18722,14 +18914,18 @@
             <a:r>
               <a:t/>
             </a:r>
-            <a:endParaRPr sz="1500">
+            <a:endParaRPr b="0" i="0" sz="1500" u="none" cap="none" strike="noStrike">
               <a:solidFill>
                 <a:schemeClr val="dk1"/>
               </a:solidFill>
+              <a:latin typeface="Arial"/>
+              <a:ea typeface="Arial"/>
+              <a:cs typeface="Arial"/>
+              <a:sym typeface="Arial"/>
             </a:endParaRPr>
           </a:p>
           <a:p>
-            <a:pPr indent="0" lvl="0" marL="0" rtl="0" algn="l">
+            <a:pPr indent="0" lvl="0" marL="0" marR="0" rtl="0" algn="l">
               <a:lnSpc>
                 <a:spcPct val="115000"/>
               </a:lnSpc>
@@ -18739,24 +18935,37 @@
               <a:spcAft>
                 <a:spcPts val="0"/>
               </a:spcAft>
+              <a:buClr>
+                <a:srgbClr val="000000"/>
+              </a:buClr>
+              <a:buSzPts val="2300"/>
+              <a:buFont typeface="Arial"/>
               <a:buNone/>
             </a:pPr>
             <a:r>
-              <a:rPr b="1" lang="es-CL" sz="2300">
+              <a:rPr b="1" i="0" lang="es-CL" sz="2300" u="none" cap="none" strike="noStrike">
                 <a:solidFill>
                   <a:schemeClr val="dk1"/>
                 </a:solidFill>
+                <a:latin typeface="Arial"/>
+                <a:ea typeface="Arial"/>
+                <a:cs typeface="Arial"/>
+                <a:sym typeface="Arial"/>
               </a:rPr>
               <a:t>Metodología de trabajo: Scrum</a:t>
             </a:r>
-            <a:endParaRPr b="1" sz="2300">
+            <a:endParaRPr b="1" i="0" sz="2300" u="none" cap="none" strike="noStrike">
               <a:solidFill>
                 <a:schemeClr val="dk1"/>
               </a:solidFill>
+              <a:latin typeface="Arial"/>
+              <a:ea typeface="Arial"/>
+              <a:cs typeface="Arial"/>
+              <a:sym typeface="Arial"/>
             </a:endParaRPr>
           </a:p>
           <a:p>
-            <a:pPr indent="-342900" lvl="0" marL="457200" rtl="0" algn="l">
+            <a:pPr indent="-342900" lvl="0" marL="457200" marR="0" rtl="0" algn="l">
               <a:lnSpc>
                 <a:spcPct val="115000"/>
               </a:lnSpc>
@@ -18770,20 +18979,89 @@
                 <a:schemeClr val="dk1"/>
               </a:buClr>
               <a:buSzPts val="1800"/>
+              <a:buFont typeface="Arial"/>
               <a:buChar char="●"/>
             </a:pPr>
             <a:r>
+              <a:rPr b="0" i="0" lang="es-CL" sz="1800" u="none" cap="none" strike="noStrike">
+                <a:solidFill>
+                  <a:schemeClr val="dk1"/>
+                </a:solidFill>
+                <a:latin typeface="Arial"/>
+                <a:ea typeface="Arial"/>
+                <a:cs typeface="Arial"/>
+                <a:sym typeface="Arial"/>
+              </a:rPr>
+              <a:t>Se utilizará la metodología ágil Scrum, trabajando en sprints </a:t>
+            </a:r>
+            <a:r>
               <a:rPr lang="es-CL" sz="1800">
                 <a:solidFill>
                   <a:schemeClr val="dk1"/>
                 </a:solidFill>
               </a:rPr>
-              <a:t>Se utilizará la metodología ágil Scrum, trabajando en sprints de 1 a 2 semanas. Cada sprint permitirá planificar, desarrollar, probar y evaluar funcionalidades del sistema, priorizando un MVP (Producto Mínimo Viable) funcional al finalizar las 11 semanas.</a:t>
+              <a:t>cada semana</a:t>
             </a:r>
-            <a:endParaRPr b="1" sz="1800">
+            <a:r>
+              <a:rPr b="0" i="0" lang="es-CL" sz="1800" u="none" cap="none" strike="noStrike">
+                <a:solidFill>
+                  <a:schemeClr val="dk1"/>
+                </a:solidFill>
+                <a:latin typeface="Arial"/>
+                <a:ea typeface="Arial"/>
+                <a:cs typeface="Arial"/>
+                <a:sym typeface="Arial"/>
+              </a:rPr>
+              <a:t>. </a:t>
+            </a:r>
+            <a:r>
+              <a:rPr lang="es-CL" sz="1800">
+                <a:solidFill>
+                  <a:schemeClr val="dk1"/>
+                </a:solidFill>
+              </a:rPr>
+              <a:t>Esto p</a:t>
+            </a:r>
+            <a:r>
+              <a:rPr b="0" i="0" lang="es-CL" sz="1800" u="none" cap="none" strike="noStrike">
+                <a:solidFill>
+                  <a:schemeClr val="dk1"/>
+                </a:solidFill>
+                <a:latin typeface="Arial"/>
+                <a:ea typeface="Arial"/>
+                <a:cs typeface="Arial"/>
+                <a:sym typeface="Arial"/>
+              </a:rPr>
+              <a:t>ermitirá planificar, desarrollar, probar y evaluar funcionalidades del sistema, priorizando un MVP (Producto Mínimo Viable) funcional al finalizar las 1</a:t>
+            </a:r>
+            <a:r>
+              <a:rPr lang="es-CL" sz="1800">
+                <a:solidFill>
+                  <a:schemeClr val="dk1"/>
+                </a:solidFill>
+              </a:rPr>
+              <a:t>2</a:t>
+            </a:r>
+            <a:r>
+              <a:rPr b="0" i="0" lang="es-CL" sz="1800" u="none" cap="none" strike="noStrike">
+                <a:solidFill>
+                  <a:schemeClr val="dk1"/>
+                </a:solidFill>
+                <a:latin typeface="Arial"/>
+                <a:ea typeface="Arial"/>
+                <a:cs typeface="Arial"/>
+                <a:sym typeface="Arial"/>
+              </a:rPr>
+              <a:t> semanas.</a:t>
+            </a:r>
+            <a:endParaRPr b="1" i="0" sz="1800" u="none" cap="none" strike="noStrike">
               <a:solidFill>
                 <a:schemeClr val="dk1"/>
               </a:solidFill>
+              <a:latin typeface="Arial"/>
+              <a:ea typeface="Arial"/>
+              <a:cs typeface="Arial"/>
+              <a:sym typeface="Arial"/>
             </a:endParaRPr>
           </a:p>
           <a:p>
@@ -18807,7 +19085,7 @@
             <a:r>
               <a:t/>
             </a:r>
-            <a:endParaRPr sz="1800">
+            <a:endParaRPr b="0" i="0" sz="1800" u="none" cap="none" strike="noStrike">
               <a:solidFill>
                 <a:schemeClr val="dk1"/>
               </a:solidFill>
@@ -18849,17 +19127,16 @@
       </p:grpSpPr>
       <p:pic>
         <p:nvPicPr>
-          <p:cNvPr id="149" name="Google Shape;149;p7" title="17973908.jpg"/>
+          <p:cNvPr id="149" name="Google Shape;149;g3f8ca8b3f54_1_12" title="17973908.jpg"/>
           <p:cNvPicPr preferRelativeResize="0"/>
           <p:nvPr/>
         </p:nvPicPr>
-        <p:blipFill>
+        <p:blipFill rotWithShape="1">
           <a:blip r:embed="rId3">
             <a:alphaModFix/>
           </a:blip>
-          <a:stretch>
-            <a:fillRect/>
-          </a:stretch>
+          <a:srcRect b="0" l="0" r="0" t="0"/>
+          <a:stretch/>
         </p:blipFill>
         <p:spPr>
           <a:xfrm>
@@ -18877,7 +19154,7 @@
       </p:pic>
       <p:pic>
         <p:nvPicPr>
-          <p:cNvPr descr="EscuelaIT Duoc UC - Escuela de Informática y Telecomunicaciones Duoc UC - Duoc  UC | LinkedIn" id="150" name="Google Shape;150;p7"/>
+          <p:cNvPr descr="EscuelaIT Duoc UC - Escuela de Informática y Telecomunicaciones Duoc UC - Duoc  UC | LinkedIn" id="150" name="Google Shape;150;g3f8ca8b3f54_1_12"/>
           <p:cNvPicPr preferRelativeResize="0"/>
           <p:nvPr/>
         </p:nvPicPr>
@@ -18904,14 +19181,14 @@
       </p:pic>
       <p:sp>
         <p:nvSpPr>
-          <p:cNvPr id="151" name="Google Shape;151;p7"/>
+          <p:cNvPr id="151" name="Google Shape;151;g3f8ca8b3f54_1_12"/>
           <p:cNvSpPr txBox="1"/>
           <p:nvPr/>
         </p:nvSpPr>
         <p:spPr>
           <a:xfrm>
             <a:off x="136188" y="368928"/>
-            <a:ext cx="12191999" cy="369332"/>
+            <a:ext cx="12192000" cy="369300"/>
           </a:xfrm>
           <a:prstGeom prst="rect">
             <a:avLst/>
@@ -18927,7 +19204,10 @@
           </a:bodyPr>
           <a:lstStyle/>
           <a:p>
-            <a:pPr indent="0" lvl="0" marL="0" rtl="0" algn="l">
+            <a:pPr indent="0" lvl="0" marL="0" marR="0" rtl="0" algn="l">
+              <a:lnSpc>
+                <a:spcPct val="100000"/>
+              </a:lnSpc>
               <a:spcBef>
                 <a:spcPts val="0"/>
               </a:spcBef>
@@ -18942,7 +19222,7 @@
               <a:buNone/>
             </a:pPr>
             <a:r>
-              <a:rPr lang="es-CL" sz="1800">
+              <a:rPr b="0" i="0" lang="es-CL" sz="1800" u="none" cap="none" strike="noStrike">
                 <a:solidFill>
                   <a:srgbClr val="757070"/>
                 </a:solidFill>
@@ -18967,14 +19247,14 @@
       </p:sp>
       <p:sp>
         <p:nvSpPr>
-          <p:cNvPr id="152" name="Google Shape;152;p7"/>
+          <p:cNvPr id="152" name="Google Shape;152;g3f8ca8b3f54_1_12"/>
           <p:cNvSpPr txBox="1"/>
           <p:nvPr/>
         </p:nvSpPr>
         <p:spPr>
           <a:xfrm>
             <a:off x="1" y="1155656"/>
-            <a:ext cx="12191999" cy="892552"/>
+            <a:ext cx="12192000" cy="892800"/>
           </a:xfrm>
           <a:prstGeom prst="rect">
             <a:avLst/>
@@ -19073,14 +19353,14 @@
       </p:sp>
       <p:cxnSp>
         <p:nvCxnSpPr>
-          <p:cNvPr id="153" name="Google Shape;153;p7"/>
+          <p:cNvPr id="153" name="Google Shape;153;g3f8ca8b3f54_1_12"/>
           <p:cNvCxnSpPr/>
           <p:nvPr/>
         </p:nvCxnSpPr>
         <p:spPr>
           <a:xfrm>
             <a:off x="0" y="758027"/>
-            <a:ext cx="4085617" cy="0"/>
+            <a:ext cx="4085700" cy="0"/>
           </a:xfrm>
           <a:prstGeom prst="straightConnector1">
             <a:avLst/>
@@ -19091,7 +19371,7 @@
               <a:srgbClr val="F5F7FC"/>
             </a:solidFill>
             <a:prstDash val="solid"/>
-            <a:miter lim="80"/>
+            <a:miter lim="0"/>
             <a:headEnd len="sm" w="sm" type="none"/>
             <a:tailEnd len="sm" w="sm" type="none"/>
           </a:ln>
@@ -19099,7 +19379,7 @@
       </p:cxnSp>
       <p:sp>
         <p:nvSpPr>
-          <p:cNvPr id="154" name="Google Shape;154;p7"/>
+          <p:cNvPr id="154" name="Google Shape;154;g3f8ca8b3f54_1_12"/>
           <p:cNvSpPr txBox="1"/>
           <p:nvPr/>
         </p:nvSpPr>
@@ -19122,7 +19402,7 @@
           </a:bodyPr>
           <a:lstStyle/>
           <a:p>
-            <a:pPr indent="0" lvl="0" marL="0" rtl="0" algn="l">
+            <a:pPr indent="0" lvl="0" marL="0" marR="0" rtl="0" algn="l">
               <a:lnSpc>
                 <a:spcPct val="115000"/>
               </a:lnSpc>
@@ -19132,57 +19412,64 @@
               <a:spcAft>
                 <a:spcPts val="400"/>
               </a:spcAft>
+              <a:buClr>
+                <a:srgbClr val="000000"/>
+              </a:buClr>
+              <a:buSzPts val="1300"/>
+              <a:buFont typeface="Arial"/>
               <a:buNone/>
             </a:pPr>
             <a:r>
-              <a:rPr b="1" lang="es-CL" sz="1300"/>
-              <a:t>AJUSTAR CRONOGRAMA CON CARTA GANT DE DOCUMENTO 1.5</a:t>
+              <a:t/>
             </a:r>
-            <a:endParaRPr b="1" sz="1300"/>
+            <a:endParaRPr b="1" i="0" sz="1300" u="none" cap="none" strike="noStrike">
+              <a:solidFill>
+                <a:srgbClr val="000000"/>
+              </a:solidFill>
+              <a:latin typeface="Arial"/>
+              <a:ea typeface="Arial"/>
+              <a:cs typeface="Arial"/>
+              <a:sym typeface="Arial"/>
+            </a:endParaRPr>
           </a:p>
         </p:txBody>
       </p:sp>
       <p:sp>
         <p:nvSpPr>
-          <p:cNvPr id="155" name="Google Shape;155;p7"/>
+          <p:cNvPr id="155" name="Google Shape;155;g3f8ca8b3f54_1_12"/>
           <p:cNvSpPr/>
           <p:nvPr/>
         </p:nvSpPr>
         <p:spPr>
           <a:xfrm>
-            <a:off x="1353975" y="2773375"/>
-            <a:ext cx="9765600" cy="3667500"/>
+            <a:off x="952500" y="2673800"/>
+            <a:ext cx="9636900" cy="3612600"/>
           </a:xfrm>
-          <a:prstGeom prst="roundRect">
-            <a:avLst>
-              <a:gd fmla="val 16667" name="adj"/>
-            </a:avLst>
+          <a:prstGeom prst="rect">
+            <a:avLst/>
           </a:prstGeom>
           <a:solidFill>
-            <a:schemeClr val="lt1"/>
+            <a:schemeClr val="lt2"/>
           </a:solidFill>
-          <a:ln cap="flat" cmpd="sng" w="12700">
+          <a:ln cap="flat" cmpd="sng" w="9525">
             <a:solidFill>
-              <a:schemeClr val="accent1"/>
+              <a:schemeClr val="dk2"/>
             </a:solidFill>
             <a:prstDash val="solid"/>
-            <a:miter lim="80"/>
+            <a:round/>
             <a:headEnd len="sm" w="sm" type="none"/>
             <a:tailEnd len="sm" w="sm" type="none"/>
           </a:ln>
         </p:spPr>
         <p:txBody>
-          <a:bodyPr anchorCtr="0" anchor="ctr" bIns="45700" lIns="91425" spcFirstLastPara="1" rIns="91425" wrap="square" tIns="45700">
+          <a:bodyPr anchorCtr="0" anchor="ctr" bIns="91425" lIns="91425" spcFirstLastPara="1" rIns="91425" wrap="square" tIns="91425">
             <a:noAutofit/>
           </a:bodyPr>
           <a:lstStyle/>
           <a:p>
-            <a:pPr indent="0" lvl="0" marL="0" marR="381000" rtl="0" algn="l">
-              <a:lnSpc>
-                <a:spcPct val="115000"/>
-              </a:lnSpc>
-              <a:spcBef>
-                <a:spcPts val="1200"/>
+            <a:pPr indent="0" lvl="0" marL="0" rtl="0" algn="ctr">
+              <a:spcBef>
+                <a:spcPts val="0"/>
               </a:spcBef>
               <a:spcAft>
                 <a:spcPts val="0"/>
@@ -19192,196 +19479,7 @@
             <a:r>
               <a:t/>
             </a:r>
-            <a:endParaRPr b="1" sz="1800">
-              <a:solidFill>
-                <a:schemeClr val="dk1"/>
-              </a:solidFill>
-            </a:endParaRPr>
-          </a:p>
-          <a:p>
-            <a:pPr indent="0" lvl="0" marL="0" rtl="0" algn="l">
-              <a:lnSpc>
-                <a:spcPct val="115000"/>
-              </a:lnSpc>
-              <a:spcBef>
-                <a:spcPts val="1200"/>
-              </a:spcBef>
-              <a:spcAft>
-                <a:spcPts val="0"/>
-              </a:spcAft>
-              <a:buNone/>
-            </a:pPr>
-            <a:r>
-              <a:rPr b="1" lang="es-CL" sz="1800"/>
-              <a:t>Semanas					Actividad</a:t>
-            </a:r>
-            <a:endParaRPr b="1" sz="1800"/>
-          </a:p>
-          <a:p>
-            <a:pPr indent="0" lvl="0" marL="0" rtl="0" algn="l">
-              <a:spcBef>
-                <a:spcPts val="0"/>
-              </a:spcBef>
-              <a:spcAft>
-                <a:spcPts val="0"/>
-              </a:spcAft>
-              <a:buNone/>
-            </a:pPr>
-            <a:r>
-              <a:rPr b="1" lang="es-CL" sz="1800"/>
-              <a:t>5–6		</a:t>
-            </a:r>
-            <a:r>
-              <a:rPr lang="es-CL" sz="1800"/>
-              <a:t>Análisis de requerimientos, levantamiento del proceso y diseño de la arquitectura</a:t>
-            </a:r>
-            <a:endParaRPr sz="1800"/>
-          </a:p>
-          <a:p>
-            <a:pPr indent="0" lvl="0" marL="0" rtl="0" algn="l">
-              <a:spcBef>
-                <a:spcPts val="0"/>
-              </a:spcBef>
-              <a:spcAft>
-                <a:spcPts val="0"/>
-              </a:spcAft>
-              <a:buNone/>
-            </a:pPr>
-            <a:r>
-              <a:rPr b="1" lang="es-CL" sz="1800"/>
-              <a:t>7–8		</a:t>
-            </a:r>
-            <a:r>
-              <a:rPr lang="es-CL" sz="1800"/>
-              <a:t>Diseño de BD y desarrollo de módulos de clientes y pedidos</a:t>
-            </a:r>
-            <a:endParaRPr sz="1800"/>
-          </a:p>
-          <a:p>
-            <a:pPr indent="0" lvl="0" marL="0" rtl="0" algn="l">
-              <a:spcBef>
-                <a:spcPts val="0"/>
-              </a:spcBef>
-              <a:spcAft>
-                <a:spcPts val="0"/>
-              </a:spcAft>
-              <a:buNone/>
-            </a:pPr>
-            <a:r>
-              <a:rPr b="1" lang="es-CL" sz="1800"/>
-              <a:t>9–10	</a:t>
-            </a:r>
-            <a:r>
-              <a:rPr lang="es-CL" sz="1800"/>
-              <a:t>Desarrollo de inventario, códigos QR y fichas técnicas</a:t>
-            </a:r>
-            <a:endParaRPr sz="1800"/>
-          </a:p>
-          <a:p>
-            <a:pPr indent="0" lvl="0" marL="0" rtl="0" algn="l">
-              <a:spcBef>
-                <a:spcPts val="0"/>
-              </a:spcBef>
-              <a:spcAft>
-                <a:spcPts val="0"/>
-              </a:spcAft>
-              <a:buNone/>
-            </a:pPr>
-            <a:r>
-              <a:rPr b="1" lang="es-CL" sz="1800"/>
-              <a:t>11–12	</a:t>
-            </a:r>
-            <a:r>
-              <a:rPr lang="es-CL" sz="1800"/>
-              <a:t>Desarrollo de facturación, cotizador y cálculo de rentabilidad</a:t>
-            </a:r>
-            <a:endParaRPr sz="1800"/>
-          </a:p>
-          <a:p>
-            <a:pPr indent="0" lvl="0" marL="0" rtl="0" algn="l">
-              <a:spcBef>
-                <a:spcPts val="0"/>
-              </a:spcBef>
-              <a:spcAft>
-                <a:spcPts val="0"/>
-              </a:spcAft>
-              <a:buNone/>
-            </a:pPr>
-            <a:r>
-              <a:rPr b="1" lang="es-CL" sz="1800"/>
-              <a:t>13		</a:t>
-            </a:r>
-            <a:r>
-              <a:rPr lang="es-CL" sz="1800"/>
-              <a:t>Dashboard de KPIs y control por roles</a:t>
-            </a:r>
-            <a:endParaRPr sz="1800"/>
-          </a:p>
-          <a:p>
-            <a:pPr indent="0" lvl="0" marL="0" rtl="0" algn="l">
-              <a:spcBef>
-                <a:spcPts val="0"/>
-              </a:spcBef>
-              <a:spcAft>
-                <a:spcPts val="0"/>
-              </a:spcAft>
-              <a:buNone/>
-            </a:pPr>
-            <a:r>
-              <a:rPr b="1" lang="es-CL" sz="1800"/>
-              <a:t>14 		</a:t>
-            </a:r>
-            <a:r>
-              <a:rPr lang="es-CL" sz="1800"/>
-              <a:t>Integración, pruebas y corrección de errores</a:t>
-            </a:r>
-            <a:endParaRPr sz="1800"/>
-          </a:p>
-          <a:p>
-            <a:pPr indent="0" lvl="0" marL="0" rtl="0" algn="l">
-              <a:spcBef>
-                <a:spcPts val="0"/>
-              </a:spcBef>
-              <a:spcAft>
-                <a:spcPts val="0"/>
-              </a:spcAft>
-              <a:buNone/>
-            </a:pPr>
-            <a:r>
-              <a:rPr b="1" lang="es-CL" sz="1800"/>
-              <a:t>15		</a:t>
-            </a:r>
-            <a:r>
-              <a:rPr lang="es-CL" sz="1800"/>
-              <a:t>Validación final, documentación y presentación del proyecto</a:t>
-            </a:r>
-            <a:endParaRPr sz="1800"/>
-          </a:p>
-          <a:p>
-            <a:pPr indent="0" lvl="0" marL="0" marR="0" rtl="0" algn="ctr">
-              <a:lnSpc>
-                <a:spcPct val="100000"/>
-              </a:lnSpc>
-              <a:spcBef>
-                <a:spcPts val="0"/>
-              </a:spcBef>
-              <a:spcAft>
-                <a:spcPts val="0"/>
-              </a:spcAft>
-              <a:buClr>
-                <a:srgbClr val="000000"/>
-              </a:buClr>
-              <a:buSzPts val="1800"/>
-              <a:buFont typeface="Arial"/>
-              <a:buNone/>
-            </a:pPr>
-            <a:r>
-              <a:t/>
-            </a:r>
-            <a:endParaRPr sz="1800">
-              <a:solidFill>
-                <a:schemeClr val="dk1"/>
-              </a:solidFill>
+            <a:endParaRPr>
               <a:latin typeface="Calibri"/>
               <a:ea typeface="Calibri"/>
               <a:cs typeface="Calibri"/>
@@ -19390,67 +19488,1882 @@
           </a:p>
         </p:txBody>
       </p:sp>
-      <p:sp>
-        <p:nvSpPr>
-          <p:cNvPr id="156" name="Google Shape;156;p7"/>
-          <p:cNvSpPr txBox="1"/>
+      <p:graphicFrame>
+        <p:nvGraphicFramePr>
+          <p:cNvPr id="156" name="Google Shape;156;g3f8ca8b3f54_1_12"/>
+          <p:cNvGraphicFramePr/>
           <p:nvPr/>
-        </p:nvSpPr>
-        <p:spPr>
-          <a:xfrm>
-            <a:off x="2149575" y="2898875"/>
-            <a:ext cx="4373700" cy="461700"/>
-          </a:xfrm>
-          <a:prstGeom prst="rect">
-            <a:avLst/>
-          </a:prstGeom>
-          <a:noFill/>
-          <a:ln>
-            <a:noFill/>
-          </a:ln>
-        </p:spPr>
-        <p:txBody>
-          <a:bodyPr anchorCtr="0" anchor="t" bIns="91425" lIns="91425" spcFirstLastPara="1" rIns="91425" wrap="square" tIns="91425">
-            <a:spAutoFit/>
-          </a:bodyPr>
-          <a:lstStyle/>
-          <a:p>
-            <a:pPr indent="0" lvl="0" marL="0" rtl="0" algn="l">
-              <a:lnSpc>
-                <a:spcPct val="115000"/>
-              </a:lnSpc>
-              <a:spcBef>
-                <a:spcPts val="1400"/>
-              </a:spcBef>
-              <a:spcAft>
-                <a:spcPts val="400"/>
-              </a:spcAft>
-              <a:buNone/>
-            </a:pPr>
-            <a:r>
-              <a:rPr b="1" lang="es-CL" sz="1800">
-                <a:solidFill>
-                  <a:schemeClr val="dk1"/>
-                </a:solidFill>
-              </a:rPr>
-              <a:t>Plan de trabajo para 11 semanas</a:t>
-            </a:r>
-            <a:endParaRPr b="1" sz="1800">
-              <a:solidFill>
-                <a:schemeClr val="dk1"/>
-              </a:solidFill>
-            </a:endParaRPr>
-          </a:p>
-        </p:txBody>
-      </p:sp>
+        </p:nvGraphicFramePr>
+        <p:xfrm>
+          <a:off x="952500" y="2673800"/>
+          <a:ext cx="3000000" cy="3000000"/>
+        </p:xfrm>
+        <a:graphic>
+          <a:graphicData uri="http://schemas.openxmlformats.org/drawingml/2006/table">
+            <a:tbl>
+              <a:tblPr>
+                <a:noFill/>
+                <a:tableStyleId>{41C59166-7833-494C-90F1-B5DE4C1D15B2}</a:tableStyleId>
+              </a:tblPr>
+              <a:tblGrid>
+                <a:gridCol w="3067200"/>
+                <a:gridCol w="6569600"/>
+              </a:tblGrid>
+              <a:tr h="277900">
+                <a:tc>
+                  <a:txBody>
+                    <a:bodyPr/>
+                    <a:lstStyle/>
+                    <a:p>
+                      <a:pPr indent="0" lvl="0" marL="0" rtl="0" algn="ctr">
+                        <a:spcBef>
+                          <a:spcPts val="0"/>
+                        </a:spcBef>
+                        <a:spcAft>
+                          <a:spcPts val="0"/>
+                        </a:spcAft>
+                        <a:buNone/>
+                      </a:pPr>
+                      <a:r>
+                        <a:rPr b="1" lang="es-CL" sz="1500">
+                          <a:latin typeface="Carlito"/>
+                          <a:ea typeface="Carlito"/>
+                          <a:cs typeface="Carlito"/>
+                          <a:sym typeface="Carlito"/>
+                        </a:rPr>
+                        <a:t>Sprint</a:t>
+                      </a:r>
+                      <a:endParaRPr b="1" sz="1500">
+                        <a:latin typeface="Carlito"/>
+                        <a:ea typeface="Carlito"/>
+                        <a:cs typeface="Carlito"/>
+                        <a:sym typeface="Carlito"/>
+                      </a:endParaRPr>
+                    </a:p>
+                  </a:txBody>
+                  <a:tcPr marT="0" marB="0" marR="44450" marL="44450" anchor="ctr">
+                    <a:lnL cap="flat" cmpd="sng" w="6350">
+                      <a:solidFill>
+                        <a:srgbClr val="000000"/>
+                      </a:solidFill>
+                      <a:prstDash val="solid"/>
+                      <a:round/>
+                      <a:headEnd len="sm" w="sm" type="none"/>
+                      <a:tailEnd len="sm" w="sm" type="none"/>
+                    </a:lnL>
+                    <a:lnR cap="flat" cmpd="sng">
+                      <a:solidFill>
+                        <a:srgbClr val="000000"/>
+                      </a:solidFill>
+                      <a:prstDash val="solid"/>
+                      <a:round/>
+                      <a:headEnd len="sm" w="sm" type="none"/>
+                      <a:tailEnd len="sm" w="sm" type="none"/>
+                    </a:lnR>
+                    <a:lnT cap="flat" cmpd="sng" w="6350">
+                      <a:solidFill>
+                        <a:srgbClr val="000000"/>
+                      </a:solidFill>
+                      <a:prstDash val="solid"/>
+                      <a:round/>
+                      <a:headEnd len="sm" w="sm" type="none"/>
+                      <a:tailEnd len="sm" w="sm" type="none"/>
+                    </a:lnT>
+                    <a:lnB cap="flat" cmpd="sng">
+                      <a:solidFill>
+                        <a:srgbClr val="000000"/>
+                      </a:solidFill>
+                      <a:prstDash val="solid"/>
+                      <a:round/>
+                      <a:headEnd len="sm" w="sm" type="none"/>
+                      <a:tailEnd len="sm" w="sm" type="none"/>
+                    </a:lnB>
+                  </a:tcPr>
+                </a:tc>
+                <a:tc>
+                  <a:txBody>
+                    <a:bodyPr/>
+                    <a:lstStyle/>
+                    <a:p>
+                      <a:pPr indent="0" lvl="0" marL="0" rtl="0" algn="ctr">
+                        <a:spcBef>
+                          <a:spcPts val="0"/>
+                        </a:spcBef>
+                        <a:spcAft>
+                          <a:spcPts val="0"/>
+                        </a:spcAft>
+                        <a:buNone/>
+                      </a:pPr>
+                      <a:r>
+                        <a:rPr b="1" lang="es-CL" sz="1500">
+                          <a:latin typeface="Carlito"/>
+                          <a:ea typeface="Carlito"/>
+                          <a:cs typeface="Carlito"/>
+                          <a:sym typeface="Carlito"/>
+                        </a:rPr>
+                        <a:t>Actividad</a:t>
+                      </a:r>
+                      <a:endParaRPr b="1" sz="1500">
+                        <a:latin typeface="Carlito"/>
+                        <a:ea typeface="Carlito"/>
+                        <a:cs typeface="Carlito"/>
+                        <a:sym typeface="Carlito"/>
+                      </a:endParaRPr>
+                    </a:p>
+                  </a:txBody>
+                  <a:tcPr marT="0" marB="0" marR="44450" marL="44450" anchor="ctr">
+                    <a:lnL cap="flat" cmpd="sng">
+                      <a:solidFill>
+                        <a:srgbClr val="000000"/>
+                      </a:solidFill>
+                      <a:prstDash val="solid"/>
+                      <a:round/>
+                      <a:headEnd len="sm" w="sm" type="none"/>
+                      <a:tailEnd len="sm" w="sm" type="none"/>
+                    </a:lnL>
+                    <a:lnR cap="flat" cmpd="sng" w="6350">
+                      <a:solidFill>
+                        <a:srgbClr val="000000"/>
+                      </a:solidFill>
+                      <a:prstDash val="solid"/>
+                      <a:round/>
+                      <a:headEnd len="sm" w="sm" type="none"/>
+                      <a:tailEnd len="sm" w="sm" type="none"/>
+                    </a:lnR>
+                    <a:lnT cap="flat" cmpd="sng" w="6350">
+                      <a:solidFill>
+                        <a:srgbClr val="000000"/>
+                      </a:solidFill>
+                      <a:prstDash val="solid"/>
+                      <a:round/>
+                      <a:headEnd len="sm" w="sm" type="none"/>
+                      <a:tailEnd len="sm" w="sm" type="none"/>
+                    </a:lnT>
+                    <a:lnB cap="flat" cmpd="sng">
+                      <a:solidFill>
+                        <a:srgbClr val="000000"/>
+                      </a:solidFill>
+                      <a:prstDash val="solid"/>
+                      <a:round/>
+                      <a:headEnd len="sm" w="sm" type="none"/>
+                      <a:tailEnd len="sm" w="sm" type="none"/>
+                    </a:lnB>
+                  </a:tcPr>
+                </a:tc>
+              </a:tr>
+              <a:tr h="277900">
+                <a:tc>
+                  <a:txBody>
+                    <a:bodyPr/>
+                    <a:lstStyle/>
+                    <a:p>
+                      <a:pPr indent="0" lvl="0" marL="0" rtl="0" algn="l">
+                        <a:spcBef>
+                          <a:spcPts val="0"/>
+                        </a:spcBef>
+                        <a:spcAft>
+                          <a:spcPts val="0"/>
+                        </a:spcAft>
+                        <a:buNone/>
+                      </a:pPr>
+                      <a:r>
+                        <a:rPr b="1" lang="es-CL" sz="1500">
+                          <a:latin typeface="Carlito"/>
+                          <a:ea typeface="Carlito"/>
+                          <a:cs typeface="Carlito"/>
+                          <a:sym typeface="Carlito"/>
+                        </a:rPr>
+                        <a:t>S1</a:t>
+                      </a:r>
+                      <a:endParaRPr b="1" sz="1500">
+                        <a:latin typeface="Carlito"/>
+                        <a:ea typeface="Carlito"/>
+                        <a:cs typeface="Carlito"/>
+                        <a:sym typeface="Carlito"/>
+                      </a:endParaRPr>
+                    </a:p>
+                  </a:txBody>
+                  <a:tcPr marT="0" marB="0" marR="44450" marL="44450" anchor="ctr">
+                    <a:lnL cap="flat" cmpd="sng" w="6350">
+                      <a:solidFill>
+                        <a:srgbClr val="000000"/>
+                      </a:solidFill>
+                      <a:prstDash val="solid"/>
+                      <a:round/>
+                      <a:headEnd len="sm" w="sm" type="none"/>
+                      <a:tailEnd len="sm" w="sm" type="none"/>
+                    </a:lnL>
+                    <a:lnR cap="flat" cmpd="sng">
+                      <a:solidFill>
+                        <a:srgbClr val="000000"/>
+                      </a:solidFill>
+                      <a:prstDash val="solid"/>
+                      <a:round/>
+                      <a:headEnd len="sm" w="sm" type="none"/>
+                      <a:tailEnd len="sm" w="sm" type="none"/>
+                    </a:lnR>
+                    <a:lnT cap="flat" cmpd="sng">
+                      <a:solidFill>
+                        <a:srgbClr val="000000"/>
+                      </a:solidFill>
+                      <a:prstDash val="solid"/>
+                      <a:round/>
+                      <a:headEnd len="sm" w="sm" type="none"/>
+                      <a:tailEnd len="sm" w="sm" type="none"/>
+                    </a:lnT>
+                    <a:lnB cap="flat" cmpd="sng">
+                      <a:solidFill>
+                        <a:srgbClr val="000000"/>
+                      </a:solidFill>
+                      <a:prstDash val="solid"/>
+                      <a:round/>
+                      <a:headEnd len="sm" w="sm" type="none"/>
+                      <a:tailEnd len="sm" w="sm" type="none"/>
+                    </a:lnB>
+                  </a:tcPr>
+                </a:tc>
+                <a:tc>
+                  <a:txBody>
+                    <a:bodyPr/>
+                    <a:lstStyle/>
+                    <a:p>
+                      <a:pPr indent="0" lvl="0" marL="0" rtl="0" algn="l">
+                        <a:spcBef>
+                          <a:spcPts val="0"/>
+                        </a:spcBef>
+                        <a:spcAft>
+                          <a:spcPts val="0"/>
+                        </a:spcAft>
+                        <a:buNone/>
+                      </a:pPr>
+                      <a:r>
+                        <a:rPr lang="es-CL" sz="1500">
+                          <a:latin typeface="Carlito"/>
+                          <a:ea typeface="Carlito"/>
+                          <a:cs typeface="Carlito"/>
+                          <a:sym typeface="Carlito"/>
+                        </a:rPr>
+                        <a:t>Metodología, requerimientos, backlog y GitHub</a:t>
+                      </a:r>
+                      <a:endParaRPr sz="1500">
+                        <a:latin typeface="Carlito"/>
+                        <a:ea typeface="Carlito"/>
+                        <a:cs typeface="Carlito"/>
+                        <a:sym typeface="Carlito"/>
+                      </a:endParaRPr>
+                    </a:p>
+                  </a:txBody>
+                  <a:tcPr marT="0" marB="0" marR="44450" marL="44450" anchor="ctr">
+                    <a:lnL cap="flat" cmpd="sng">
+                      <a:solidFill>
+                        <a:srgbClr val="000000"/>
+                      </a:solidFill>
+                      <a:prstDash val="solid"/>
+                      <a:round/>
+                      <a:headEnd len="sm" w="sm" type="none"/>
+                      <a:tailEnd len="sm" w="sm" type="none"/>
+                    </a:lnL>
+                    <a:lnR cap="flat" cmpd="sng" w="6350">
+                      <a:solidFill>
+                        <a:srgbClr val="000000"/>
+                      </a:solidFill>
+                      <a:prstDash val="solid"/>
+                      <a:round/>
+                      <a:headEnd len="sm" w="sm" type="none"/>
+                      <a:tailEnd len="sm" w="sm" type="none"/>
+                    </a:lnR>
+                    <a:lnT cap="flat" cmpd="sng">
+                      <a:solidFill>
+                        <a:srgbClr val="000000"/>
+                      </a:solidFill>
+                      <a:prstDash val="solid"/>
+                      <a:round/>
+                      <a:headEnd len="sm" w="sm" type="none"/>
+                      <a:tailEnd len="sm" w="sm" type="none"/>
+                    </a:lnT>
+                    <a:lnB cap="flat" cmpd="sng">
+                      <a:solidFill>
+                        <a:srgbClr val="000000"/>
+                      </a:solidFill>
+                      <a:prstDash val="solid"/>
+                      <a:round/>
+                      <a:headEnd len="sm" w="sm" type="none"/>
+                      <a:tailEnd len="sm" w="sm" type="none"/>
+                    </a:lnB>
+                  </a:tcPr>
+                </a:tc>
+              </a:tr>
+              <a:tr h="277900">
+                <a:tc>
+                  <a:txBody>
+                    <a:bodyPr/>
+                    <a:lstStyle/>
+                    <a:p>
+                      <a:pPr indent="0" lvl="0" marL="0" rtl="0" algn="l">
+                        <a:spcBef>
+                          <a:spcPts val="0"/>
+                        </a:spcBef>
+                        <a:spcAft>
+                          <a:spcPts val="0"/>
+                        </a:spcAft>
+                        <a:buNone/>
+                      </a:pPr>
+                      <a:r>
+                        <a:rPr b="1" lang="es-CL" sz="1500">
+                          <a:latin typeface="Carlito"/>
+                          <a:ea typeface="Carlito"/>
+                          <a:cs typeface="Carlito"/>
+                          <a:sym typeface="Carlito"/>
+                        </a:rPr>
+                        <a:t>S2</a:t>
+                      </a:r>
+                      <a:endParaRPr b="1" sz="1500">
+                        <a:latin typeface="Carlito"/>
+                        <a:ea typeface="Carlito"/>
+                        <a:cs typeface="Carlito"/>
+                        <a:sym typeface="Carlito"/>
+                      </a:endParaRPr>
+                    </a:p>
+                  </a:txBody>
+                  <a:tcPr marT="0" marB="0" marR="44450" marL="44450" anchor="ctr">
+                    <a:lnL cap="flat" cmpd="sng" w="6350">
+                      <a:solidFill>
+                        <a:srgbClr val="000000"/>
+                      </a:solidFill>
+                      <a:prstDash val="solid"/>
+                      <a:round/>
+                      <a:headEnd len="sm" w="sm" type="none"/>
+                      <a:tailEnd len="sm" w="sm" type="none"/>
+                    </a:lnL>
+                    <a:lnR cap="flat" cmpd="sng">
+                      <a:solidFill>
+                        <a:srgbClr val="000000"/>
+                      </a:solidFill>
+                      <a:prstDash val="solid"/>
+                      <a:round/>
+                      <a:headEnd len="sm" w="sm" type="none"/>
+                      <a:tailEnd len="sm" w="sm" type="none"/>
+                    </a:lnR>
+                    <a:lnT cap="flat" cmpd="sng">
+                      <a:solidFill>
+                        <a:srgbClr val="000000"/>
+                      </a:solidFill>
+                      <a:prstDash val="solid"/>
+                      <a:round/>
+                      <a:headEnd len="sm" w="sm" type="none"/>
+                      <a:tailEnd len="sm" w="sm" type="none"/>
+                    </a:lnT>
+                    <a:lnB cap="flat" cmpd="sng">
+                      <a:solidFill>
+                        <a:srgbClr val="000000"/>
+                      </a:solidFill>
+                      <a:prstDash val="solid"/>
+                      <a:round/>
+                      <a:headEnd len="sm" w="sm" type="none"/>
+                      <a:tailEnd len="sm" w="sm" type="none"/>
+                    </a:lnB>
+                  </a:tcPr>
+                </a:tc>
+                <a:tc>
+                  <a:txBody>
+                    <a:bodyPr/>
+                    <a:lstStyle/>
+                    <a:p>
+                      <a:pPr indent="0" lvl="0" marL="0" rtl="0" algn="l">
+                        <a:spcBef>
+                          <a:spcPts val="0"/>
+                        </a:spcBef>
+                        <a:spcAft>
+                          <a:spcPts val="0"/>
+                        </a:spcAft>
+                        <a:buNone/>
+                      </a:pPr>
+                      <a:r>
+                        <a:rPr lang="es-CL" sz="1500">
+                          <a:latin typeface="Carlito"/>
+                          <a:ea typeface="Carlito"/>
+                          <a:cs typeface="Carlito"/>
+                          <a:sym typeface="Carlito"/>
+                        </a:rPr>
+                        <a:t>Arquitectura, modelo de datos y prototipos</a:t>
+                      </a:r>
+                      <a:endParaRPr sz="1500">
+                        <a:latin typeface="Carlito"/>
+                        <a:ea typeface="Carlito"/>
+                        <a:cs typeface="Carlito"/>
+                        <a:sym typeface="Carlito"/>
+                      </a:endParaRPr>
+                    </a:p>
+                  </a:txBody>
+                  <a:tcPr marT="0" marB="0" marR="44450" marL="44450" anchor="ctr">
+                    <a:lnL cap="flat" cmpd="sng">
+                      <a:solidFill>
+                        <a:srgbClr val="000000"/>
+                      </a:solidFill>
+                      <a:prstDash val="solid"/>
+                      <a:round/>
+                      <a:headEnd len="sm" w="sm" type="none"/>
+                      <a:tailEnd len="sm" w="sm" type="none"/>
+                    </a:lnL>
+                    <a:lnR cap="flat" cmpd="sng" w="6350">
+                      <a:solidFill>
+                        <a:srgbClr val="000000"/>
+                      </a:solidFill>
+                      <a:prstDash val="solid"/>
+                      <a:round/>
+                      <a:headEnd len="sm" w="sm" type="none"/>
+                      <a:tailEnd len="sm" w="sm" type="none"/>
+                    </a:lnR>
+                    <a:lnT cap="flat" cmpd="sng">
+                      <a:solidFill>
+                        <a:srgbClr val="000000"/>
+                      </a:solidFill>
+                      <a:prstDash val="solid"/>
+                      <a:round/>
+                      <a:headEnd len="sm" w="sm" type="none"/>
+                      <a:tailEnd len="sm" w="sm" type="none"/>
+                    </a:lnT>
+                    <a:lnB cap="flat" cmpd="sng">
+                      <a:solidFill>
+                        <a:srgbClr val="000000"/>
+                      </a:solidFill>
+                      <a:prstDash val="solid"/>
+                      <a:round/>
+                      <a:headEnd len="sm" w="sm" type="none"/>
+                      <a:tailEnd len="sm" w="sm" type="none"/>
+                    </a:lnB>
+                  </a:tcPr>
+                </a:tc>
+              </a:tr>
+              <a:tr h="277900">
+                <a:tc>
+                  <a:txBody>
+                    <a:bodyPr/>
+                    <a:lstStyle/>
+                    <a:p>
+                      <a:pPr indent="0" lvl="0" marL="0" rtl="0" algn="l">
+                        <a:spcBef>
+                          <a:spcPts val="0"/>
+                        </a:spcBef>
+                        <a:spcAft>
+                          <a:spcPts val="0"/>
+                        </a:spcAft>
+                        <a:buNone/>
+                      </a:pPr>
+                      <a:r>
+                        <a:rPr b="1" lang="es-CL" sz="1500">
+                          <a:latin typeface="Carlito"/>
+                          <a:ea typeface="Carlito"/>
+                          <a:cs typeface="Carlito"/>
+                          <a:sym typeface="Carlito"/>
+                        </a:rPr>
+                        <a:t>S3</a:t>
+                      </a:r>
+                      <a:endParaRPr b="1" sz="1500">
+                        <a:latin typeface="Carlito"/>
+                        <a:ea typeface="Carlito"/>
+                        <a:cs typeface="Carlito"/>
+                        <a:sym typeface="Carlito"/>
+                      </a:endParaRPr>
+                    </a:p>
+                  </a:txBody>
+                  <a:tcPr marT="0" marB="0" marR="44450" marL="44450" anchor="ctr">
+                    <a:lnL cap="flat" cmpd="sng" w="6350">
+                      <a:solidFill>
+                        <a:srgbClr val="000000"/>
+                      </a:solidFill>
+                      <a:prstDash val="solid"/>
+                      <a:round/>
+                      <a:headEnd len="sm" w="sm" type="none"/>
+                      <a:tailEnd len="sm" w="sm" type="none"/>
+                    </a:lnL>
+                    <a:lnR cap="flat" cmpd="sng">
+                      <a:solidFill>
+                        <a:srgbClr val="000000"/>
+                      </a:solidFill>
+                      <a:prstDash val="solid"/>
+                      <a:round/>
+                      <a:headEnd len="sm" w="sm" type="none"/>
+                      <a:tailEnd len="sm" w="sm" type="none"/>
+                    </a:lnR>
+                    <a:lnT cap="flat" cmpd="sng">
+                      <a:solidFill>
+                        <a:srgbClr val="000000"/>
+                      </a:solidFill>
+                      <a:prstDash val="solid"/>
+                      <a:round/>
+                      <a:headEnd len="sm" w="sm" type="none"/>
+                      <a:tailEnd len="sm" w="sm" type="none"/>
+                    </a:lnT>
+                    <a:lnB cap="flat" cmpd="sng">
+                      <a:solidFill>
+                        <a:srgbClr val="000000"/>
+                      </a:solidFill>
+                      <a:prstDash val="solid"/>
+                      <a:round/>
+                      <a:headEnd len="sm" w="sm" type="none"/>
+                      <a:tailEnd len="sm" w="sm" type="none"/>
+                    </a:lnB>
+                  </a:tcPr>
+                </a:tc>
+                <a:tc>
+                  <a:txBody>
+                    <a:bodyPr/>
+                    <a:lstStyle/>
+                    <a:p>
+                      <a:pPr indent="0" lvl="0" marL="0" rtl="0" algn="l">
+                        <a:spcBef>
+                          <a:spcPts val="0"/>
+                        </a:spcBef>
+                        <a:spcAft>
+                          <a:spcPts val="0"/>
+                        </a:spcAft>
+                        <a:buNone/>
+                      </a:pPr>
+                      <a:r>
+                        <a:rPr lang="es-CL" sz="1500">
+                          <a:latin typeface="Carlito"/>
+                          <a:ea typeface="Carlito"/>
+                          <a:cs typeface="Carlito"/>
+                          <a:sym typeface="Carlito"/>
+                        </a:rPr>
+                        <a:t>Base técnica, autenticación, roles y API</a:t>
+                      </a:r>
+                      <a:endParaRPr sz="1500">
+                        <a:latin typeface="Carlito"/>
+                        <a:ea typeface="Carlito"/>
+                        <a:cs typeface="Carlito"/>
+                        <a:sym typeface="Carlito"/>
+                      </a:endParaRPr>
+                    </a:p>
+                  </a:txBody>
+                  <a:tcPr marT="0" marB="0" marR="44450" marL="44450" anchor="ctr">
+                    <a:lnL cap="flat" cmpd="sng">
+                      <a:solidFill>
+                        <a:srgbClr val="000000"/>
+                      </a:solidFill>
+                      <a:prstDash val="solid"/>
+                      <a:round/>
+                      <a:headEnd len="sm" w="sm" type="none"/>
+                      <a:tailEnd len="sm" w="sm" type="none"/>
+                    </a:lnL>
+                    <a:lnR cap="flat" cmpd="sng" w="6350">
+                      <a:solidFill>
+                        <a:srgbClr val="000000"/>
+                      </a:solidFill>
+                      <a:prstDash val="solid"/>
+                      <a:round/>
+                      <a:headEnd len="sm" w="sm" type="none"/>
+                      <a:tailEnd len="sm" w="sm" type="none"/>
+                    </a:lnR>
+                    <a:lnT cap="flat" cmpd="sng">
+                      <a:solidFill>
+                        <a:srgbClr val="000000"/>
+                      </a:solidFill>
+                      <a:prstDash val="solid"/>
+                      <a:round/>
+                      <a:headEnd len="sm" w="sm" type="none"/>
+                      <a:tailEnd len="sm" w="sm" type="none"/>
+                    </a:lnT>
+                    <a:lnB cap="flat" cmpd="sng">
+                      <a:solidFill>
+                        <a:srgbClr val="000000"/>
+                      </a:solidFill>
+                      <a:prstDash val="solid"/>
+                      <a:round/>
+                      <a:headEnd len="sm" w="sm" type="none"/>
+                      <a:tailEnd len="sm" w="sm" type="none"/>
+                    </a:lnB>
+                  </a:tcPr>
+                </a:tc>
+              </a:tr>
+              <a:tr h="277900">
+                <a:tc>
+                  <a:txBody>
+                    <a:bodyPr/>
+                    <a:lstStyle/>
+                    <a:p>
+                      <a:pPr indent="0" lvl="0" marL="0" rtl="0" algn="l">
+                        <a:spcBef>
+                          <a:spcPts val="0"/>
+                        </a:spcBef>
+                        <a:spcAft>
+                          <a:spcPts val="0"/>
+                        </a:spcAft>
+                        <a:buNone/>
+                      </a:pPr>
+                      <a:r>
+                        <a:rPr b="1" lang="es-CL" sz="1500">
+                          <a:latin typeface="Carlito"/>
+                          <a:ea typeface="Carlito"/>
+                          <a:cs typeface="Carlito"/>
+                          <a:sym typeface="Carlito"/>
+                        </a:rPr>
+                        <a:t>S4</a:t>
+                      </a:r>
+                      <a:endParaRPr b="1" sz="1500">
+                        <a:latin typeface="Carlito"/>
+                        <a:ea typeface="Carlito"/>
+                        <a:cs typeface="Carlito"/>
+                        <a:sym typeface="Carlito"/>
+                      </a:endParaRPr>
+                    </a:p>
+                  </a:txBody>
+                  <a:tcPr marT="0" marB="0" marR="44450" marL="44450" anchor="ctr">
+                    <a:lnL cap="flat" cmpd="sng" w="6350">
+                      <a:solidFill>
+                        <a:srgbClr val="000000"/>
+                      </a:solidFill>
+                      <a:prstDash val="solid"/>
+                      <a:round/>
+                      <a:headEnd len="sm" w="sm" type="none"/>
+                      <a:tailEnd len="sm" w="sm" type="none"/>
+                    </a:lnL>
+                    <a:lnR cap="flat" cmpd="sng">
+                      <a:solidFill>
+                        <a:srgbClr val="000000"/>
+                      </a:solidFill>
+                      <a:prstDash val="solid"/>
+                      <a:round/>
+                      <a:headEnd len="sm" w="sm" type="none"/>
+                      <a:tailEnd len="sm" w="sm" type="none"/>
+                    </a:lnR>
+                    <a:lnT cap="flat" cmpd="sng">
+                      <a:solidFill>
+                        <a:srgbClr val="000000"/>
+                      </a:solidFill>
+                      <a:prstDash val="solid"/>
+                      <a:round/>
+                      <a:headEnd len="sm" w="sm" type="none"/>
+                      <a:tailEnd len="sm" w="sm" type="none"/>
+                    </a:lnT>
+                    <a:lnB cap="flat" cmpd="sng">
+                      <a:solidFill>
+                        <a:srgbClr val="000000"/>
+                      </a:solidFill>
+                      <a:prstDash val="solid"/>
+                      <a:round/>
+                      <a:headEnd len="sm" w="sm" type="none"/>
+                      <a:tailEnd len="sm" w="sm" type="none"/>
+                    </a:lnB>
+                  </a:tcPr>
+                </a:tc>
+                <a:tc>
+                  <a:txBody>
+                    <a:bodyPr/>
+                    <a:lstStyle/>
+                    <a:p>
+                      <a:pPr indent="0" lvl="0" marL="0" rtl="0" algn="l">
+                        <a:spcBef>
+                          <a:spcPts val="0"/>
+                        </a:spcBef>
+                        <a:spcAft>
+                          <a:spcPts val="0"/>
+                        </a:spcAft>
+                        <a:buNone/>
+                      </a:pPr>
+                      <a:r>
+                        <a:rPr lang="es-CL" sz="1500">
+                          <a:latin typeface="Carlito"/>
+                          <a:ea typeface="Carlito"/>
+                          <a:cs typeface="Carlito"/>
+                          <a:sym typeface="Carlito"/>
+                        </a:rPr>
+                        <a:t>Clientes y pedidos con máquina de estados</a:t>
+                      </a:r>
+                      <a:endParaRPr sz="1500">
+                        <a:latin typeface="Carlito"/>
+                        <a:ea typeface="Carlito"/>
+                        <a:cs typeface="Carlito"/>
+                        <a:sym typeface="Carlito"/>
+                      </a:endParaRPr>
+                    </a:p>
+                  </a:txBody>
+                  <a:tcPr marT="0" marB="0" marR="44450" marL="44450" anchor="ctr">
+                    <a:lnL cap="flat" cmpd="sng">
+                      <a:solidFill>
+                        <a:srgbClr val="000000"/>
+                      </a:solidFill>
+                      <a:prstDash val="solid"/>
+                      <a:round/>
+                      <a:headEnd len="sm" w="sm" type="none"/>
+                      <a:tailEnd len="sm" w="sm" type="none"/>
+                    </a:lnL>
+                    <a:lnR cap="flat" cmpd="sng" w="6350">
+                      <a:solidFill>
+                        <a:srgbClr val="000000"/>
+                      </a:solidFill>
+                      <a:prstDash val="solid"/>
+                      <a:round/>
+                      <a:headEnd len="sm" w="sm" type="none"/>
+                      <a:tailEnd len="sm" w="sm" type="none"/>
+                    </a:lnR>
+                    <a:lnT cap="flat" cmpd="sng">
+                      <a:solidFill>
+                        <a:srgbClr val="000000"/>
+                      </a:solidFill>
+                      <a:prstDash val="solid"/>
+                      <a:round/>
+                      <a:headEnd len="sm" w="sm" type="none"/>
+                      <a:tailEnd len="sm" w="sm" type="none"/>
+                    </a:lnT>
+                    <a:lnB cap="flat" cmpd="sng">
+                      <a:solidFill>
+                        <a:srgbClr val="000000"/>
+                      </a:solidFill>
+                      <a:prstDash val="solid"/>
+                      <a:round/>
+                      <a:headEnd len="sm" w="sm" type="none"/>
+                      <a:tailEnd len="sm" w="sm" type="none"/>
+                    </a:lnB>
+                  </a:tcPr>
+                </a:tc>
+              </a:tr>
+              <a:tr h="277900">
+                <a:tc>
+                  <a:txBody>
+                    <a:bodyPr/>
+                    <a:lstStyle/>
+                    <a:p>
+                      <a:pPr indent="0" lvl="0" marL="0" rtl="0" algn="l">
+                        <a:spcBef>
+                          <a:spcPts val="0"/>
+                        </a:spcBef>
+                        <a:spcAft>
+                          <a:spcPts val="0"/>
+                        </a:spcAft>
+                        <a:buNone/>
+                      </a:pPr>
+                      <a:r>
+                        <a:rPr b="1" lang="es-CL" sz="1500">
+                          <a:latin typeface="Carlito"/>
+                          <a:ea typeface="Carlito"/>
+                          <a:cs typeface="Carlito"/>
+                          <a:sym typeface="Carlito"/>
+                        </a:rPr>
+                        <a:t>S5</a:t>
+                      </a:r>
+                      <a:endParaRPr b="1" sz="1500">
+                        <a:latin typeface="Carlito"/>
+                        <a:ea typeface="Carlito"/>
+                        <a:cs typeface="Carlito"/>
+                        <a:sym typeface="Carlito"/>
+                      </a:endParaRPr>
+                    </a:p>
+                  </a:txBody>
+                  <a:tcPr marT="0" marB="0" marR="44450" marL="44450" anchor="ctr">
+                    <a:lnL cap="flat" cmpd="sng" w="6350">
+                      <a:solidFill>
+                        <a:srgbClr val="000000"/>
+                      </a:solidFill>
+                      <a:prstDash val="solid"/>
+                      <a:round/>
+                      <a:headEnd len="sm" w="sm" type="none"/>
+                      <a:tailEnd len="sm" w="sm" type="none"/>
+                    </a:lnL>
+                    <a:lnR cap="flat" cmpd="sng">
+                      <a:solidFill>
+                        <a:srgbClr val="000000"/>
+                      </a:solidFill>
+                      <a:prstDash val="solid"/>
+                      <a:round/>
+                      <a:headEnd len="sm" w="sm" type="none"/>
+                      <a:tailEnd len="sm" w="sm" type="none"/>
+                    </a:lnR>
+                    <a:lnT cap="flat" cmpd="sng">
+                      <a:solidFill>
+                        <a:srgbClr val="000000"/>
+                      </a:solidFill>
+                      <a:prstDash val="solid"/>
+                      <a:round/>
+                      <a:headEnd len="sm" w="sm" type="none"/>
+                      <a:tailEnd len="sm" w="sm" type="none"/>
+                    </a:lnT>
+                    <a:lnB cap="flat" cmpd="sng">
+                      <a:solidFill>
+                        <a:srgbClr val="000000"/>
+                      </a:solidFill>
+                      <a:prstDash val="solid"/>
+                      <a:round/>
+                      <a:headEnd len="sm" w="sm" type="none"/>
+                      <a:tailEnd len="sm" w="sm" type="none"/>
+                    </a:lnB>
+                  </a:tcPr>
+                </a:tc>
+                <a:tc>
+                  <a:txBody>
+                    <a:bodyPr/>
+                    <a:lstStyle/>
+                    <a:p>
+                      <a:pPr indent="0" lvl="0" marL="0" rtl="0" algn="l">
+                        <a:spcBef>
+                          <a:spcPts val="0"/>
+                        </a:spcBef>
+                        <a:spcAft>
+                          <a:spcPts val="0"/>
+                        </a:spcAft>
+                        <a:buNone/>
+                      </a:pPr>
+                      <a:r>
+                        <a:rPr lang="es-CL" sz="1500">
+                          <a:latin typeface="Carlito"/>
+                          <a:ea typeface="Carlito"/>
+                          <a:cs typeface="Carlito"/>
+                          <a:sym typeface="Carlito"/>
+                        </a:rPr>
+                        <a:t>Fichas técnicas, costos y cotizador automático</a:t>
+                      </a:r>
+                      <a:endParaRPr sz="1500">
+                        <a:latin typeface="Carlito"/>
+                        <a:ea typeface="Carlito"/>
+                        <a:cs typeface="Carlito"/>
+                        <a:sym typeface="Carlito"/>
+                      </a:endParaRPr>
+                    </a:p>
+                  </a:txBody>
+                  <a:tcPr marT="0" marB="0" marR="44450" marL="44450" anchor="ctr">
+                    <a:lnL cap="flat" cmpd="sng">
+                      <a:solidFill>
+                        <a:srgbClr val="000000"/>
+                      </a:solidFill>
+                      <a:prstDash val="solid"/>
+                      <a:round/>
+                      <a:headEnd len="sm" w="sm" type="none"/>
+                      <a:tailEnd len="sm" w="sm" type="none"/>
+                    </a:lnL>
+                    <a:lnR cap="flat" cmpd="sng" w="6350">
+                      <a:solidFill>
+                        <a:srgbClr val="000000"/>
+                      </a:solidFill>
+                      <a:prstDash val="solid"/>
+                      <a:round/>
+                      <a:headEnd len="sm" w="sm" type="none"/>
+                      <a:tailEnd len="sm" w="sm" type="none"/>
+                    </a:lnR>
+                    <a:lnT cap="flat" cmpd="sng">
+                      <a:solidFill>
+                        <a:srgbClr val="000000"/>
+                      </a:solidFill>
+                      <a:prstDash val="solid"/>
+                      <a:round/>
+                      <a:headEnd len="sm" w="sm" type="none"/>
+                      <a:tailEnd len="sm" w="sm" type="none"/>
+                    </a:lnT>
+                    <a:lnB cap="flat" cmpd="sng">
+                      <a:solidFill>
+                        <a:srgbClr val="000000"/>
+                      </a:solidFill>
+                      <a:prstDash val="solid"/>
+                      <a:round/>
+                      <a:headEnd len="sm" w="sm" type="none"/>
+                      <a:tailEnd len="sm" w="sm" type="none"/>
+                    </a:lnB>
+                  </a:tcPr>
+                </a:tc>
+              </a:tr>
+              <a:tr h="277900">
+                <a:tc>
+                  <a:txBody>
+                    <a:bodyPr/>
+                    <a:lstStyle/>
+                    <a:p>
+                      <a:pPr indent="0" lvl="0" marL="0" rtl="0" algn="l">
+                        <a:spcBef>
+                          <a:spcPts val="0"/>
+                        </a:spcBef>
+                        <a:spcAft>
+                          <a:spcPts val="0"/>
+                        </a:spcAft>
+                        <a:buNone/>
+                      </a:pPr>
+                      <a:r>
+                        <a:rPr b="1" lang="es-CL" sz="1500">
+                          <a:latin typeface="Carlito"/>
+                          <a:ea typeface="Carlito"/>
+                          <a:cs typeface="Carlito"/>
+                          <a:sym typeface="Carlito"/>
+                        </a:rPr>
+                        <a:t>S6</a:t>
+                      </a:r>
+                      <a:endParaRPr b="1" sz="1500">
+                        <a:latin typeface="Carlito"/>
+                        <a:ea typeface="Carlito"/>
+                        <a:cs typeface="Carlito"/>
+                        <a:sym typeface="Carlito"/>
+                      </a:endParaRPr>
+                    </a:p>
+                  </a:txBody>
+                  <a:tcPr marT="0" marB="0" marR="44450" marL="44450" anchor="ctr">
+                    <a:lnL cap="flat" cmpd="sng" w="6350">
+                      <a:solidFill>
+                        <a:srgbClr val="000000"/>
+                      </a:solidFill>
+                      <a:prstDash val="solid"/>
+                      <a:round/>
+                      <a:headEnd len="sm" w="sm" type="none"/>
+                      <a:tailEnd len="sm" w="sm" type="none"/>
+                    </a:lnL>
+                    <a:lnR cap="flat" cmpd="sng">
+                      <a:solidFill>
+                        <a:srgbClr val="000000"/>
+                      </a:solidFill>
+                      <a:prstDash val="solid"/>
+                      <a:round/>
+                      <a:headEnd len="sm" w="sm" type="none"/>
+                      <a:tailEnd len="sm" w="sm" type="none"/>
+                    </a:lnR>
+                    <a:lnT cap="flat" cmpd="sng">
+                      <a:solidFill>
+                        <a:srgbClr val="000000"/>
+                      </a:solidFill>
+                      <a:prstDash val="solid"/>
+                      <a:round/>
+                      <a:headEnd len="sm" w="sm" type="none"/>
+                      <a:tailEnd len="sm" w="sm" type="none"/>
+                    </a:lnT>
+                    <a:lnB cap="flat" cmpd="sng">
+                      <a:solidFill>
+                        <a:srgbClr val="000000"/>
+                      </a:solidFill>
+                      <a:prstDash val="solid"/>
+                      <a:round/>
+                      <a:headEnd len="sm" w="sm" type="none"/>
+                      <a:tailEnd len="sm" w="sm" type="none"/>
+                    </a:lnB>
+                  </a:tcPr>
+                </a:tc>
+                <a:tc>
+                  <a:txBody>
+                    <a:bodyPr/>
+                    <a:lstStyle/>
+                    <a:p>
+                      <a:pPr indent="0" lvl="0" marL="0" rtl="0" algn="l">
+                        <a:spcBef>
+                          <a:spcPts val="0"/>
+                        </a:spcBef>
+                        <a:spcAft>
+                          <a:spcPts val="0"/>
+                        </a:spcAft>
+                        <a:buNone/>
+                      </a:pPr>
+                      <a:r>
+                        <a:rPr lang="es-CL" sz="1500">
+                          <a:latin typeface="Carlito"/>
+                          <a:ea typeface="Carlito"/>
+                          <a:cs typeface="Carlito"/>
+                          <a:sym typeface="Carlito"/>
+                        </a:rPr>
+                        <a:t>Inventario, movimientos y lector QR</a:t>
+                      </a:r>
+                      <a:endParaRPr sz="1500">
+                        <a:latin typeface="Carlito"/>
+                        <a:ea typeface="Carlito"/>
+                        <a:cs typeface="Carlito"/>
+                        <a:sym typeface="Carlito"/>
+                      </a:endParaRPr>
+                    </a:p>
+                  </a:txBody>
+                  <a:tcPr marT="0" marB="0" marR="44450" marL="44450" anchor="ctr">
+                    <a:lnL cap="flat" cmpd="sng">
+                      <a:solidFill>
+                        <a:srgbClr val="000000"/>
+                      </a:solidFill>
+                      <a:prstDash val="solid"/>
+                      <a:round/>
+                      <a:headEnd len="sm" w="sm" type="none"/>
+                      <a:tailEnd len="sm" w="sm" type="none"/>
+                    </a:lnL>
+                    <a:lnR cap="flat" cmpd="sng" w="6350">
+                      <a:solidFill>
+                        <a:srgbClr val="000000"/>
+                      </a:solidFill>
+                      <a:prstDash val="solid"/>
+                      <a:round/>
+                      <a:headEnd len="sm" w="sm" type="none"/>
+                      <a:tailEnd len="sm" w="sm" type="none"/>
+                    </a:lnR>
+                    <a:lnT cap="flat" cmpd="sng">
+                      <a:solidFill>
+                        <a:srgbClr val="000000"/>
+                      </a:solidFill>
+                      <a:prstDash val="solid"/>
+                      <a:round/>
+                      <a:headEnd len="sm" w="sm" type="none"/>
+                      <a:tailEnd len="sm" w="sm" type="none"/>
+                    </a:lnT>
+                    <a:lnB cap="flat" cmpd="sng">
+                      <a:solidFill>
+                        <a:srgbClr val="000000"/>
+                      </a:solidFill>
+                      <a:prstDash val="solid"/>
+                      <a:round/>
+                      <a:headEnd len="sm" w="sm" type="none"/>
+                      <a:tailEnd len="sm" w="sm" type="none"/>
+                    </a:lnB>
+                  </a:tcPr>
+                </a:tc>
+              </a:tr>
+              <a:tr h="277900">
+                <a:tc>
+                  <a:txBody>
+                    <a:bodyPr/>
+                    <a:lstStyle/>
+                    <a:p>
+                      <a:pPr indent="0" lvl="0" marL="0" rtl="0" algn="l">
+                        <a:spcBef>
+                          <a:spcPts val="0"/>
+                        </a:spcBef>
+                        <a:spcAft>
+                          <a:spcPts val="0"/>
+                        </a:spcAft>
+                        <a:buNone/>
+                      </a:pPr>
+                      <a:r>
+                        <a:rPr b="1" lang="es-CL" sz="1500">
+                          <a:latin typeface="Carlito"/>
+                          <a:ea typeface="Carlito"/>
+                          <a:cs typeface="Carlito"/>
+                          <a:sym typeface="Carlito"/>
+                        </a:rPr>
+                        <a:t>S7</a:t>
+                      </a:r>
+                      <a:endParaRPr b="1" sz="1500">
+                        <a:latin typeface="Carlito"/>
+                        <a:ea typeface="Carlito"/>
+                        <a:cs typeface="Carlito"/>
+                        <a:sym typeface="Carlito"/>
+                      </a:endParaRPr>
+                    </a:p>
+                  </a:txBody>
+                  <a:tcPr marT="0" marB="0" marR="44450" marL="44450" anchor="ctr">
+                    <a:lnL cap="flat" cmpd="sng" w="6350">
+                      <a:solidFill>
+                        <a:srgbClr val="000000"/>
+                      </a:solidFill>
+                      <a:prstDash val="solid"/>
+                      <a:round/>
+                      <a:headEnd len="sm" w="sm" type="none"/>
+                      <a:tailEnd len="sm" w="sm" type="none"/>
+                    </a:lnL>
+                    <a:lnR cap="flat" cmpd="sng">
+                      <a:solidFill>
+                        <a:srgbClr val="000000"/>
+                      </a:solidFill>
+                      <a:prstDash val="solid"/>
+                      <a:round/>
+                      <a:headEnd len="sm" w="sm" type="none"/>
+                      <a:tailEnd len="sm" w="sm" type="none"/>
+                    </a:lnR>
+                    <a:lnT cap="flat" cmpd="sng">
+                      <a:solidFill>
+                        <a:srgbClr val="000000"/>
+                      </a:solidFill>
+                      <a:prstDash val="solid"/>
+                      <a:round/>
+                      <a:headEnd len="sm" w="sm" type="none"/>
+                      <a:tailEnd len="sm" w="sm" type="none"/>
+                    </a:lnT>
+                    <a:lnB cap="flat" cmpd="sng">
+                      <a:solidFill>
+                        <a:srgbClr val="000000"/>
+                      </a:solidFill>
+                      <a:prstDash val="solid"/>
+                      <a:round/>
+                      <a:headEnd len="sm" w="sm" type="none"/>
+                      <a:tailEnd len="sm" w="sm" type="none"/>
+                    </a:lnB>
+                  </a:tcPr>
+                </a:tc>
+                <a:tc>
+                  <a:txBody>
+                    <a:bodyPr/>
+                    <a:lstStyle/>
+                    <a:p>
+                      <a:pPr indent="0" lvl="0" marL="0" rtl="0" algn="l">
+                        <a:spcBef>
+                          <a:spcPts val="0"/>
+                        </a:spcBef>
+                        <a:spcAft>
+                          <a:spcPts val="0"/>
+                        </a:spcAft>
+                        <a:buNone/>
+                      </a:pPr>
+                      <a:r>
+                        <a:rPr lang="es-CL" sz="1500">
+                          <a:latin typeface="Carlito"/>
+                          <a:ea typeface="Carlito"/>
+                          <a:cs typeface="Carlito"/>
+                          <a:sym typeface="Carlito"/>
+                        </a:rPr>
+                        <a:t>Ventas, facturación y auditoría</a:t>
+                      </a:r>
+                      <a:endParaRPr sz="1500">
+                        <a:latin typeface="Carlito"/>
+                        <a:ea typeface="Carlito"/>
+                        <a:cs typeface="Carlito"/>
+                        <a:sym typeface="Carlito"/>
+                      </a:endParaRPr>
+                    </a:p>
+                  </a:txBody>
+                  <a:tcPr marT="0" marB="0" marR="44450" marL="44450" anchor="ctr">
+                    <a:lnL cap="flat" cmpd="sng">
+                      <a:solidFill>
+                        <a:srgbClr val="000000"/>
+                      </a:solidFill>
+                      <a:prstDash val="solid"/>
+                      <a:round/>
+                      <a:headEnd len="sm" w="sm" type="none"/>
+                      <a:tailEnd len="sm" w="sm" type="none"/>
+                    </a:lnL>
+                    <a:lnR cap="flat" cmpd="sng" w="6350">
+                      <a:solidFill>
+                        <a:srgbClr val="000000"/>
+                      </a:solidFill>
+                      <a:prstDash val="solid"/>
+                      <a:round/>
+                      <a:headEnd len="sm" w="sm" type="none"/>
+                      <a:tailEnd len="sm" w="sm" type="none"/>
+                    </a:lnR>
+                    <a:lnT cap="flat" cmpd="sng">
+                      <a:solidFill>
+                        <a:srgbClr val="000000"/>
+                      </a:solidFill>
+                      <a:prstDash val="solid"/>
+                      <a:round/>
+                      <a:headEnd len="sm" w="sm" type="none"/>
+                      <a:tailEnd len="sm" w="sm" type="none"/>
+                    </a:lnT>
+                    <a:lnB cap="flat" cmpd="sng">
+                      <a:solidFill>
+                        <a:srgbClr val="000000"/>
+                      </a:solidFill>
+                      <a:prstDash val="solid"/>
+                      <a:round/>
+                      <a:headEnd len="sm" w="sm" type="none"/>
+                      <a:tailEnd len="sm" w="sm" type="none"/>
+                    </a:lnB>
+                  </a:tcPr>
+                </a:tc>
+              </a:tr>
+              <a:tr h="277900">
+                <a:tc>
+                  <a:txBody>
+                    <a:bodyPr/>
+                    <a:lstStyle/>
+                    <a:p>
+                      <a:pPr indent="0" lvl="0" marL="0" rtl="0" algn="l">
+                        <a:spcBef>
+                          <a:spcPts val="0"/>
+                        </a:spcBef>
+                        <a:spcAft>
+                          <a:spcPts val="0"/>
+                        </a:spcAft>
+                        <a:buNone/>
+                      </a:pPr>
+                      <a:r>
+                        <a:rPr b="1" lang="es-CL" sz="1500">
+                          <a:latin typeface="Carlito"/>
+                          <a:ea typeface="Carlito"/>
+                          <a:cs typeface="Carlito"/>
+                          <a:sym typeface="Carlito"/>
+                        </a:rPr>
+                        <a:t>S8</a:t>
+                      </a:r>
+                      <a:endParaRPr b="1" sz="1500">
+                        <a:latin typeface="Carlito"/>
+                        <a:ea typeface="Carlito"/>
+                        <a:cs typeface="Carlito"/>
+                        <a:sym typeface="Carlito"/>
+                      </a:endParaRPr>
+                    </a:p>
+                  </a:txBody>
+                  <a:tcPr marT="0" marB="0" marR="44450" marL="44450" anchor="ctr">
+                    <a:lnL cap="flat" cmpd="sng" w="6350">
+                      <a:solidFill>
+                        <a:srgbClr val="000000"/>
+                      </a:solidFill>
+                      <a:prstDash val="solid"/>
+                      <a:round/>
+                      <a:headEnd len="sm" w="sm" type="none"/>
+                      <a:tailEnd len="sm" w="sm" type="none"/>
+                    </a:lnL>
+                    <a:lnR cap="flat" cmpd="sng">
+                      <a:solidFill>
+                        <a:srgbClr val="000000"/>
+                      </a:solidFill>
+                      <a:prstDash val="solid"/>
+                      <a:round/>
+                      <a:headEnd len="sm" w="sm" type="none"/>
+                      <a:tailEnd len="sm" w="sm" type="none"/>
+                    </a:lnR>
+                    <a:lnT cap="flat" cmpd="sng">
+                      <a:solidFill>
+                        <a:srgbClr val="000000"/>
+                      </a:solidFill>
+                      <a:prstDash val="solid"/>
+                      <a:round/>
+                      <a:headEnd len="sm" w="sm" type="none"/>
+                      <a:tailEnd len="sm" w="sm" type="none"/>
+                    </a:lnT>
+                    <a:lnB cap="flat" cmpd="sng">
+                      <a:solidFill>
+                        <a:srgbClr val="000000"/>
+                      </a:solidFill>
+                      <a:prstDash val="solid"/>
+                      <a:round/>
+                      <a:headEnd len="sm" w="sm" type="none"/>
+                      <a:tailEnd len="sm" w="sm" type="none"/>
+                    </a:lnB>
+                  </a:tcPr>
+                </a:tc>
+                <a:tc>
+                  <a:txBody>
+                    <a:bodyPr/>
+                    <a:lstStyle/>
+                    <a:p>
+                      <a:pPr indent="0" lvl="0" marL="0" rtl="0" algn="l">
+                        <a:spcBef>
+                          <a:spcPts val="0"/>
+                        </a:spcBef>
+                        <a:spcAft>
+                          <a:spcPts val="0"/>
+                        </a:spcAft>
+                        <a:buNone/>
+                      </a:pPr>
+                      <a:r>
+                        <a:rPr lang="es-CL" sz="1500">
+                          <a:latin typeface="Carlito"/>
+                          <a:ea typeface="Carlito"/>
+                          <a:cs typeface="Carlito"/>
+                          <a:sym typeface="Carlito"/>
+                        </a:rPr>
+                        <a:t>Backoffice, dashboard y motor de reglas</a:t>
+                      </a:r>
+                      <a:endParaRPr sz="1500">
+                        <a:latin typeface="Carlito"/>
+                        <a:ea typeface="Carlito"/>
+                        <a:cs typeface="Carlito"/>
+                        <a:sym typeface="Carlito"/>
+                      </a:endParaRPr>
+                    </a:p>
+                  </a:txBody>
+                  <a:tcPr marT="0" marB="0" marR="44450" marL="44450" anchor="ctr">
+                    <a:lnL cap="flat" cmpd="sng">
+                      <a:solidFill>
+                        <a:srgbClr val="000000"/>
+                      </a:solidFill>
+                      <a:prstDash val="solid"/>
+                      <a:round/>
+                      <a:headEnd len="sm" w="sm" type="none"/>
+                      <a:tailEnd len="sm" w="sm" type="none"/>
+                    </a:lnL>
+                    <a:lnR cap="flat" cmpd="sng" w="6350">
+                      <a:solidFill>
+                        <a:srgbClr val="000000"/>
+                      </a:solidFill>
+                      <a:prstDash val="solid"/>
+                      <a:round/>
+                      <a:headEnd len="sm" w="sm" type="none"/>
+                      <a:tailEnd len="sm" w="sm" type="none"/>
+                    </a:lnR>
+                    <a:lnT cap="flat" cmpd="sng">
+                      <a:solidFill>
+                        <a:srgbClr val="000000"/>
+                      </a:solidFill>
+                      <a:prstDash val="solid"/>
+                      <a:round/>
+                      <a:headEnd len="sm" w="sm" type="none"/>
+                      <a:tailEnd len="sm" w="sm" type="none"/>
+                    </a:lnT>
+                    <a:lnB cap="flat" cmpd="sng">
+                      <a:solidFill>
+                        <a:srgbClr val="000000"/>
+                      </a:solidFill>
+                      <a:prstDash val="solid"/>
+                      <a:round/>
+                      <a:headEnd len="sm" w="sm" type="none"/>
+                      <a:tailEnd len="sm" w="sm" type="none"/>
+                    </a:lnB>
+                  </a:tcPr>
+                </a:tc>
+              </a:tr>
+              <a:tr h="277900">
+                <a:tc>
+                  <a:txBody>
+                    <a:bodyPr/>
+                    <a:lstStyle/>
+                    <a:p>
+                      <a:pPr indent="0" lvl="0" marL="0" rtl="0" algn="l">
+                        <a:spcBef>
+                          <a:spcPts val="0"/>
+                        </a:spcBef>
+                        <a:spcAft>
+                          <a:spcPts val="0"/>
+                        </a:spcAft>
+                        <a:buNone/>
+                      </a:pPr>
+                      <a:r>
+                        <a:rPr b="1" lang="es-CL" sz="1500">
+                          <a:latin typeface="Carlito"/>
+                          <a:ea typeface="Carlito"/>
+                          <a:cs typeface="Carlito"/>
+                          <a:sym typeface="Carlito"/>
+                        </a:rPr>
+                        <a:t>S9</a:t>
+                      </a:r>
+                      <a:endParaRPr b="1" sz="1500">
+                        <a:latin typeface="Carlito"/>
+                        <a:ea typeface="Carlito"/>
+                        <a:cs typeface="Carlito"/>
+                        <a:sym typeface="Carlito"/>
+                      </a:endParaRPr>
+                    </a:p>
+                  </a:txBody>
+                  <a:tcPr marT="0" marB="0" marR="44450" marL="44450" anchor="ctr">
+                    <a:lnL cap="flat" cmpd="sng" w="6350">
+                      <a:solidFill>
+                        <a:srgbClr val="000000"/>
+                      </a:solidFill>
+                      <a:prstDash val="solid"/>
+                      <a:round/>
+                      <a:headEnd len="sm" w="sm" type="none"/>
+                      <a:tailEnd len="sm" w="sm" type="none"/>
+                    </a:lnL>
+                    <a:lnR cap="flat" cmpd="sng">
+                      <a:solidFill>
+                        <a:srgbClr val="000000"/>
+                      </a:solidFill>
+                      <a:prstDash val="solid"/>
+                      <a:round/>
+                      <a:headEnd len="sm" w="sm" type="none"/>
+                      <a:tailEnd len="sm" w="sm" type="none"/>
+                    </a:lnR>
+                    <a:lnT cap="flat" cmpd="sng">
+                      <a:solidFill>
+                        <a:srgbClr val="000000"/>
+                      </a:solidFill>
+                      <a:prstDash val="solid"/>
+                      <a:round/>
+                      <a:headEnd len="sm" w="sm" type="none"/>
+                      <a:tailEnd len="sm" w="sm" type="none"/>
+                    </a:lnT>
+                    <a:lnB cap="flat" cmpd="sng">
+                      <a:solidFill>
+                        <a:srgbClr val="000000"/>
+                      </a:solidFill>
+                      <a:prstDash val="solid"/>
+                      <a:round/>
+                      <a:headEnd len="sm" w="sm" type="none"/>
+                      <a:tailEnd len="sm" w="sm" type="none"/>
+                    </a:lnB>
+                  </a:tcPr>
+                </a:tc>
+                <a:tc>
+                  <a:txBody>
+                    <a:bodyPr/>
+                    <a:lstStyle/>
+                    <a:p>
+                      <a:pPr indent="0" lvl="0" marL="0" rtl="0" algn="l">
+                        <a:spcBef>
+                          <a:spcPts val="0"/>
+                        </a:spcBef>
+                        <a:spcAft>
+                          <a:spcPts val="0"/>
+                        </a:spcAft>
+                        <a:buNone/>
+                      </a:pPr>
+                      <a:r>
+                        <a:rPr lang="es-CL" sz="1500">
+                          <a:latin typeface="Carlito"/>
+                          <a:ea typeface="Carlito"/>
+                          <a:cs typeface="Carlito"/>
+                          <a:sym typeface="Carlito"/>
+                        </a:rPr>
+                        <a:t>Aplicación móvil operativa</a:t>
+                      </a:r>
+                      <a:endParaRPr sz="1500">
+                        <a:latin typeface="Carlito"/>
+                        <a:ea typeface="Carlito"/>
+                        <a:cs typeface="Carlito"/>
+                        <a:sym typeface="Carlito"/>
+                      </a:endParaRPr>
+                    </a:p>
+                  </a:txBody>
+                  <a:tcPr marT="0" marB="0" marR="44450" marL="44450" anchor="ctr">
+                    <a:lnL cap="flat" cmpd="sng">
+                      <a:solidFill>
+                        <a:srgbClr val="000000"/>
+                      </a:solidFill>
+                      <a:prstDash val="solid"/>
+                      <a:round/>
+                      <a:headEnd len="sm" w="sm" type="none"/>
+                      <a:tailEnd len="sm" w="sm" type="none"/>
+                    </a:lnL>
+                    <a:lnR cap="flat" cmpd="sng" w="6350">
+                      <a:solidFill>
+                        <a:srgbClr val="000000"/>
+                      </a:solidFill>
+                      <a:prstDash val="solid"/>
+                      <a:round/>
+                      <a:headEnd len="sm" w="sm" type="none"/>
+                      <a:tailEnd len="sm" w="sm" type="none"/>
+                    </a:lnR>
+                    <a:lnT cap="flat" cmpd="sng">
+                      <a:solidFill>
+                        <a:srgbClr val="000000"/>
+                      </a:solidFill>
+                      <a:prstDash val="solid"/>
+                      <a:round/>
+                      <a:headEnd len="sm" w="sm" type="none"/>
+                      <a:tailEnd len="sm" w="sm" type="none"/>
+                    </a:lnT>
+                    <a:lnB cap="flat" cmpd="sng">
+                      <a:solidFill>
+                        <a:srgbClr val="000000"/>
+                      </a:solidFill>
+                      <a:prstDash val="solid"/>
+                      <a:round/>
+                      <a:headEnd len="sm" w="sm" type="none"/>
+                      <a:tailEnd len="sm" w="sm" type="none"/>
+                    </a:lnB>
+                  </a:tcPr>
+                </a:tc>
+              </a:tr>
+              <a:tr h="277900">
+                <a:tc>
+                  <a:txBody>
+                    <a:bodyPr/>
+                    <a:lstStyle/>
+                    <a:p>
+                      <a:pPr indent="0" lvl="0" marL="0" rtl="0" algn="l">
+                        <a:spcBef>
+                          <a:spcPts val="0"/>
+                        </a:spcBef>
+                        <a:spcAft>
+                          <a:spcPts val="0"/>
+                        </a:spcAft>
+                        <a:buNone/>
+                      </a:pPr>
+                      <a:r>
+                        <a:rPr b="1" lang="es-CL" sz="1500">
+                          <a:latin typeface="Carlito"/>
+                          <a:ea typeface="Carlito"/>
+                          <a:cs typeface="Carlito"/>
+                          <a:sym typeface="Carlito"/>
+                        </a:rPr>
+                        <a:t>S10</a:t>
+                      </a:r>
+                      <a:endParaRPr b="1" sz="1500">
+                        <a:latin typeface="Carlito"/>
+                        <a:ea typeface="Carlito"/>
+                        <a:cs typeface="Carlito"/>
+                        <a:sym typeface="Carlito"/>
+                      </a:endParaRPr>
+                    </a:p>
+                  </a:txBody>
+                  <a:tcPr marT="0" marB="0" marR="44450" marL="44450" anchor="ctr">
+                    <a:lnL cap="flat" cmpd="sng" w="6350">
+                      <a:solidFill>
+                        <a:srgbClr val="000000"/>
+                      </a:solidFill>
+                      <a:prstDash val="solid"/>
+                      <a:round/>
+                      <a:headEnd len="sm" w="sm" type="none"/>
+                      <a:tailEnd len="sm" w="sm" type="none"/>
+                    </a:lnL>
+                    <a:lnR cap="flat" cmpd="sng">
+                      <a:solidFill>
+                        <a:srgbClr val="000000"/>
+                      </a:solidFill>
+                      <a:prstDash val="solid"/>
+                      <a:round/>
+                      <a:headEnd len="sm" w="sm" type="none"/>
+                      <a:tailEnd len="sm" w="sm" type="none"/>
+                    </a:lnR>
+                    <a:lnT cap="flat" cmpd="sng">
+                      <a:solidFill>
+                        <a:srgbClr val="000000"/>
+                      </a:solidFill>
+                      <a:prstDash val="solid"/>
+                      <a:round/>
+                      <a:headEnd len="sm" w="sm" type="none"/>
+                      <a:tailEnd len="sm" w="sm" type="none"/>
+                    </a:lnT>
+                    <a:lnB cap="flat" cmpd="sng">
+                      <a:solidFill>
+                        <a:srgbClr val="000000"/>
+                      </a:solidFill>
+                      <a:prstDash val="solid"/>
+                      <a:round/>
+                      <a:headEnd len="sm" w="sm" type="none"/>
+                      <a:tailEnd len="sm" w="sm" type="none"/>
+                    </a:lnB>
+                  </a:tcPr>
+                </a:tc>
+                <a:tc>
+                  <a:txBody>
+                    <a:bodyPr/>
+                    <a:lstStyle/>
+                    <a:p>
+                      <a:pPr indent="0" lvl="0" marL="0" rtl="0" algn="l">
+                        <a:spcBef>
+                          <a:spcPts val="0"/>
+                        </a:spcBef>
+                        <a:spcAft>
+                          <a:spcPts val="0"/>
+                        </a:spcAft>
+                        <a:buNone/>
+                      </a:pPr>
+                      <a:r>
+                        <a:rPr lang="es-CL" sz="1500">
+                          <a:latin typeface="Carlito"/>
+                          <a:ea typeface="Carlito"/>
+                          <a:cs typeface="Carlito"/>
+                          <a:sym typeface="Carlito"/>
+                        </a:rPr>
+                        <a:t>Integración móvil, trazabilidad y pruebas</a:t>
+                      </a:r>
+                      <a:endParaRPr sz="1500">
+                        <a:latin typeface="Carlito"/>
+                        <a:ea typeface="Carlito"/>
+                        <a:cs typeface="Carlito"/>
+                        <a:sym typeface="Carlito"/>
+                      </a:endParaRPr>
+                    </a:p>
+                  </a:txBody>
+                  <a:tcPr marT="0" marB="0" marR="44450" marL="44450" anchor="ctr">
+                    <a:lnL cap="flat" cmpd="sng">
+                      <a:solidFill>
+                        <a:srgbClr val="000000"/>
+                      </a:solidFill>
+                      <a:prstDash val="solid"/>
+                      <a:round/>
+                      <a:headEnd len="sm" w="sm" type="none"/>
+                      <a:tailEnd len="sm" w="sm" type="none"/>
+                    </a:lnL>
+                    <a:lnR cap="flat" cmpd="sng" w="6350">
+                      <a:solidFill>
+                        <a:srgbClr val="000000"/>
+                      </a:solidFill>
+                      <a:prstDash val="solid"/>
+                      <a:round/>
+                      <a:headEnd len="sm" w="sm" type="none"/>
+                      <a:tailEnd len="sm" w="sm" type="none"/>
+                    </a:lnR>
+                    <a:lnT cap="flat" cmpd="sng">
+                      <a:solidFill>
+                        <a:srgbClr val="000000"/>
+                      </a:solidFill>
+                      <a:prstDash val="solid"/>
+                      <a:round/>
+                      <a:headEnd len="sm" w="sm" type="none"/>
+                      <a:tailEnd len="sm" w="sm" type="none"/>
+                    </a:lnT>
+                    <a:lnB cap="flat" cmpd="sng">
+                      <a:solidFill>
+                        <a:srgbClr val="000000"/>
+                      </a:solidFill>
+                      <a:prstDash val="solid"/>
+                      <a:round/>
+                      <a:headEnd len="sm" w="sm" type="none"/>
+                      <a:tailEnd len="sm" w="sm" type="none"/>
+                    </a:lnB>
+                  </a:tcPr>
+                </a:tc>
+              </a:tr>
+              <a:tr h="277900">
+                <a:tc>
+                  <a:txBody>
+                    <a:bodyPr/>
+                    <a:lstStyle/>
+                    <a:p>
+                      <a:pPr indent="0" lvl="0" marL="0" rtl="0" algn="l">
+                        <a:spcBef>
+                          <a:spcPts val="0"/>
+                        </a:spcBef>
+                        <a:spcAft>
+                          <a:spcPts val="0"/>
+                        </a:spcAft>
+                        <a:buNone/>
+                      </a:pPr>
+                      <a:r>
+                        <a:rPr b="1" lang="es-CL" sz="1500">
+                          <a:latin typeface="Carlito"/>
+                          <a:ea typeface="Carlito"/>
+                          <a:cs typeface="Carlito"/>
+                          <a:sym typeface="Carlito"/>
+                        </a:rPr>
+                        <a:t>S11</a:t>
+                      </a:r>
+                      <a:endParaRPr b="1" sz="1500">
+                        <a:latin typeface="Carlito"/>
+                        <a:ea typeface="Carlito"/>
+                        <a:cs typeface="Carlito"/>
+                        <a:sym typeface="Carlito"/>
+                      </a:endParaRPr>
+                    </a:p>
+                  </a:txBody>
+                  <a:tcPr marT="0" marB="0" marR="44450" marL="44450" anchor="ctr">
+                    <a:lnL cap="flat" cmpd="sng" w="6350">
+                      <a:solidFill>
+                        <a:srgbClr val="000000"/>
+                      </a:solidFill>
+                      <a:prstDash val="solid"/>
+                      <a:round/>
+                      <a:headEnd len="sm" w="sm" type="none"/>
+                      <a:tailEnd len="sm" w="sm" type="none"/>
+                    </a:lnL>
+                    <a:lnR cap="flat" cmpd="sng">
+                      <a:solidFill>
+                        <a:srgbClr val="000000"/>
+                      </a:solidFill>
+                      <a:prstDash val="solid"/>
+                      <a:round/>
+                      <a:headEnd len="sm" w="sm" type="none"/>
+                      <a:tailEnd len="sm" w="sm" type="none"/>
+                    </a:lnR>
+                    <a:lnT cap="flat" cmpd="sng">
+                      <a:solidFill>
+                        <a:srgbClr val="000000"/>
+                      </a:solidFill>
+                      <a:prstDash val="solid"/>
+                      <a:round/>
+                      <a:headEnd len="sm" w="sm" type="none"/>
+                      <a:tailEnd len="sm" w="sm" type="none"/>
+                    </a:lnT>
+                    <a:lnB cap="flat" cmpd="sng">
+                      <a:solidFill>
+                        <a:srgbClr val="000000"/>
+                      </a:solidFill>
+                      <a:prstDash val="solid"/>
+                      <a:round/>
+                      <a:headEnd len="sm" w="sm" type="none"/>
+                      <a:tailEnd len="sm" w="sm" type="none"/>
+                    </a:lnB>
+                  </a:tcPr>
+                </a:tc>
+                <a:tc>
+                  <a:txBody>
+                    <a:bodyPr/>
+                    <a:lstStyle/>
+                    <a:p>
+                      <a:pPr indent="0" lvl="0" marL="0" rtl="0" algn="l">
+                        <a:spcBef>
+                          <a:spcPts val="0"/>
+                        </a:spcBef>
+                        <a:spcAft>
+                          <a:spcPts val="0"/>
+                        </a:spcAft>
+                        <a:buNone/>
+                      </a:pPr>
+                      <a:r>
+                        <a:rPr lang="es-CL" sz="1500">
+                          <a:latin typeface="Carlito"/>
+                          <a:ea typeface="Carlito"/>
+                          <a:cs typeface="Carlito"/>
+                          <a:sym typeface="Carlito"/>
+                        </a:rPr>
+                        <a:t>Integración final, corrección de errores y estabilización</a:t>
+                      </a:r>
+                      <a:endParaRPr sz="1500">
+                        <a:latin typeface="Carlito"/>
+                        <a:ea typeface="Carlito"/>
+                        <a:cs typeface="Carlito"/>
+                        <a:sym typeface="Carlito"/>
+                      </a:endParaRPr>
+                    </a:p>
+                  </a:txBody>
+                  <a:tcPr marT="0" marB="0" marR="44450" marL="44450" anchor="ctr">
+                    <a:lnL cap="flat" cmpd="sng">
+                      <a:solidFill>
+                        <a:srgbClr val="000000"/>
+                      </a:solidFill>
+                      <a:prstDash val="solid"/>
+                      <a:round/>
+                      <a:headEnd len="sm" w="sm" type="none"/>
+                      <a:tailEnd len="sm" w="sm" type="none"/>
+                    </a:lnL>
+                    <a:lnR cap="flat" cmpd="sng" w="6350">
+                      <a:solidFill>
+                        <a:srgbClr val="000000"/>
+                      </a:solidFill>
+                      <a:prstDash val="solid"/>
+                      <a:round/>
+                      <a:headEnd len="sm" w="sm" type="none"/>
+                      <a:tailEnd len="sm" w="sm" type="none"/>
+                    </a:lnR>
+                    <a:lnT cap="flat" cmpd="sng">
+                      <a:solidFill>
+                        <a:srgbClr val="000000"/>
+                      </a:solidFill>
+                      <a:prstDash val="solid"/>
+                      <a:round/>
+                      <a:headEnd len="sm" w="sm" type="none"/>
+                      <a:tailEnd len="sm" w="sm" type="none"/>
+                    </a:lnT>
+                    <a:lnB cap="flat" cmpd="sng">
+                      <a:solidFill>
+                        <a:srgbClr val="000000"/>
+                      </a:solidFill>
+                      <a:prstDash val="solid"/>
+                      <a:round/>
+                      <a:headEnd len="sm" w="sm" type="none"/>
+                      <a:tailEnd len="sm" w="sm" type="none"/>
+                    </a:lnB>
+                  </a:tcPr>
+                </a:tc>
+              </a:tr>
+              <a:tr h="277900">
+                <a:tc>
+                  <a:txBody>
+                    <a:bodyPr/>
+                    <a:lstStyle/>
+                    <a:p>
+                      <a:pPr indent="0" lvl="0" marL="0" rtl="0" algn="l">
+                        <a:spcBef>
+                          <a:spcPts val="0"/>
+                        </a:spcBef>
+                        <a:spcAft>
+                          <a:spcPts val="0"/>
+                        </a:spcAft>
+                        <a:buNone/>
+                      </a:pPr>
+                      <a:r>
+                        <a:rPr b="1" lang="es-CL" sz="1500">
+                          <a:latin typeface="Carlito"/>
+                          <a:ea typeface="Carlito"/>
+                          <a:cs typeface="Carlito"/>
+                          <a:sym typeface="Carlito"/>
+                        </a:rPr>
+                        <a:t>S12</a:t>
+                      </a:r>
+                      <a:endParaRPr b="1" sz="1500">
+                        <a:latin typeface="Carlito"/>
+                        <a:ea typeface="Carlito"/>
+                        <a:cs typeface="Carlito"/>
+                        <a:sym typeface="Carlito"/>
+                      </a:endParaRPr>
+                    </a:p>
+                  </a:txBody>
+                  <a:tcPr marT="0" marB="0" marR="44450" marL="44450" anchor="ctr">
+                    <a:lnL cap="flat" cmpd="sng" w="6350">
+                      <a:solidFill>
+                        <a:srgbClr val="000000"/>
+                      </a:solidFill>
+                      <a:prstDash val="solid"/>
+                      <a:round/>
+                      <a:headEnd len="sm" w="sm" type="none"/>
+                      <a:tailEnd len="sm" w="sm" type="none"/>
+                    </a:lnL>
+                    <a:lnR cap="flat" cmpd="sng">
+                      <a:solidFill>
+                        <a:srgbClr val="000000"/>
+                      </a:solidFill>
+                      <a:prstDash val="solid"/>
+                      <a:round/>
+                      <a:headEnd len="sm" w="sm" type="none"/>
+                      <a:tailEnd len="sm" w="sm" type="none"/>
+                    </a:lnR>
+                    <a:lnT cap="flat" cmpd="sng">
+                      <a:solidFill>
+                        <a:srgbClr val="000000"/>
+                      </a:solidFill>
+                      <a:prstDash val="solid"/>
+                      <a:round/>
+                      <a:headEnd len="sm" w="sm" type="none"/>
+                      <a:tailEnd len="sm" w="sm" type="none"/>
+                    </a:lnT>
+                    <a:lnB cap="flat" cmpd="sng" w="6350">
+                      <a:solidFill>
+                        <a:srgbClr val="000000"/>
+                      </a:solidFill>
+                      <a:prstDash val="solid"/>
+                      <a:round/>
+                      <a:headEnd len="sm" w="sm" type="none"/>
+                      <a:tailEnd len="sm" w="sm" type="none"/>
+                    </a:lnB>
+                  </a:tcPr>
+                </a:tc>
+                <a:tc>
+                  <a:txBody>
+                    <a:bodyPr/>
+                    <a:lstStyle/>
+                    <a:p>
+                      <a:pPr indent="0" lvl="0" marL="0" rtl="0" algn="l">
+                        <a:spcBef>
+                          <a:spcPts val="0"/>
+                        </a:spcBef>
+                        <a:spcAft>
+                          <a:spcPts val="0"/>
+                        </a:spcAft>
+                        <a:buNone/>
+                      </a:pPr>
+                      <a:r>
+                        <a:rPr lang="es-CL" sz="1500">
+                          <a:latin typeface="Carlito"/>
+                          <a:ea typeface="Carlito"/>
+                          <a:cs typeface="Carlito"/>
+                          <a:sym typeface="Carlito"/>
+                        </a:rPr>
+                        <a:t>Pruebas finales, despliegue, documentación y demo</a:t>
+                      </a:r>
+                      <a:endParaRPr sz="1500">
+                        <a:latin typeface="Carlito"/>
+                        <a:ea typeface="Carlito"/>
+                        <a:cs typeface="Carlito"/>
+                        <a:sym typeface="Carlito"/>
+                      </a:endParaRPr>
+                    </a:p>
+                  </a:txBody>
+                  <a:tcPr marT="0" marB="0" marR="44450" marL="44450" anchor="ctr">
+                    <a:lnL cap="flat" cmpd="sng">
+                      <a:solidFill>
+                        <a:srgbClr val="000000"/>
+                      </a:solidFill>
+                      <a:prstDash val="solid"/>
+                      <a:round/>
+                      <a:headEnd len="sm" w="sm" type="none"/>
+                      <a:tailEnd len="sm" w="sm" type="none"/>
+                    </a:lnL>
+                    <a:lnR cap="flat" cmpd="sng" w="6350">
+                      <a:solidFill>
+                        <a:srgbClr val="000000"/>
+                      </a:solidFill>
+                      <a:prstDash val="solid"/>
+                      <a:round/>
+                      <a:headEnd len="sm" w="sm" type="none"/>
+                      <a:tailEnd len="sm" w="sm" type="none"/>
+                    </a:lnR>
+                    <a:lnT cap="flat" cmpd="sng">
+                      <a:solidFill>
+                        <a:srgbClr val="000000"/>
+                      </a:solidFill>
+                      <a:prstDash val="solid"/>
+                      <a:round/>
+                      <a:headEnd len="sm" w="sm" type="none"/>
+                      <a:tailEnd len="sm" w="sm" type="none"/>
+                    </a:lnT>
+                    <a:lnB cap="flat" cmpd="sng" w="6350">
+                      <a:solidFill>
+                        <a:srgbClr val="000000"/>
+                      </a:solidFill>
+                      <a:prstDash val="solid"/>
+                      <a:round/>
+                      <a:headEnd len="sm" w="sm" type="none"/>
+                      <a:tailEnd len="sm" w="sm" type="none"/>
+                    </a:lnB>
+                  </a:tcPr>
+                </a:tc>
+              </a:tr>
+            </a:tbl>
+          </a:graphicData>
+        </a:graphic>
+      </p:graphicFrame>
     </p:spTree>
   </p:cSld>
   <p:clrMapOvr>
     <a:masterClrMapping/>
   </p:clrMapOvr>
-  <p:transition spd="slow">
-    <p:wipe dir="l"/>
-  </p:transition>
 </p:sld>
 </file>
 
@@ -19477,13 +21390,12 @@
           <p:cNvPicPr preferRelativeResize="0"/>
           <p:nvPr/>
         </p:nvPicPr>
-        <p:blipFill>
+        <p:blipFill rotWithShape="1">
           <a:blip r:embed="rId3">
             <a:alphaModFix/>
           </a:blip>
-          <a:stretch>
-            <a:fillRect/>
-          </a:stretch>
+          <a:srcRect b="0" l="0" r="0" t="0"/>
+          <a:stretch/>
         </p:blipFill>
         <p:spPr>
           <a:xfrm>
@@ -19551,7 +21463,10 @@
           </a:bodyPr>
           <a:lstStyle/>
           <a:p>
-            <a:pPr indent="0" lvl="0" marL="0" rtl="0" algn="l">
+            <a:pPr indent="0" lvl="0" marL="0" marR="0" rtl="0" algn="l">
+              <a:lnSpc>
+                <a:spcPct val="100000"/>
+              </a:lnSpc>
               <a:spcBef>
                 <a:spcPts val="0"/>
               </a:spcBef>
@@ -19566,7 +21481,7 @@
               <a:buNone/>
             </a:pPr>
             <a:r>
-              <a:rPr lang="es-CL" sz="1800">
+              <a:rPr b="0" i="0" lang="es-CL" sz="1800" u="none" cap="none" strike="noStrike">
                 <a:solidFill>
                   <a:srgbClr val="757070"/>
                 </a:solidFill>
@@ -19598,7 +21513,7 @@
         <p:spPr>
           <a:xfrm>
             <a:off x="0" y="1432655"/>
-            <a:ext cx="12191999" cy="1015663"/>
+            <a:ext cx="12192000" cy="861900"/>
           </a:xfrm>
           <a:prstGeom prst="rect">
             <a:avLst/>
@@ -19632,7 +21547,7 @@
               <a:buNone/>
             </a:pPr>
             <a:r>
-              <a:rPr b="0" i="0" lang="es-CL" sz="3600" u="none" cap="none" strike="noStrike">
+              <a:rPr lang="es-CL" sz="3600">
                 <a:solidFill>
                   <a:schemeClr val="dk1"/>
                 </a:solidFill>
@@ -19641,7 +21556,7 @@
                 <a:cs typeface="Calibri"/>
                 <a:sym typeface="Calibri"/>
               </a:rPr>
-              <a:t>Arquitectura del software</a:t>
+              <a:t>Hitos académicos principales</a:t>
             </a:r>
             <a:endParaRPr b="0" i="0" sz="1400" u="none" cap="none" strike="noStrike">
               <a:solidFill>
@@ -19672,16 +21587,7 @@
               <a:buNone/>
             </a:pPr>
             <a:r>
-              <a:rPr b="0" i="0" lang="es-CL" sz="2400" u="none" cap="none" strike="noStrike">
-                <a:solidFill>
-                  <a:srgbClr val="757070"/>
-                </a:solidFill>
-                <a:latin typeface="Calibri"/>
-                <a:ea typeface="Calibri"/>
-                <a:cs typeface="Calibri"/>
-                <a:sym typeface="Calibri"/>
-              </a:rPr>
-              <a:t>*Presentar esquema</a:t>
+              <a:t/>
             </a:r>
             <a:endParaRPr b="0" i="0" sz="1400" u="none" cap="none" strike="noStrike">
               <a:solidFill>
@@ -19715,7 +21621,7 @@
               <a:srgbClr val="F5F7FC"/>
             </a:solidFill>
             <a:prstDash val="solid"/>
-            <a:miter lim="80"/>
+            <a:miter lim="0"/>
             <a:headEnd len="sm" w="sm" type="none"/>
             <a:tailEnd len="sm" w="sm" type="none"/>
           </a:ln>
@@ -19724,20 +21630,28 @@
       <p:sp>
         <p:nvSpPr>
           <p:cNvPr id="166" name="Google Shape;166;p8"/>
-          <p:cNvSpPr txBox="1"/>
+          <p:cNvSpPr/>
           <p:nvPr/>
         </p:nvSpPr>
         <p:spPr>
           <a:xfrm>
-            <a:off x="2362200" y="2907325"/>
-            <a:ext cx="6022800" cy="3033300"/>
+            <a:off x="1184950" y="2663500"/>
+            <a:ext cx="9182100" cy="2830800"/>
           </a:xfrm>
           <a:prstGeom prst="rect">
             <a:avLst/>
           </a:prstGeom>
-          <a:noFill/>
-          <a:ln>
-            <a:noFill/>
+          <a:solidFill>
+            <a:schemeClr val="lt2"/>
+          </a:solidFill>
+          <a:ln cap="flat" cmpd="sng" w="9525">
+            <a:solidFill>
+              <a:schemeClr val="dk2"/>
+            </a:solidFill>
+            <a:prstDash val="solid"/>
+            <a:round/>
+            <a:headEnd len="sm" w="sm" type="none"/>
+            <a:tailEnd len="sm" w="sm" type="none"/>
           </a:ln>
         </p:spPr>
         <p:txBody>
@@ -19746,34 +21660,1086 @@
           </a:bodyPr>
           <a:lstStyle/>
           <a:p>
-            <a:pPr indent="0" lvl="0" marL="0" rtl="0" algn="l">
-              <a:lnSpc>
-                <a:spcPct val="115000"/>
-              </a:lnSpc>
-              <a:spcBef>
-                <a:spcPts val="1400"/>
-              </a:spcBef>
-              <a:spcAft>
-                <a:spcPts val="400"/>
+            <a:pPr indent="0" lvl="0" marL="0" rtl="0" algn="ctr">
+              <a:spcBef>
+                <a:spcPts val="0"/>
+              </a:spcBef>
+              <a:spcAft>
+                <a:spcPts val="0"/>
               </a:spcAft>
               <a:buNone/>
             </a:pPr>
             <a:r>
-              <a:rPr b="1" lang="es-CL" sz="1800"/>
-              <a:t>Tendras algo dentro de la </a:t>
+              <a:t/>
             </a:r>
-            <a:r>
-              <a:rPr b="1" lang="es-CL" sz="1800"/>
-              <a:t>documentación</a:t>
-            </a:r>
-            <a:r>
-              <a:rPr b="1" lang="es-CL" sz="1800"/>
-              <a:t> del proyecto ?</a:t>
-            </a:r>
-            <a:endParaRPr b="1" sz="1800"/>
+            <a:endParaRPr>
+              <a:latin typeface="Calibri"/>
+              <a:ea typeface="Calibri"/>
+              <a:cs typeface="Calibri"/>
+              <a:sym typeface="Calibri"/>
+            </a:endParaRPr>
           </a:p>
         </p:txBody>
       </p:sp>
+      <p:graphicFrame>
+        <p:nvGraphicFramePr>
+          <p:cNvPr id="167" name="Google Shape;167;p8"/>
+          <p:cNvGraphicFramePr/>
+          <p:nvPr/>
+        </p:nvGraphicFramePr>
+        <p:xfrm>
+          <a:off x="1180050" y="2658625"/>
+          <a:ext cx="3000000" cy="3000000"/>
+        </p:xfrm>
+        <a:graphic>
+          <a:graphicData uri="http://schemas.openxmlformats.org/drawingml/2006/table">
+            <a:tbl>
+              <a:tblPr>
+                <a:noFill/>
+                <a:tableStyleId>{A83B4CC6-04C9-4473-84F8-9845BC820912}</a:tableStyleId>
+              </a:tblPr>
+              <a:tblGrid>
+                <a:gridCol w="742950"/>
+                <a:gridCol w="2276475"/>
+                <a:gridCol w="6162675"/>
+              </a:tblGrid>
+              <a:tr h="228600">
+                <a:tc gridSpan="3">
+                  <a:txBody>
+                    <a:bodyPr/>
+                    <a:lstStyle/>
+                    <a:p>
+                      <a:pPr indent="0" lvl="0" marL="0" rtl="0" algn="l">
+                        <a:lnSpc>
+                          <a:spcPct val="115000"/>
+                        </a:lnSpc>
+                        <a:spcBef>
+                          <a:spcPts val="0"/>
+                        </a:spcBef>
+                        <a:spcAft>
+                          <a:spcPts val="0"/>
+                        </a:spcAft>
+                        <a:buNone/>
+                      </a:pPr>
+                      <a:r>
+                        <a:rPr b="1" lang="es-CL">
+                          <a:solidFill>
+                            <a:srgbClr val="1F1F1F"/>
+                          </a:solidFill>
+                        </a:rPr>
+                        <a:t>Hitos académicos principales</a:t>
+                      </a:r>
+                      <a:endParaRPr b="1">
+                        <a:solidFill>
+                          <a:srgbClr val="1F1F1F"/>
+                        </a:solidFill>
+                      </a:endParaRPr>
+                    </a:p>
+                  </a:txBody>
+                  <a:tcPr marT="91425" marB="91425" marR="28575" marL="28575" anchor="ctr">
+                    <a:lnL cap="flat" cmpd="sng" w="9525">
+                      <a:solidFill>
+                        <a:srgbClr val="000000"/>
+                      </a:solidFill>
+                      <a:prstDash val="solid"/>
+                      <a:round/>
+                      <a:headEnd len="sm" w="sm" type="none"/>
+                      <a:tailEnd len="sm" w="sm" type="none"/>
+                    </a:lnL>
+                    <a:lnR cap="flat" cmpd="sng" w="9525">
+                      <a:solidFill>
+                        <a:srgbClr val="CCCCCC"/>
+                      </a:solidFill>
+                      <a:prstDash val="solid"/>
+                      <a:round/>
+                      <a:headEnd len="sm" w="sm" type="none"/>
+                      <a:tailEnd len="sm" w="sm" type="none"/>
+                    </a:lnR>
+                    <a:lnT cap="flat" cmpd="sng" w="9525">
+                      <a:solidFill>
+                        <a:srgbClr val="000000"/>
+                      </a:solidFill>
+                      <a:prstDash val="solid"/>
+                      <a:round/>
+                      <a:headEnd len="sm" w="sm" type="none"/>
+                      <a:tailEnd len="sm" w="sm" type="none"/>
+                    </a:lnT>
+                    <a:lnB cap="flat" cmpd="sng" w="9525">
+                      <a:solidFill>
+                        <a:srgbClr val="000000"/>
+                      </a:solidFill>
+                      <a:prstDash val="solid"/>
+                      <a:round/>
+                      <a:headEnd len="sm" w="sm" type="none"/>
+                      <a:tailEnd len="sm" w="sm" type="none"/>
+                    </a:lnB>
+                    <a:solidFill>
+                      <a:srgbClr val="D9EAF7"/>
+                    </a:solidFill>
+                  </a:tcPr>
+                </a:tc>
+                <a:tc hMerge="1"/>
+                <a:tc hMerge="1"/>
+              </a:tr>
+              <a:tr h="228600">
+                <a:tc>
+                  <a:txBody>
+                    <a:bodyPr/>
+                    <a:lstStyle/>
+                    <a:p>
+                      <a:pPr indent="0" lvl="0" marL="0" rtl="0" algn="l">
+                        <a:lnSpc>
+                          <a:spcPct val="115000"/>
+                        </a:lnSpc>
+                        <a:spcBef>
+                          <a:spcPts val="0"/>
+                        </a:spcBef>
+                        <a:spcAft>
+                          <a:spcPts val="0"/>
+                        </a:spcAft>
+                        <a:buNone/>
+                      </a:pPr>
+                      <a:r>
+                        <a:rPr lang="es-CL"/>
+                        <a:t>08/09</a:t>
+                      </a:r>
+                      <a:endParaRPr/>
+                    </a:p>
+                  </a:txBody>
+                  <a:tcPr marT="91425" marB="91425" marR="28575" marL="28575" anchor="b">
+                    <a:lnL cap="flat" cmpd="sng" w="9525">
+                      <a:solidFill>
+                        <a:srgbClr val="CCCCCC"/>
+                      </a:solidFill>
+                      <a:prstDash val="solid"/>
+                      <a:round/>
+                      <a:headEnd len="sm" w="sm" type="none"/>
+                      <a:tailEnd len="sm" w="sm" type="none"/>
+                    </a:lnL>
+                    <a:lnR cap="flat" cmpd="sng" w="9525">
+                      <a:solidFill>
+                        <a:srgbClr val="CCCCCC"/>
+                      </a:solidFill>
+                      <a:prstDash val="solid"/>
+                      <a:round/>
+                      <a:headEnd len="sm" w="sm" type="none"/>
+                      <a:tailEnd len="sm" w="sm" type="none"/>
+                    </a:lnR>
+                    <a:lnT cap="flat" cmpd="sng" w="9525">
+                      <a:solidFill>
+                        <a:srgbClr val="000000"/>
+                      </a:solidFill>
+                      <a:prstDash val="solid"/>
+                      <a:round/>
+                      <a:headEnd len="sm" w="sm" type="none"/>
+                      <a:tailEnd len="sm" w="sm" type="none"/>
+                    </a:lnT>
+                    <a:lnB cap="flat" cmpd="sng" w="9525">
+                      <a:solidFill>
+                        <a:srgbClr val="CCCCCC"/>
+                      </a:solidFill>
+                      <a:prstDash val="solid"/>
+                      <a:round/>
+                      <a:headEnd len="sm" w="sm" type="none"/>
+                      <a:tailEnd len="sm" w="sm" type="none"/>
+                    </a:lnB>
+                  </a:tcPr>
+                </a:tc>
+                <a:tc>
+                  <a:txBody>
+                    <a:bodyPr/>
+                    <a:lstStyle/>
+                    <a:p>
+                      <a:pPr indent="0" lvl="0" marL="0" rtl="0" algn="l">
+                        <a:lnSpc>
+                          <a:spcPct val="115000"/>
+                        </a:lnSpc>
+                        <a:spcBef>
+                          <a:spcPts val="0"/>
+                        </a:spcBef>
+                        <a:spcAft>
+                          <a:spcPts val="0"/>
+                        </a:spcAft>
+                        <a:buNone/>
+                      </a:pPr>
+                      <a:r>
+                        <a:rPr lang="es-CL"/>
+                        <a:t>Formativa individual</a:t>
+                      </a:r>
+                      <a:endParaRPr/>
+                    </a:p>
+                  </a:txBody>
+                  <a:tcPr marT="91425" marB="91425" marR="28575" marL="28575" anchor="b">
+                    <a:lnL cap="flat" cmpd="sng" w="9525">
+                      <a:solidFill>
+                        <a:srgbClr val="CCCCCC"/>
+                      </a:solidFill>
+                      <a:prstDash val="solid"/>
+                      <a:round/>
+                      <a:headEnd len="sm" w="sm" type="none"/>
+                      <a:tailEnd len="sm" w="sm" type="none"/>
+                    </a:lnL>
+                    <a:lnR cap="flat" cmpd="sng" w="9525">
+                      <a:solidFill>
+                        <a:srgbClr val="CCCCCC"/>
+                      </a:solidFill>
+                      <a:prstDash val="solid"/>
+                      <a:round/>
+                      <a:headEnd len="sm" w="sm" type="none"/>
+                      <a:tailEnd len="sm" w="sm" type="none"/>
+                    </a:lnR>
+                    <a:lnT cap="flat" cmpd="sng" w="9525">
+                      <a:solidFill>
+                        <a:srgbClr val="000000"/>
+                      </a:solidFill>
+                      <a:prstDash val="solid"/>
+                      <a:round/>
+                      <a:headEnd len="sm" w="sm" type="none"/>
+                      <a:tailEnd len="sm" w="sm" type="none"/>
+                    </a:lnT>
+                    <a:lnB cap="flat" cmpd="sng" w="9525">
+                      <a:solidFill>
+                        <a:srgbClr val="CCCCCC"/>
+                      </a:solidFill>
+                      <a:prstDash val="solid"/>
+                      <a:round/>
+                      <a:headEnd len="sm" w="sm" type="none"/>
+                      <a:tailEnd len="sm" w="sm" type="none"/>
+                    </a:lnB>
+                  </a:tcPr>
+                </a:tc>
+                <a:tc>
+                  <a:txBody>
+                    <a:bodyPr/>
+                    <a:lstStyle/>
+                    <a:p>
+                      <a:pPr indent="0" lvl="0" marL="0" rtl="0" algn="l">
+                        <a:lnSpc>
+                          <a:spcPct val="115000"/>
+                        </a:lnSpc>
+                        <a:spcBef>
+                          <a:spcPts val="0"/>
+                        </a:spcBef>
+                        <a:spcAft>
+                          <a:spcPts val="0"/>
+                        </a:spcAft>
+                        <a:buNone/>
+                      </a:pPr>
+                      <a:r>
+                        <a:rPr lang="es-CL"/>
+                        <a:t>Plan + Gantt + metodología + roles</a:t>
+                      </a:r>
+                      <a:endParaRPr/>
+                    </a:p>
+                  </a:txBody>
+                  <a:tcPr marT="91425" marB="91425" marR="28575" marL="28575" anchor="b">
+                    <a:lnL cap="flat" cmpd="sng" w="9525">
+                      <a:solidFill>
+                        <a:srgbClr val="CCCCCC"/>
+                      </a:solidFill>
+                      <a:prstDash val="solid"/>
+                      <a:round/>
+                      <a:headEnd len="sm" w="sm" type="none"/>
+                      <a:tailEnd len="sm" w="sm" type="none"/>
+                    </a:lnL>
+                    <a:lnR cap="flat" cmpd="sng" w="9525">
+                      <a:solidFill>
+                        <a:srgbClr val="CCCCCC"/>
+                      </a:solidFill>
+                      <a:prstDash val="solid"/>
+                      <a:round/>
+                      <a:headEnd len="sm" w="sm" type="none"/>
+                      <a:tailEnd len="sm" w="sm" type="none"/>
+                    </a:lnR>
+                    <a:lnT cap="flat" cmpd="sng" w="9525">
+                      <a:solidFill>
+                        <a:srgbClr val="000000"/>
+                      </a:solidFill>
+                      <a:prstDash val="solid"/>
+                      <a:round/>
+                      <a:headEnd len="sm" w="sm" type="none"/>
+                      <a:tailEnd len="sm" w="sm" type="none"/>
+                    </a:lnT>
+                    <a:lnB cap="flat" cmpd="sng" w="9525">
+                      <a:solidFill>
+                        <a:srgbClr val="CCCCCC"/>
+                      </a:solidFill>
+                      <a:prstDash val="solid"/>
+                      <a:round/>
+                      <a:headEnd len="sm" w="sm" type="none"/>
+                      <a:tailEnd len="sm" w="sm" type="none"/>
+                    </a:lnB>
+                  </a:tcPr>
+                </a:tc>
+              </a:tr>
+              <a:tr h="228600">
+                <a:tc>
+                  <a:txBody>
+                    <a:bodyPr/>
+                    <a:lstStyle/>
+                    <a:p>
+                      <a:pPr indent="0" lvl="0" marL="0" rtl="0" algn="l">
+                        <a:lnSpc>
+                          <a:spcPct val="115000"/>
+                        </a:lnSpc>
+                        <a:spcBef>
+                          <a:spcPts val="0"/>
+                        </a:spcBef>
+                        <a:spcAft>
+                          <a:spcPts val="0"/>
+                        </a:spcAft>
+                        <a:buNone/>
+                      </a:pPr>
+                      <a:r>
+                        <a:rPr lang="es-CL"/>
+                        <a:t>22/09</a:t>
+                      </a:r>
+                      <a:endParaRPr/>
+                    </a:p>
+                  </a:txBody>
+                  <a:tcPr marT="91425" marB="91425" marR="28575" marL="28575" anchor="b">
+                    <a:lnL cap="flat" cmpd="sng" w="9525">
+                      <a:solidFill>
+                        <a:srgbClr val="CCCCCC"/>
+                      </a:solidFill>
+                      <a:prstDash val="solid"/>
+                      <a:round/>
+                      <a:headEnd len="sm" w="sm" type="none"/>
+                      <a:tailEnd len="sm" w="sm" type="none"/>
+                    </a:lnL>
+                    <a:lnR cap="flat" cmpd="sng" w="9525">
+                      <a:solidFill>
+                        <a:srgbClr val="CCCCCC"/>
+                      </a:solidFill>
+                      <a:prstDash val="solid"/>
+                      <a:round/>
+                      <a:headEnd len="sm" w="sm" type="none"/>
+                      <a:tailEnd len="sm" w="sm" type="none"/>
+                    </a:lnR>
+                    <a:lnT cap="flat" cmpd="sng" w="9525">
+                      <a:solidFill>
+                        <a:srgbClr val="CCCCCC"/>
+                      </a:solidFill>
+                      <a:prstDash val="solid"/>
+                      <a:round/>
+                      <a:headEnd len="sm" w="sm" type="none"/>
+                      <a:tailEnd len="sm" w="sm" type="none"/>
+                    </a:lnT>
+                    <a:lnB cap="flat" cmpd="sng" w="9525">
+                      <a:solidFill>
+                        <a:srgbClr val="CCCCCC"/>
+                      </a:solidFill>
+                      <a:prstDash val="solid"/>
+                      <a:round/>
+                      <a:headEnd len="sm" w="sm" type="none"/>
+                      <a:tailEnd len="sm" w="sm" type="none"/>
+                    </a:lnB>
+                  </a:tcPr>
+                </a:tc>
+                <a:tc>
+                  <a:txBody>
+                    <a:bodyPr/>
+                    <a:lstStyle/>
+                    <a:p>
+                      <a:pPr indent="0" lvl="0" marL="0" rtl="0" algn="l">
+                        <a:lnSpc>
+                          <a:spcPct val="115000"/>
+                        </a:lnSpc>
+                        <a:spcBef>
+                          <a:spcPts val="0"/>
+                        </a:spcBef>
+                        <a:spcAft>
+                          <a:spcPts val="0"/>
+                        </a:spcAft>
+                        <a:buNone/>
+                      </a:pPr>
+                      <a:r>
+                        <a:rPr lang="es-CL"/>
+                        <a:t>Hito 1</a:t>
+                      </a:r>
+                      <a:endParaRPr/>
+                    </a:p>
+                  </a:txBody>
+                  <a:tcPr marT="91425" marB="91425" marR="28575" marL="28575" anchor="b">
+                    <a:lnL cap="flat" cmpd="sng" w="9525">
+                      <a:solidFill>
+                        <a:srgbClr val="CCCCCC"/>
+                      </a:solidFill>
+                      <a:prstDash val="solid"/>
+                      <a:round/>
+                      <a:headEnd len="sm" w="sm" type="none"/>
+                      <a:tailEnd len="sm" w="sm" type="none"/>
+                    </a:lnL>
+                    <a:lnR cap="flat" cmpd="sng" w="9525">
+                      <a:solidFill>
+                        <a:srgbClr val="CCCCCC"/>
+                      </a:solidFill>
+                      <a:prstDash val="solid"/>
+                      <a:round/>
+                      <a:headEnd len="sm" w="sm" type="none"/>
+                      <a:tailEnd len="sm" w="sm" type="none"/>
+                    </a:lnR>
+                    <a:lnT cap="flat" cmpd="sng" w="9525">
+                      <a:solidFill>
+                        <a:srgbClr val="CCCCCC"/>
+                      </a:solidFill>
+                      <a:prstDash val="solid"/>
+                      <a:round/>
+                      <a:headEnd len="sm" w="sm" type="none"/>
+                      <a:tailEnd len="sm" w="sm" type="none"/>
+                    </a:lnT>
+                    <a:lnB cap="flat" cmpd="sng" w="9525">
+                      <a:solidFill>
+                        <a:srgbClr val="CCCCCC"/>
+                      </a:solidFill>
+                      <a:prstDash val="solid"/>
+                      <a:round/>
+                      <a:headEnd len="sm" w="sm" type="none"/>
+                      <a:tailEnd len="sm" w="sm" type="none"/>
+                    </a:lnB>
+                  </a:tcPr>
+                </a:tc>
+                <a:tc>
+                  <a:txBody>
+                    <a:bodyPr/>
+                    <a:lstStyle/>
+                    <a:p>
+                      <a:pPr indent="0" lvl="0" marL="0" rtl="0" algn="l">
+                        <a:lnSpc>
+                          <a:spcPct val="115000"/>
+                        </a:lnSpc>
+                        <a:spcBef>
+                          <a:spcPts val="0"/>
+                        </a:spcBef>
+                        <a:spcAft>
+                          <a:spcPts val="0"/>
+                        </a:spcAft>
+                        <a:buNone/>
+                      </a:pPr>
+                      <a:r>
+                        <a:rPr lang="es-CL"/>
+                        <a:t>Primer incremento funcional</a:t>
+                      </a:r>
+                      <a:endParaRPr/>
+                    </a:p>
+                  </a:txBody>
+                  <a:tcPr marT="91425" marB="91425" marR="28575" marL="28575" anchor="b">
+                    <a:lnL cap="flat" cmpd="sng" w="9525">
+                      <a:solidFill>
+                        <a:srgbClr val="CCCCCC"/>
+                      </a:solidFill>
+                      <a:prstDash val="solid"/>
+                      <a:round/>
+                      <a:headEnd len="sm" w="sm" type="none"/>
+                      <a:tailEnd len="sm" w="sm" type="none"/>
+                    </a:lnL>
+                    <a:lnR cap="flat" cmpd="sng" w="9525">
+                      <a:solidFill>
+                        <a:srgbClr val="CCCCCC"/>
+                      </a:solidFill>
+                      <a:prstDash val="solid"/>
+                      <a:round/>
+                      <a:headEnd len="sm" w="sm" type="none"/>
+                      <a:tailEnd len="sm" w="sm" type="none"/>
+                    </a:lnR>
+                    <a:lnT cap="flat" cmpd="sng" w="9525">
+                      <a:solidFill>
+                        <a:srgbClr val="CCCCCC"/>
+                      </a:solidFill>
+                      <a:prstDash val="solid"/>
+                      <a:round/>
+                      <a:headEnd len="sm" w="sm" type="none"/>
+                      <a:tailEnd len="sm" w="sm" type="none"/>
+                    </a:lnT>
+                    <a:lnB cap="flat" cmpd="sng" w="9525">
+                      <a:solidFill>
+                        <a:srgbClr val="CCCCCC"/>
+                      </a:solidFill>
+                      <a:prstDash val="solid"/>
+                      <a:round/>
+                      <a:headEnd len="sm" w="sm" type="none"/>
+                      <a:tailEnd len="sm" w="sm" type="none"/>
+                    </a:lnB>
+                  </a:tcPr>
+                </a:tc>
+              </a:tr>
+              <a:tr h="228600">
+                <a:tc>
+                  <a:txBody>
+                    <a:bodyPr/>
+                    <a:lstStyle/>
+                    <a:p>
+                      <a:pPr indent="0" lvl="0" marL="0" rtl="0" algn="l">
+                        <a:lnSpc>
+                          <a:spcPct val="115000"/>
+                        </a:lnSpc>
+                        <a:spcBef>
+                          <a:spcPts val="0"/>
+                        </a:spcBef>
+                        <a:spcAft>
+                          <a:spcPts val="0"/>
+                        </a:spcAft>
+                        <a:buNone/>
+                      </a:pPr>
+                      <a:r>
+                        <a:rPr lang="es-CL"/>
+                        <a:t>27/10</a:t>
+                      </a:r>
+                      <a:endParaRPr/>
+                    </a:p>
+                  </a:txBody>
+                  <a:tcPr marT="91425" marB="91425" marR="28575" marL="28575" anchor="b">
+                    <a:lnL cap="flat" cmpd="sng" w="9525">
+                      <a:solidFill>
+                        <a:srgbClr val="CCCCCC"/>
+                      </a:solidFill>
+                      <a:prstDash val="solid"/>
+                      <a:round/>
+                      <a:headEnd len="sm" w="sm" type="none"/>
+                      <a:tailEnd len="sm" w="sm" type="none"/>
+                    </a:lnL>
+                    <a:lnR cap="flat" cmpd="sng" w="9525">
+                      <a:solidFill>
+                        <a:srgbClr val="CCCCCC"/>
+                      </a:solidFill>
+                      <a:prstDash val="solid"/>
+                      <a:round/>
+                      <a:headEnd len="sm" w="sm" type="none"/>
+                      <a:tailEnd len="sm" w="sm" type="none"/>
+                    </a:lnR>
+                    <a:lnT cap="flat" cmpd="sng" w="9525">
+                      <a:solidFill>
+                        <a:srgbClr val="CCCCCC"/>
+                      </a:solidFill>
+                      <a:prstDash val="solid"/>
+                      <a:round/>
+                      <a:headEnd len="sm" w="sm" type="none"/>
+                      <a:tailEnd len="sm" w="sm" type="none"/>
+                    </a:lnT>
+                    <a:lnB cap="flat" cmpd="sng" w="9525">
+                      <a:solidFill>
+                        <a:srgbClr val="CCCCCC"/>
+                      </a:solidFill>
+                      <a:prstDash val="solid"/>
+                      <a:round/>
+                      <a:headEnd len="sm" w="sm" type="none"/>
+                      <a:tailEnd len="sm" w="sm" type="none"/>
+                    </a:lnB>
+                  </a:tcPr>
+                </a:tc>
+                <a:tc>
+                  <a:txBody>
+                    <a:bodyPr/>
+                    <a:lstStyle/>
+                    <a:p>
+                      <a:pPr indent="0" lvl="0" marL="0" rtl="0" algn="l">
+                        <a:lnSpc>
+                          <a:spcPct val="115000"/>
+                        </a:lnSpc>
+                        <a:spcBef>
+                          <a:spcPts val="0"/>
+                        </a:spcBef>
+                        <a:spcAft>
+                          <a:spcPts val="0"/>
+                        </a:spcAft>
+                        <a:buNone/>
+                      </a:pPr>
+                      <a:r>
+                        <a:rPr lang="es-CL"/>
+                        <a:t>Sumativa grupal</a:t>
+                      </a:r>
+                      <a:endParaRPr/>
+                    </a:p>
+                  </a:txBody>
+                  <a:tcPr marT="91425" marB="91425" marR="28575" marL="28575" anchor="b">
+                    <a:lnL cap="flat" cmpd="sng" w="9525">
+                      <a:solidFill>
+                        <a:srgbClr val="CCCCCC"/>
+                      </a:solidFill>
+                      <a:prstDash val="solid"/>
+                      <a:round/>
+                      <a:headEnd len="sm" w="sm" type="none"/>
+                      <a:tailEnd len="sm" w="sm" type="none"/>
+                    </a:lnL>
+                    <a:lnR cap="flat" cmpd="sng" w="9525">
+                      <a:solidFill>
+                        <a:srgbClr val="CCCCCC"/>
+                      </a:solidFill>
+                      <a:prstDash val="solid"/>
+                      <a:round/>
+                      <a:headEnd len="sm" w="sm" type="none"/>
+                      <a:tailEnd len="sm" w="sm" type="none"/>
+                    </a:lnR>
+                    <a:lnT cap="flat" cmpd="sng" w="9525">
+                      <a:solidFill>
+                        <a:srgbClr val="CCCCCC"/>
+                      </a:solidFill>
+                      <a:prstDash val="solid"/>
+                      <a:round/>
+                      <a:headEnd len="sm" w="sm" type="none"/>
+                      <a:tailEnd len="sm" w="sm" type="none"/>
+                    </a:lnT>
+                    <a:lnB cap="flat" cmpd="sng" w="9525">
+                      <a:solidFill>
+                        <a:srgbClr val="CCCCCC"/>
+                      </a:solidFill>
+                      <a:prstDash val="solid"/>
+                      <a:round/>
+                      <a:headEnd len="sm" w="sm" type="none"/>
+                      <a:tailEnd len="sm" w="sm" type="none"/>
+                    </a:lnB>
+                  </a:tcPr>
+                </a:tc>
+                <a:tc>
+                  <a:txBody>
+                    <a:bodyPr/>
+                    <a:lstStyle/>
+                    <a:p>
+                      <a:pPr indent="0" lvl="0" marL="0" rtl="0" algn="l">
+                        <a:lnSpc>
+                          <a:spcPct val="115000"/>
+                        </a:lnSpc>
+                        <a:spcBef>
+                          <a:spcPts val="0"/>
+                        </a:spcBef>
+                        <a:spcAft>
+                          <a:spcPts val="0"/>
+                        </a:spcAft>
+                        <a:buNone/>
+                      </a:pPr>
+                      <a:r>
+                        <a:rPr lang="es-CL"/>
+                        <a:t>MVP web integrado</a:t>
+                      </a:r>
+                      <a:endParaRPr/>
+                    </a:p>
+                  </a:txBody>
+                  <a:tcPr marT="91425" marB="91425" marR="28575" marL="28575" anchor="b">
+                    <a:lnL cap="flat" cmpd="sng" w="9525">
+                      <a:solidFill>
+                        <a:srgbClr val="CCCCCC"/>
+                      </a:solidFill>
+                      <a:prstDash val="solid"/>
+                      <a:round/>
+                      <a:headEnd len="sm" w="sm" type="none"/>
+                      <a:tailEnd len="sm" w="sm" type="none"/>
+                    </a:lnL>
+                    <a:lnR cap="flat" cmpd="sng" w="9525">
+                      <a:solidFill>
+                        <a:srgbClr val="CCCCCC"/>
+                      </a:solidFill>
+                      <a:prstDash val="solid"/>
+                      <a:round/>
+                      <a:headEnd len="sm" w="sm" type="none"/>
+                      <a:tailEnd len="sm" w="sm" type="none"/>
+                    </a:lnR>
+                    <a:lnT cap="flat" cmpd="sng" w="9525">
+                      <a:solidFill>
+                        <a:srgbClr val="CCCCCC"/>
+                      </a:solidFill>
+                      <a:prstDash val="solid"/>
+                      <a:round/>
+                      <a:headEnd len="sm" w="sm" type="none"/>
+                      <a:tailEnd len="sm" w="sm" type="none"/>
+                    </a:lnT>
+                    <a:lnB cap="flat" cmpd="sng" w="9525">
+                      <a:solidFill>
+                        <a:srgbClr val="CCCCCC"/>
+                      </a:solidFill>
+                      <a:prstDash val="solid"/>
+                      <a:round/>
+                      <a:headEnd len="sm" w="sm" type="none"/>
+                      <a:tailEnd len="sm" w="sm" type="none"/>
+                    </a:lnB>
+                  </a:tcPr>
+                </a:tc>
+              </a:tr>
+              <a:tr h="228600">
+                <a:tc>
+                  <a:txBody>
+                    <a:bodyPr/>
+                    <a:lstStyle/>
+                    <a:p>
+                      <a:pPr indent="0" lvl="0" marL="0" rtl="0" algn="l">
+                        <a:lnSpc>
+                          <a:spcPct val="115000"/>
+                        </a:lnSpc>
+                        <a:spcBef>
+                          <a:spcPts val="0"/>
+                        </a:spcBef>
+                        <a:spcAft>
+                          <a:spcPts val="0"/>
+                        </a:spcAft>
+                        <a:buNone/>
+                      </a:pPr>
+                      <a:r>
+                        <a:rPr lang="es-CL"/>
+                        <a:t>17/11</a:t>
+                      </a:r>
+                      <a:endParaRPr/>
+                    </a:p>
+                  </a:txBody>
+                  <a:tcPr marT="91425" marB="91425" marR="28575" marL="28575" anchor="b">
+                    <a:lnL cap="flat" cmpd="sng" w="9525">
+                      <a:solidFill>
+                        <a:srgbClr val="CCCCCC"/>
+                      </a:solidFill>
+                      <a:prstDash val="solid"/>
+                      <a:round/>
+                      <a:headEnd len="sm" w="sm" type="none"/>
+                      <a:tailEnd len="sm" w="sm" type="none"/>
+                    </a:lnL>
+                    <a:lnR cap="flat" cmpd="sng" w="9525">
+                      <a:solidFill>
+                        <a:srgbClr val="CCCCCC"/>
+                      </a:solidFill>
+                      <a:prstDash val="solid"/>
+                      <a:round/>
+                      <a:headEnd len="sm" w="sm" type="none"/>
+                      <a:tailEnd len="sm" w="sm" type="none"/>
+                    </a:lnR>
+                    <a:lnT cap="flat" cmpd="sng" w="9525">
+                      <a:solidFill>
+                        <a:srgbClr val="CCCCCC"/>
+                      </a:solidFill>
+                      <a:prstDash val="solid"/>
+                      <a:round/>
+                      <a:headEnd len="sm" w="sm" type="none"/>
+                      <a:tailEnd len="sm" w="sm" type="none"/>
+                    </a:lnT>
+                    <a:lnB cap="flat" cmpd="sng" w="9525">
+                      <a:solidFill>
+                        <a:srgbClr val="CCCCCC"/>
+                      </a:solidFill>
+                      <a:prstDash val="solid"/>
+                      <a:round/>
+                      <a:headEnd len="sm" w="sm" type="none"/>
+                      <a:tailEnd len="sm" w="sm" type="none"/>
+                    </a:lnB>
+                  </a:tcPr>
+                </a:tc>
+                <a:tc>
+                  <a:txBody>
+                    <a:bodyPr/>
+                    <a:lstStyle/>
+                    <a:p>
+                      <a:pPr indent="0" lvl="0" marL="0" rtl="0" algn="l">
+                        <a:lnSpc>
+                          <a:spcPct val="115000"/>
+                        </a:lnSpc>
+                        <a:spcBef>
+                          <a:spcPts val="0"/>
+                        </a:spcBef>
+                        <a:spcAft>
+                          <a:spcPts val="0"/>
+                        </a:spcAft>
+                        <a:buNone/>
+                      </a:pPr>
+                      <a:r>
+                        <a:rPr lang="es-CL"/>
+                        <a:t>Hito 2</a:t>
+                      </a:r>
+                      <a:endParaRPr/>
+                    </a:p>
+                  </a:txBody>
+                  <a:tcPr marT="91425" marB="91425" marR="28575" marL="28575" anchor="b">
+                    <a:lnL cap="flat" cmpd="sng" w="9525">
+                      <a:solidFill>
+                        <a:srgbClr val="CCCCCC"/>
+                      </a:solidFill>
+                      <a:prstDash val="solid"/>
+                      <a:round/>
+                      <a:headEnd len="sm" w="sm" type="none"/>
+                      <a:tailEnd len="sm" w="sm" type="none"/>
+                    </a:lnL>
+                    <a:lnR cap="flat" cmpd="sng" w="9525">
+                      <a:solidFill>
+                        <a:srgbClr val="CCCCCC"/>
+                      </a:solidFill>
+                      <a:prstDash val="solid"/>
+                      <a:round/>
+                      <a:headEnd len="sm" w="sm" type="none"/>
+                      <a:tailEnd len="sm" w="sm" type="none"/>
+                    </a:lnR>
+                    <a:lnT cap="flat" cmpd="sng" w="9525">
+                      <a:solidFill>
+                        <a:srgbClr val="CCCCCC"/>
+                      </a:solidFill>
+                      <a:prstDash val="solid"/>
+                      <a:round/>
+                      <a:headEnd len="sm" w="sm" type="none"/>
+                      <a:tailEnd len="sm" w="sm" type="none"/>
+                    </a:lnT>
+                    <a:lnB cap="flat" cmpd="sng" w="9525">
+                      <a:solidFill>
+                        <a:srgbClr val="CCCCCC"/>
+                      </a:solidFill>
+                      <a:prstDash val="solid"/>
+                      <a:round/>
+                      <a:headEnd len="sm" w="sm" type="none"/>
+                      <a:tailEnd len="sm" w="sm" type="none"/>
+                    </a:lnB>
+                  </a:tcPr>
+                </a:tc>
+                <a:tc>
+                  <a:txBody>
+                    <a:bodyPr/>
+                    <a:lstStyle/>
+                    <a:p>
+                      <a:pPr indent="0" lvl="0" marL="0" rtl="0" algn="l">
+                        <a:lnSpc>
+                          <a:spcPct val="115000"/>
+                        </a:lnSpc>
+                        <a:spcBef>
+                          <a:spcPts val="0"/>
+                        </a:spcBef>
+                        <a:spcAft>
+                          <a:spcPts val="0"/>
+                        </a:spcAft>
+                        <a:buNone/>
+                      </a:pPr>
+                      <a:r>
+                        <a:rPr lang="es-CL"/>
+                        <a:t>Sistema web + móvil integrado, dashboard, reglas, QR y flujo punta a punta probado</a:t>
+                      </a:r>
+                      <a:endParaRPr/>
+                    </a:p>
+                  </a:txBody>
+                  <a:tcPr marT="91425" marB="91425" marR="28575" marL="28575" anchor="b">
+                    <a:lnL cap="flat" cmpd="sng" w="9525">
+                      <a:solidFill>
+                        <a:srgbClr val="CCCCCC"/>
+                      </a:solidFill>
+                      <a:prstDash val="solid"/>
+                      <a:round/>
+                      <a:headEnd len="sm" w="sm" type="none"/>
+                      <a:tailEnd len="sm" w="sm" type="none"/>
+                    </a:lnL>
+                    <a:lnR cap="flat" cmpd="sng" w="9525">
+                      <a:solidFill>
+                        <a:srgbClr val="CCCCCC"/>
+                      </a:solidFill>
+                      <a:prstDash val="solid"/>
+                      <a:round/>
+                      <a:headEnd len="sm" w="sm" type="none"/>
+                      <a:tailEnd len="sm" w="sm" type="none"/>
+                    </a:lnR>
+                    <a:lnT cap="flat" cmpd="sng" w="9525">
+                      <a:solidFill>
+                        <a:srgbClr val="CCCCCC"/>
+                      </a:solidFill>
+                      <a:prstDash val="solid"/>
+                      <a:round/>
+                      <a:headEnd len="sm" w="sm" type="none"/>
+                      <a:tailEnd len="sm" w="sm" type="none"/>
+                    </a:lnT>
+                    <a:lnB cap="flat" cmpd="sng" w="9525">
+                      <a:solidFill>
+                        <a:srgbClr val="CCCCCC"/>
+                      </a:solidFill>
+                      <a:prstDash val="solid"/>
+                      <a:round/>
+                      <a:headEnd len="sm" w="sm" type="none"/>
+                      <a:tailEnd len="sm" w="sm" type="none"/>
+                    </a:lnB>
+                  </a:tcPr>
+                </a:tc>
+              </a:tr>
+              <a:tr h="228600">
+                <a:tc>
+                  <a:txBody>
+                    <a:bodyPr/>
+                    <a:lstStyle/>
+                    <a:p>
+                      <a:pPr indent="0" lvl="0" marL="0" rtl="0" algn="l">
+                        <a:lnSpc>
+                          <a:spcPct val="115000"/>
+                        </a:lnSpc>
+                        <a:spcBef>
+                          <a:spcPts val="0"/>
+                        </a:spcBef>
+                        <a:spcAft>
+                          <a:spcPts val="0"/>
+                        </a:spcAft>
+                        <a:buNone/>
+                      </a:pPr>
+                      <a:r>
+                        <a:rPr lang="es-CL"/>
+                        <a:t>24/11</a:t>
+                      </a:r>
+                      <a:endParaRPr/>
+                    </a:p>
+                  </a:txBody>
+                  <a:tcPr marT="91425" marB="91425" marR="28575" marL="28575" anchor="b">
+                    <a:lnL cap="flat" cmpd="sng" w="9525">
+                      <a:solidFill>
+                        <a:srgbClr val="CCCCCC"/>
+                      </a:solidFill>
+                      <a:prstDash val="solid"/>
+                      <a:round/>
+                      <a:headEnd len="sm" w="sm" type="none"/>
+                      <a:tailEnd len="sm" w="sm" type="none"/>
+                    </a:lnL>
+                    <a:lnR cap="flat" cmpd="sng" w="9525">
+                      <a:solidFill>
+                        <a:srgbClr val="CCCCCC"/>
+                      </a:solidFill>
+                      <a:prstDash val="solid"/>
+                      <a:round/>
+                      <a:headEnd len="sm" w="sm" type="none"/>
+                      <a:tailEnd len="sm" w="sm" type="none"/>
+                    </a:lnR>
+                    <a:lnT cap="flat" cmpd="sng" w="9525">
+                      <a:solidFill>
+                        <a:srgbClr val="CCCCCC"/>
+                      </a:solidFill>
+                      <a:prstDash val="solid"/>
+                      <a:round/>
+                      <a:headEnd len="sm" w="sm" type="none"/>
+                      <a:tailEnd len="sm" w="sm" type="none"/>
+                    </a:lnT>
+                    <a:lnB cap="flat" cmpd="sng" w="9525">
+                      <a:solidFill>
+                        <a:srgbClr val="CCCCCC"/>
+                      </a:solidFill>
+                      <a:prstDash val="solid"/>
+                      <a:round/>
+                      <a:headEnd len="sm" w="sm" type="none"/>
+                      <a:tailEnd len="sm" w="sm" type="none"/>
+                    </a:lnB>
+                  </a:tcPr>
+                </a:tc>
+                <a:tc>
+                  <a:txBody>
+                    <a:bodyPr/>
+                    <a:lstStyle/>
+                    <a:p>
+                      <a:pPr indent="0" lvl="0" marL="0" rtl="0" algn="l">
+                        <a:lnSpc>
+                          <a:spcPct val="115000"/>
+                        </a:lnSpc>
+                        <a:spcBef>
+                          <a:spcPts val="0"/>
+                        </a:spcBef>
+                        <a:spcAft>
+                          <a:spcPts val="0"/>
+                        </a:spcAft>
+                        <a:buNone/>
+                      </a:pPr>
+                      <a:r>
+                        <a:rPr lang="es-CL"/>
+                        <a:t>Portafolio final</a:t>
+                      </a:r>
+                      <a:endParaRPr/>
+                    </a:p>
+                  </a:txBody>
+                  <a:tcPr marT="91425" marB="91425" marR="28575" marL="28575" anchor="b">
+                    <a:lnL cap="flat" cmpd="sng" w="9525">
+                      <a:solidFill>
+                        <a:srgbClr val="CCCCCC"/>
+                      </a:solidFill>
+                      <a:prstDash val="solid"/>
+                      <a:round/>
+                      <a:headEnd len="sm" w="sm" type="none"/>
+                      <a:tailEnd len="sm" w="sm" type="none"/>
+                    </a:lnL>
+                    <a:lnR cap="flat" cmpd="sng" w="9525">
+                      <a:solidFill>
+                        <a:srgbClr val="CCCCCC"/>
+                      </a:solidFill>
+                      <a:prstDash val="solid"/>
+                      <a:round/>
+                      <a:headEnd len="sm" w="sm" type="none"/>
+                      <a:tailEnd len="sm" w="sm" type="none"/>
+                    </a:lnR>
+                    <a:lnT cap="flat" cmpd="sng" w="9525">
+                      <a:solidFill>
+                        <a:srgbClr val="CCCCCC"/>
+                      </a:solidFill>
+                      <a:prstDash val="solid"/>
+                      <a:round/>
+                      <a:headEnd len="sm" w="sm" type="none"/>
+                      <a:tailEnd len="sm" w="sm" type="none"/>
+                    </a:lnT>
+                    <a:lnB cap="flat" cmpd="sng" w="9525">
+                      <a:solidFill>
+                        <a:srgbClr val="CCCCCC"/>
+                      </a:solidFill>
+                      <a:prstDash val="solid"/>
+                      <a:round/>
+                      <a:headEnd len="sm" w="sm" type="none"/>
+                      <a:tailEnd len="sm" w="sm" type="none"/>
+                    </a:lnB>
+                  </a:tcPr>
+                </a:tc>
+                <a:tc>
+                  <a:txBody>
+                    <a:bodyPr/>
+                    <a:lstStyle/>
+                    <a:p>
+                      <a:pPr indent="0" lvl="0" marL="0" rtl="0" algn="l">
+                        <a:lnSpc>
+                          <a:spcPct val="115000"/>
+                        </a:lnSpc>
+                        <a:spcBef>
+                          <a:spcPts val="0"/>
+                        </a:spcBef>
+                        <a:spcAft>
+                          <a:spcPts val="0"/>
+                        </a:spcAft>
+                        <a:buNone/>
+                      </a:pPr>
+                      <a:r>
+                        <a:rPr lang="es-CL"/>
+                        <a:t>Sistema final + documentación + despliegue</a:t>
+                      </a:r>
+                      <a:endParaRPr/>
+                    </a:p>
+                  </a:txBody>
+                  <a:tcPr marT="91425" marB="91425" marR="28575" marL="28575" anchor="b">
+                    <a:lnL cap="flat" cmpd="sng" w="9525">
+                      <a:solidFill>
+                        <a:srgbClr val="CCCCCC"/>
+                      </a:solidFill>
+                      <a:prstDash val="solid"/>
+                      <a:round/>
+                      <a:headEnd len="sm" w="sm" type="none"/>
+                      <a:tailEnd len="sm" w="sm" type="none"/>
+                    </a:lnL>
+                    <a:lnR cap="flat" cmpd="sng" w="9525">
+                      <a:solidFill>
+                        <a:srgbClr val="CCCCCC"/>
+                      </a:solidFill>
+                      <a:prstDash val="solid"/>
+                      <a:round/>
+                      <a:headEnd len="sm" w="sm" type="none"/>
+                      <a:tailEnd len="sm" w="sm" type="none"/>
+                    </a:lnR>
+                    <a:lnT cap="flat" cmpd="sng" w="9525">
+                      <a:solidFill>
+                        <a:srgbClr val="CCCCCC"/>
+                      </a:solidFill>
+                      <a:prstDash val="solid"/>
+                      <a:round/>
+                      <a:headEnd len="sm" w="sm" type="none"/>
+                      <a:tailEnd len="sm" w="sm" type="none"/>
+                    </a:lnT>
+                    <a:lnB cap="flat" cmpd="sng" w="9525">
+                      <a:solidFill>
+                        <a:srgbClr val="CCCCCC"/>
+                      </a:solidFill>
+                      <a:prstDash val="solid"/>
+                      <a:round/>
+                      <a:headEnd len="sm" w="sm" type="none"/>
+                      <a:tailEnd len="sm" w="sm" type="none"/>
+                    </a:lnB>
+                  </a:tcPr>
+                </a:tc>
+              </a:tr>
+            </a:tbl>
+          </a:graphicData>
+        </a:graphic>
+      </p:graphicFrame>
     </p:spTree>
   </p:cSld>
   <p:clrMapOvr>
